--- a/design/templates/papyrus-olive/template.pptx
+++ b/design/templates/papyrus-olive/template.pptx
@@ -126,7 +126,7 @@
           <p:cNvPr id="9" name="creative_background">
             <a:extLst>
               <a:ext uri="{FF2B5EF4-FFF2-40B4-BE49-F238E27FC236}">
-                <a16:creationId xmlns:a16="http://schemas.microsoft.com/office/drawing/2014/main" id="{41113F42-0103-1FB9-B52C-99DA13F68623}"/>
+                <a16:creationId xmlns:a16="http://schemas.microsoft.com/office/drawing/2014/main" id="{28A5D8D3-22B8-298D-171D-6A36F483D4B8}"/>
               </a:ext>
             </a:extLst>
           </p:cNvPr>
@@ -290,7 +290,7 @@
             </a:lvl1pPr>
           </a:lstStyle>
           <a:p>
-            <a:fld id="{10ED7D75-8BCA-4792-8B33-188BE8B045C9}" type="datetimeFigureOut">
+            <a:fld id="{C5DDA866-DF04-4AEF-ADD4-8AFF018326A8}" type="datetimeFigureOut">
               <a:rPr lang="en-US" smtClean="0"/>
               <a:t>10/3/2026</a:t>
             </a:fld>
@@ -332,7 +332,7 @@
           <a:bodyPr/>
           <a:lstStyle/>
           <a:p>
-            <a:fld id="{EDD050AF-432A-42B3-B4EC-757E823036E9}" type="slidenum">
+            <a:fld id="{B3BADF7A-34E3-4F53-BB65-9FE23DA90D0C}" type="slidenum">
               <a:rPr lang="en-US" smtClean="0"/>
               <a:t>‹#›</a:t>
             </a:fld>
@@ -343,7 +343,7 @@
     </p:spTree>
     <p:extLst>
       <p:ext uri="{BB962C8B-B14F-4D97-AF65-F5344CB8AC3E}">
-        <p14:creationId xmlns:p14="http://schemas.microsoft.com/office/powerpoint/2010/main" val="893352701"/>
+        <p14:creationId xmlns:p14="http://schemas.microsoft.com/office/powerpoint/2010/main" val="1127057768"/>
       </p:ext>
     </p:extLst>
   </p:cSld>
@@ -375,7 +375,7 @@
           <p:cNvPr id="7" name="creative_background">
             <a:extLst>
               <a:ext uri="{FF2B5EF4-FFF2-40B4-BE49-F238E27FC236}">
-                <a16:creationId xmlns:a16="http://schemas.microsoft.com/office/drawing/2014/main" id="{2ACF91A0-2BE8-96B8-0A40-B35C1114910C}"/>
+                <a16:creationId xmlns:a16="http://schemas.microsoft.com/office/drawing/2014/main" id="{B6F03BD5-0413-1019-0EC4-94ADE428CA95}"/>
               </a:ext>
             </a:extLst>
           </p:cNvPr>
@@ -448,7 +448,7 @@
           <a:bodyPr/>
           <a:lstStyle/>
           <a:p>
-            <a:fld id="{10ED7D75-8BCA-4792-8B33-188BE8B045C9}" type="datetimeFigureOut">
+            <a:fld id="{C5DDA866-DF04-4AEF-ADD4-8AFF018326A8}" type="datetimeFigureOut">
               <a:rPr lang="en-US" smtClean="0"/>
               <a:t>10/3/2026</a:t>
             </a:fld>
@@ -490,7 +490,7 @@
           <a:bodyPr/>
           <a:lstStyle/>
           <a:p>
-            <a:fld id="{EDD050AF-432A-42B3-B4EC-757E823036E9}" type="slidenum">
+            <a:fld id="{B3BADF7A-34E3-4F53-BB65-9FE23DA90D0C}" type="slidenum">
               <a:rPr lang="en-US" smtClean="0"/>
               <a:t>‹#›</a:t>
             </a:fld>
@@ -503,7 +503,7 @@
           <p:cNvPr id="8" name="body">
             <a:extLst>
               <a:ext uri="{FF2B5EF4-FFF2-40B4-BE49-F238E27FC236}">
-                <a16:creationId xmlns:a16="http://schemas.microsoft.com/office/drawing/2014/main" id="{6C02D011-AABB-7BF9-0819-6E6152D45014}"/>
+                <a16:creationId xmlns:a16="http://schemas.microsoft.com/office/drawing/2014/main" id="{3A3EEF01-6002-54A9-EA86-307409E23881}"/>
               </a:ext>
             </a:extLst>
           </p:cNvPr>
@@ -543,7 +543,7 @@
           <p:cNvPr id="9" name="source">
             <a:extLst>
               <a:ext uri="{FF2B5EF4-FFF2-40B4-BE49-F238E27FC236}">
-                <a16:creationId xmlns:a16="http://schemas.microsoft.com/office/drawing/2014/main" id="{BFE6F932-451F-066E-41ED-BED9293C923C}"/>
+                <a16:creationId xmlns:a16="http://schemas.microsoft.com/office/drawing/2014/main" id="{33D68747-A6C0-A229-2741-1D50A85C2FBB}"/>
               </a:ext>
             </a:extLst>
           </p:cNvPr>
@@ -598,7 +598,7 @@
     </p:spTree>
     <p:extLst>
       <p:ext uri="{BB962C8B-B14F-4D97-AF65-F5344CB8AC3E}">
-        <p14:creationId xmlns:p14="http://schemas.microsoft.com/office/powerpoint/2010/main" val="123266660"/>
+        <p14:creationId xmlns:p14="http://schemas.microsoft.com/office/powerpoint/2010/main" val="2736986148"/>
       </p:ext>
     </p:extLst>
   </p:cSld>
@@ -630,7 +630,7 @@
           <p:cNvPr id="7" name="creative_background">
             <a:extLst>
               <a:ext uri="{FF2B5EF4-FFF2-40B4-BE49-F238E27FC236}">
-                <a16:creationId xmlns:a16="http://schemas.microsoft.com/office/drawing/2014/main" id="{6113AC3F-402B-6EAB-DCDE-64975576CDC0}"/>
+                <a16:creationId xmlns:a16="http://schemas.microsoft.com/office/drawing/2014/main" id="{050ACB82-067E-551F-E440-8BF07EDD2CAD}"/>
               </a:ext>
             </a:extLst>
           </p:cNvPr>
@@ -703,7 +703,7 @@
           <a:bodyPr/>
           <a:lstStyle/>
           <a:p>
-            <a:fld id="{10ED7D75-8BCA-4792-8B33-188BE8B045C9}" type="datetimeFigureOut">
+            <a:fld id="{C5DDA866-DF04-4AEF-ADD4-8AFF018326A8}" type="datetimeFigureOut">
               <a:rPr lang="en-US" smtClean="0"/>
               <a:t>10/3/2026</a:t>
             </a:fld>
@@ -745,7 +745,7 @@
           <a:bodyPr/>
           <a:lstStyle/>
           <a:p>
-            <a:fld id="{EDD050AF-432A-42B3-B4EC-757E823036E9}" type="slidenum">
+            <a:fld id="{B3BADF7A-34E3-4F53-BB65-9FE23DA90D0C}" type="slidenum">
               <a:rPr lang="en-US" smtClean="0"/>
               <a:t>‹#›</a:t>
             </a:fld>
@@ -758,7 +758,7 @@
           <p:cNvPr id="8" name="body">
             <a:extLst>
               <a:ext uri="{FF2B5EF4-FFF2-40B4-BE49-F238E27FC236}">
-                <a16:creationId xmlns:a16="http://schemas.microsoft.com/office/drawing/2014/main" id="{AD0208E6-6AA9-4C8C-B143-0C66823197D3}"/>
+                <a16:creationId xmlns:a16="http://schemas.microsoft.com/office/drawing/2014/main" id="{69AFDEF1-FDDC-B751-9508-94249A86736D}"/>
               </a:ext>
             </a:extLst>
           </p:cNvPr>
@@ -801,7 +801,7 @@
     </p:spTree>
     <p:extLst>
       <p:ext uri="{BB962C8B-B14F-4D97-AF65-F5344CB8AC3E}">
-        <p14:creationId xmlns:p14="http://schemas.microsoft.com/office/powerpoint/2010/main" val="3973461691"/>
+        <p14:creationId xmlns:p14="http://schemas.microsoft.com/office/powerpoint/2010/main" val="1361852175"/>
       </p:ext>
     </p:extLst>
   </p:cSld>
@@ -877,7 +877,7 @@
           <p:cNvPr id="6" name="section_number">
             <a:extLst>
               <a:ext uri="{FF2B5EF4-FFF2-40B4-BE49-F238E27FC236}">
-                <a16:creationId xmlns:a16="http://schemas.microsoft.com/office/drawing/2014/main" id="{A2D82D93-5502-2711-148E-BA304C5D291E}"/>
+                <a16:creationId xmlns:a16="http://schemas.microsoft.com/office/drawing/2014/main" id="{D8BD0806-345B-D6AA-B72F-DCF1CB6A7C8C}"/>
               </a:ext>
             </a:extLst>
           </p:cNvPr>
@@ -909,7 +909,7 @@
               <a:buFontTx/>
               <a:buNone/>
               <a:defRPr sz="16000" b="1">
-                <a:ln w="19050">
+                <a:ln w="57150">
                   <a:solidFill>
                     <a:srgbClr val="BA9251"/>
                   </a:solidFill>
@@ -933,7 +933,7 @@
           <p:cNvPr id="7" name="subtitle">
             <a:extLst>
               <a:ext uri="{FF2B5EF4-FFF2-40B4-BE49-F238E27FC236}">
-                <a16:creationId xmlns:a16="http://schemas.microsoft.com/office/drawing/2014/main" id="{3E3F4364-715A-285C-F309-7E9D36835054}"/>
+                <a16:creationId xmlns:a16="http://schemas.microsoft.com/office/drawing/2014/main" id="{FD0A2719-2ED6-62AB-0748-45900E622990}"/>
               </a:ext>
             </a:extLst>
           </p:cNvPr>
@@ -985,7 +985,7 @@
           <p:cNvPr id="8" name="divider_rule">
             <a:extLst>
               <a:ext uri="{FF2B5EF4-FFF2-40B4-BE49-F238E27FC236}">
-                <a16:creationId xmlns:a16="http://schemas.microsoft.com/office/drawing/2014/main" id="{A9351CA0-3E2D-DF21-FFCE-660B67046AFF}"/>
+                <a16:creationId xmlns:a16="http://schemas.microsoft.com/office/drawing/2014/main" id="{0218BF31-2EEC-FEFB-82DB-982541C952B6}"/>
               </a:ext>
             </a:extLst>
           </p:cNvPr>
@@ -1032,7 +1032,7 @@
           <p:cNvPr id="9" name="divider_rule">
             <a:extLst>
               <a:ext uri="{FF2B5EF4-FFF2-40B4-BE49-F238E27FC236}">
-                <a16:creationId xmlns:a16="http://schemas.microsoft.com/office/drawing/2014/main" id="{C987059D-C48A-A691-CA45-29FA32DDD164}"/>
+                <a16:creationId xmlns:a16="http://schemas.microsoft.com/office/drawing/2014/main" id="{E8038842-BBB7-558B-3C86-FA899E18D370}"/>
               </a:ext>
             </a:extLst>
           </p:cNvPr>
@@ -1079,7 +1079,7 @@
           <p:cNvPr id="10" name="divider_rule">
             <a:extLst>
               <a:ext uri="{FF2B5EF4-FFF2-40B4-BE49-F238E27FC236}">
-                <a16:creationId xmlns:a16="http://schemas.microsoft.com/office/drawing/2014/main" id="{0C0B933C-F41E-D473-FEEE-FD77058DDFE1}"/>
+                <a16:creationId xmlns:a16="http://schemas.microsoft.com/office/drawing/2014/main" id="{740F7BA7-C22D-A2F4-165F-6B48D3916BCD}"/>
               </a:ext>
             </a:extLst>
           </p:cNvPr>
@@ -1124,7 +1124,7 @@
     </p:spTree>
     <p:extLst>
       <p:ext uri="{BB962C8B-B14F-4D97-AF65-F5344CB8AC3E}">
-        <p14:creationId xmlns:p14="http://schemas.microsoft.com/office/powerpoint/2010/main" val="1915997429"/>
+        <p14:creationId xmlns:p14="http://schemas.microsoft.com/office/powerpoint/2010/main" val="1419388540"/>
       </p:ext>
     </p:extLst>
   </p:cSld>
@@ -1156,7 +1156,7 @@
           <p:cNvPr id="7" name="creative_background">
             <a:extLst>
               <a:ext uri="{FF2B5EF4-FFF2-40B4-BE49-F238E27FC236}">
-                <a16:creationId xmlns:a16="http://schemas.microsoft.com/office/drawing/2014/main" id="{04C15105-4C8C-25B3-72E4-2335E04C85FA}"/>
+                <a16:creationId xmlns:a16="http://schemas.microsoft.com/office/drawing/2014/main" id="{B8F95A41-2581-B0D3-6632-45AF20052C71}"/>
               </a:ext>
             </a:extLst>
           </p:cNvPr>
@@ -1229,7 +1229,7 @@
           <a:bodyPr/>
           <a:lstStyle/>
           <a:p>
-            <a:fld id="{10ED7D75-8BCA-4792-8B33-188BE8B045C9}" type="datetimeFigureOut">
+            <a:fld id="{C5DDA866-DF04-4AEF-ADD4-8AFF018326A8}" type="datetimeFigureOut">
               <a:rPr lang="en-US" smtClean="0"/>
               <a:t>10/3/2026</a:t>
             </a:fld>
@@ -1271,7 +1271,7 @@
           <a:bodyPr/>
           <a:lstStyle/>
           <a:p>
-            <a:fld id="{EDD050AF-432A-42B3-B4EC-757E823036E9}" type="slidenum">
+            <a:fld id="{B3BADF7A-34E3-4F53-BB65-9FE23DA90D0C}" type="slidenum">
               <a:rPr lang="en-US" smtClean="0"/>
               <a:t>‹#›</a:t>
             </a:fld>
@@ -1284,7 +1284,7 @@
           <p:cNvPr id="8" name="item_1_title">
             <a:extLst>
               <a:ext uri="{FF2B5EF4-FFF2-40B4-BE49-F238E27FC236}">
-                <a16:creationId xmlns:a16="http://schemas.microsoft.com/office/drawing/2014/main" id="{3F42042A-7473-FFD3-00FE-E37B3FFBCD60}"/>
+                <a16:creationId xmlns:a16="http://schemas.microsoft.com/office/drawing/2014/main" id="{FDE0C346-BB37-A1F7-DCFE-05F56B010788}"/>
               </a:ext>
             </a:extLst>
           </p:cNvPr>
@@ -1334,7 +1334,7 @@
           <p:cNvPr id="9" name="item_1">
             <a:extLst>
               <a:ext uri="{FF2B5EF4-FFF2-40B4-BE49-F238E27FC236}">
-                <a16:creationId xmlns:a16="http://schemas.microsoft.com/office/drawing/2014/main" id="{9D9784EC-0635-2F3B-AAD8-A50D23590554}"/>
+                <a16:creationId xmlns:a16="http://schemas.microsoft.com/office/drawing/2014/main" id="{AFD353FE-8E8F-3E26-3520-AA6A1FD96190}"/>
               </a:ext>
             </a:extLst>
           </p:cNvPr>
@@ -1382,7 +1382,7 @@
           <p:cNvPr id="10" name="item_2_title">
             <a:extLst>
               <a:ext uri="{FF2B5EF4-FFF2-40B4-BE49-F238E27FC236}">
-                <a16:creationId xmlns:a16="http://schemas.microsoft.com/office/drawing/2014/main" id="{B6836596-5738-DAD3-1DC9-219508490B76}"/>
+                <a16:creationId xmlns:a16="http://schemas.microsoft.com/office/drawing/2014/main" id="{5C1C7D9E-E481-DC28-A76B-F44E8F3EFC64}"/>
               </a:ext>
             </a:extLst>
           </p:cNvPr>
@@ -1435,7 +1435,7 @@
           <p:cNvPr id="11" name="item_2">
             <a:extLst>
               <a:ext uri="{FF2B5EF4-FFF2-40B4-BE49-F238E27FC236}">
-                <a16:creationId xmlns:a16="http://schemas.microsoft.com/office/drawing/2014/main" id="{317F6BDE-7823-2412-1DFC-472A67693512}"/>
+                <a16:creationId xmlns:a16="http://schemas.microsoft.com/office/drawing/2014/main" id="{89F7A827-8F1B-DD44-32EF-95642EA45943}"/>
               </a:ext>
             </a:extLst>
           </p:cNvPr>
@@ -1483,7 +1483,7 @@
           <p:cNvPr id="12" name="item_3_title">
             <a:extLst>
               <a:ext uri="{FF2B5EF4-FFF2-40B4-BE49-F238E27FC236}">
-                <a16:creationId xmlns:a16="http://schemas.microsoft.com/office/drawing/2014/main" id="{2C3C5429-FDF8-7B76-2FF7-4A327B4372EE}"/>
+                <a16:creationId xmlns:a16="http://schemas.microsoft.com/office/drawing/2014/main" id="{FC9172BF-3E59-FD09-DE0E-1C5678AB9F64}"/>
               </a:ext>
             </a:extLst>
           </p:cNvPr>
@@ -1536,7 +1536,7 @@
           <p:cNvPr id="13" name="item_3">
             <a:extLst>
               <a:ext uri="{FF2B5EF4-FFF2-40B4-BE49-F238E27FC236}">
-                <a16:creationId xmlns:a16="http://schemas.microsoft.com/office/drawing/2014/main" id="{500A39B3-03B7-2A06-B605-0E678E44F951}"/>
+                <a16:creationId xmlns:a16="http://schemas.microsoft.com/office/drawing/2014/main" id="{7E3F584D-3276-B5AB-B325-2E971FA05D52}"/>
               </a:ext>
             </a:extLst>
           </p:cNvPr>
@@ -1584,7 +1584,7 @@
           <p:cNvPr id="14" name="item_4_title">
             <a:extLst>
               <a:ext uri="{FF2B5EF4-FFF2-40B4-BE49-F238E27FC236}">
-                <a16:creationId xmlns:a16="http://schemas.microsoft.com/office/drawing/2014/main" id="{4171D8C0-A115-D91D-AF8C-9CD21FA3DBE6}"/>
+                <a16:creationId xmlns:a16="http://schemas.microsoft.com/office/drawing/2014/main" id="{52F6837B-C8C5-B721-E7B7-CDD597B4EB9F}"/>
               </a:ext>
             </a:extLst>
           </p:cNvPr>
@@ -1637,7 +1637,7 @@
           <p:cNvPr id="15" name="item_4">
             <a:extLst>
               <a:ext uri="{FF2B5EF4-FFF2-40B4-BE49-F238E27FC236}">
-                <a16:creationId xmlns:a16="http://schemas.microsoft.com/office/drawing/2014/main" id="{F3119B7B-9CCA-9F1A-4135-BFE7D58C7E52}"/>
+                <a16:creationId xmlns:a16="http://schemas.microsoft.com/office/drawing/2014/main" id="{124D8A2D-4148-370A-0C21-6FFB9213D107}"/>
               </a:ext>
             </a:extLst>
           </p:cNvPr>
@@ -1685,7 +1685,7 @@
           <p:cNvPr id="16" name="source">
             <a:extLst>
               <a:ext uri="{FF2B5EF4-FFF2-40B4-BE49-F238E27FC236}">
-                <a16:creationId xmlns:a16="http://schemas.microsoft.com/office/drawing/2014/main" id="{09257A96-F813-8D81-A7F2-4CCF771058E7}"/>
+                <a16:creationId xmlns:a16="http://schemas.microsoft.com/office/drawing/2014/main" id="{A5BB4514-AE89-126F-28D6-E46664A4B0F9}"/>
               </a:ext>
             </a:extLst>
           </p:cNvPr>
@@ -1740,7 +1740,7 @@
     </p:spTree>
     <p:extLst>
       <p:ext uri="{BB962C8B-B14F-4D97-AF65-F5344CB8AC3E}">
-        <p14:creationId xmlns:p14="http://schemas.microsoft.com/office/powerpoint/2010/main" val="2160662501"/>
+        <p14:creationId xmlns:p14="http://schemas.microsoft.com/office/powerpoint/2010/main" val="1296535755"/>
       </p:ext>
     </p:extLst>
   </p:cSld>
@@ -1772,7 +1772,7 @@
           <p:cNvPr id="7" name="creative_background">
             <a:extLst>
               <a:ext uri="{FF2B5EF4-FFF2-40B4-BE49-F238E27FC236}">
-                <a16:creationId xmlns:a16="http://schemas.microsoft.com/office/drawing/2014/main" id="{EF9313DC-976E-38EE-B7C5-72EF2EB92EC2}"/>
+                <a16:creationId xmlns:a16="http://schemas.microsoft.com/office/drawing/2014/main" id="{1E135178-CF95-5C1C-DC34-86D505E161D7}"/>
               </a:ext>
             </a:extLst>
           </p:cNvPr>
@@ -1845,7 +1845,7 @@
           <a:bodyPr/>
           <a:lstStyle/>
           <a:p>
-            <a:fld id="{10ED7D75-8BCA-4792-8B33-188BE8B045C9}" type="datetimeFigureOut">
+            <a:fld id="{C5DDA866-DF04-4AEF-ADD4-8AFF018326A8}" type="datetimeFigureOut">
               <a:rPr lang="en-US" smtClean="0"/>
               <a:t>10/3/2026</a:t>
             </a:fld>
@@ -1887,7 +1887,7 @@
           <a:bodyPr/>
           <a:lstStyle/>
           <a:p>
-            <a:fld id="{EDD050AF-432A-42B3-B4EC-757E823036E9}" type="slidenum">
+            <a:fld id="{B3BADF7A-34E3-4F53-BB65-9FE23DA90D0C}" type="slidenum">
               <a:rPr lang="en-US" smtClean="0"/>
               <a:t>‹#›</a:t>
             </a:fld>
@@ -1900,7 +1900,7 @@
           <p:cNvPr id="8" name="body">
             <a:extLst>
               <a:ext uri="{FF2B5EF4-FFF2-40B4-BE49-F238E27FC236}">
-                <a16:creationId xmlns:a16="http://schemas.microsoft.com/office/drawing/2014/main" id="{F54BD338-4A25-DB0F-C474-31457BF51B33}"/>
+                <a16:creationId xmlns:a16="http://schemas.microsoft.com/office/drawing/2014/main" id="{8B1C0A8F-220E-EAF6-55C0-0352B1A0B096}"/>
               </a:ext>
             </a:extLst>
           </p:cNvPr>
@@ -1945,7 +1945,7 @@
           <p:cNvPr id="9" name="source">
             <a:extLst>
               <a:ext uri="{FF2B5EF4-FFF2-40B4-BE49-F238E27FC236}">
-                <a16:creationId xmlns:a16="http://schemas.microsoft.com/office/drawing/2014/main" id="{F1EF8D9A-3B4D-CE54-4F8F-50EE6DCD0DD1}"/>
+                <a16:creationId xmlns:a16="http://schemas.microsoft.com/office/drawing/2014/main" id="{51776F08-0ECA-21C7-01F7-61BE65C553D5}"/>
               </a:ext>
             </a:extLst>
           </p:cNvPr>
@@ -2000,7 +2000,7 @@
     </p:spTree>
     <p:extLst>
       <p:ext uri="{BB962C8B-B14F-4D97-AF65-F5344CB8AC3E}">
-        <p14:creationId xmlns:p14="http://schemas.microsoft.com/office/powerpoint/2010/main" val="3794721871"/>
+        <p14:creationId xmlns:p14="http://schemas.microsoft.com/office/powerpoint/2010/main" val="3445989977"/>
       </p:ext>
     </p:extLst>
   </p:cSld>
@@ -2032,7 +2032,7 @@
           <p:cNvPr id="7" name="creative_background">
             <a:extLst>
               <a:ext uri="{FF2B5EF4-FFF2-40B4-BE49-F238E27FC236}">
-                <a16:creationId xmlns:a16="http://schemas.microsoft.com/office/drawing/2014/main" id="{8CF24849-1334-F08A-6E22-1C02F6D06956}"/>
+                <a16:creationId xmlns:a16="http://schemas.microsoft.com/office/drawing/2014/main" id="{BD1AEE64-246E-A0DA-58B1-631AB7C148E2}"/>
               </a:ext>
             </a:extLst>
           </p:cNvPr>
@@ -2105,7 +2105,7 @@
           <a:bodyPr/>
           <a:lstStyle/>
           <a:p>
-            <a:fld id="{10ED7D75-8BCA-4792-8B33-188BE8B045C9}" type="datetimeFigureOut">
+            <a:fld id="{C5DDA866-DF04-4AEF-ADD4-8AFF018326A8}" type="datetimeFigureOut">
               <a:rPr lang="en-US" smtClean="0"/>
               <a:t>10/3/2026</a:t>
             </a:fld>
@@ -2147,7 +2147,7 @@
           <a:bodyPr/>
           <a:lstStyle/>
           <a:p>
-            <a:fld id="{EDD050AF-432A-42B3-B4EC-757E823036E9}" type="slidenum">
+            <a:fld id="{B3BADF7A-34E3-4F53-BB65-9FE23DA90D0C}" type="slidenum">
               <a:rPr lang="en-US" smtClean="0"/>
               <a:t>‹#›</a:t>
             </a:fld>
@@ -2160,7 +2160,7 @@
           <p:cNvPr id="8" name="item_1_title">
             <a:extLst>
               <a:ext uri="{FF2B5EF4-FFF2-40B4-BE49-F238E27FC236}">
-                <a16:creationId xmlns:a16="http://schemas.microsoft.com/office/drawing/2014/main" id="{7A8C7E20-6A37-02AE-FE41-BF485DCC632C}"/>
+                <a16:creationId xmlns:a16="http://schemas.microsoft.com/office/drawing/2014/main" id="{F9ECD2B2-9283-3794-9C07-A434BBEBDBB2}"/>
               </a:ext>
             </a:extLst>
           </p:cNvPr>
@@ -2210,7 +2210,7 @@
           <p:cNvPr id="9" name="item_1">
             <a:extLst>
               <a:ext uri="{FF2B5EF4-FFF2-40B4-BE49-F238E27FC236}">
-                <a16:creationId xmlns:a16="http://schemas.microsoft.com/office/drawing/2014/main" id="{B3F6819B-A561-71A9-8CC9-FCADEAD475EF}"/>
+                <a16:creationId xmlns:a16="http://schemas.microsoft.com/office/drawing/2014/main" id="{B8B02962-AB03-1A70-9993-40F1828F9CA8}"/>
               </a:ext>
             </a:extLst>
           </p:cNvPr>
@@ -2258,7 +2258,7 @@
           <p:cNvPr id="10" name="item_2_title">
             <a:extLst>
               <a:ext uri="{FF2B5EF4-FFF2-40B4-BE49-F238E27FC236}">
-                <a16:creationId xmlns:a16="http://schemas.microsoft.com/office/drawing/2014/main" id="{2AA3E790-ECE9-7ED6-BDD9-499D81FFFC18}"/>
+                <a16:creationId xmlns:a16="http://schemas.microsoft.com/office/drawing/2014/main" id="{79D1F66B-70B4-BAE4-6AD7-534CAA506BC0}"/>
               </a:ext>
             </a:extLst>
           </p:cNvPr>
@@ -2311,7 +2311,7 @@
           <p:cNvPr id="11" name="item_2">
             <a:extLst>
               <a:ext uri="{FF2B5EF4-FFF2-40B4-BE49-F238E27FC236}">
-                <a16:creationId xmlns:a16="http://schemas.microsoft.com/office/drawing/2014/main" id="{EE6B341C-8DC9-A439-9A95-C524F01AB18D}"/>
+                <a16:creationId xmlns:a16="http://schemas.microsoft.com/office/drawing/2014/main" id="{04A1A06F-0E1E-4035-3968-B47316900B2F}"/>
               </a:ext>
             </a:extLst>
           </p:cNvPr>
@@ -2359,7 +2359,7 @@
           <p:cNvPr id="12" name="item_3_title">
             <a:extLst>
               <a:ext uri="{FF2B5EF4-FFF2-40B4-BE49-F238E27FC236}">
-                <a16:creationId xmlns:a16="http://schemas.microsoft.com/office/drawing/2014/main" id="{073BC8CD-76B8-9C9F-7B02-EFE04BB73F30}"/>
+                <a16:creationId xmlns:a16="http://schemas.microsoft.com/office/drawing/2014/main" id="{2DD2DE4F-BA24-1511-32FF-EBB0CBFF18B0}"/>
               </a:ext>
             </a:extLst>
           </p:cNvPr>
@@ -2412,7 +2412,7 @@
           <p:cNvPr id="13" name="item_3">
             <a:extLst>
               <a:ext uri="{FF2B5EF4-FFF2-40B4-BE49-F238E27FC236}">
-                <a16:creationId xmlns:a16="http://schemas.microsoft.com/office/drawing/2014/main" id="{DC32428F-F705-71F5-DBC7-7B96FEDB24D2}"/>
+                <a16:creationId xmlns:a16="http://schemas.microsoft.com/office/drawing/2014/main" id="{9C0E8256-0C35-C993-EFC3-7AC8C0674B7E}"/>
               </a:ext>
             </a:extLst>
           </p:cNvPr>
@@ -2460,7 +2460,7 @@
           <p:cNvPr id="14" name="item_4_title">
             <a:extLst>
               <a:ext uri="{FF2B5EF4-FFF2-40B4-BE49-F238E27FC236}">
-                <a16:creationId xmlns:a16="http://schemas.microsoft.com/office/drawing/2014/main" id="{C7E9B52B-FFDA-F287-7DC3-32FCA25AFCE6}"/>
+                <a16:creationId xmlns:a16="http://schemas.microsoft.com/office/drawing/2014/main" id="{160D68BE-A20F-3334-D587-CCB05FB60C42}"/>
               </a:ext>
             </a:extLst>
           </p:cNvPr>
@@ -2513,7 +2513,7 @@
           <p:cNvPr id="15" name="item_4">
             <a:extLst>
               <a:ext uri="{FF2B5EF4-FFF2-40B4-BE49-F238E27FC236}">
-                <a16:creationId xmlns:a16="http://schemas.microsoft.com/office/drawing/2014/main" id="{F16E0CEF-F171-9CA2-6B61-3E0554C8B90D}"/>
+                <a16:creationId xmlns:a16="http://schemas.microsoft.com/office/drawing/2014/main" id="{14739726-0F18-1653-DE92-8B2254A54C93}"/>
               </a:ext>
             </a:extLst>
           </p:cNvPr>
@@ -2561,7 +2561,7 @@
           <p:cNvPr id="16" name="source">
             <a:extLst>
               <a:ext uri="{FF2B5EF4-FFF2-40B4-BE49-F238E27FC236}">
-                <a16:creationId xmlns:a16="http://schemas.microsoft.com/office/drawing/2014/main" id="{60CECFEC-E212-62C5-0701-42B7388D00E7}"/>
+                <a16:creationId xmlns:a16="http://schemas.microsoft.com/office/drawing/2014/main" id="{52CB817C-3299-B1B7-E9C1-784ADC40A5F0}"/>
               </a:ext>
             </a:extLst>
           </p:cNvPr>
@@ -2616,7 +2616,7 @@
     </p:spTree>
     <p:extLst>
       <p:ext uri="{BB962C8B-B14F-4D97-AF65-F5344CB8AC3E}">
-        <p14:creationId xmlns:p14="http://schemas.microsoft.com/office/powerpoint/2010/main" val="640710527"/>
+        <p14:creationId xmlns:p14="http://schemas.microsoft.com/office/powerpoint/2010/main" val="3514568092"/>
       </p:ext>
     </p:extLst>
   </p:cSld>
@@ -2648,7 +2648,7 @@
           <p:cNvPr id="7" name="creative_background">
             <a:extLst>
               <a:ext uri="{FF2B5EF4-FFF2-40B4-BE49-F238E27FC236}">
-                <a16:creationId xmlns:a16="http://schemas.microsoft.com/office/drawing/2014/main" id="{23A9FC44-051D-8FA6-5259-13EE9DB9DBD5}"/>
+                <a16:creationId xmlns:a16="http://schemas.microsoft.com/office/drawing/2014/main" id="{C1BF9CD3-B8B9-3137-3114-CE026A5ADBA8}"/>
               </a:ext>
             </a:extLst>
           </p:cNvPr>
@@ -2721,7 +2721,7 @@
           <a:bodyPr/>
           <a:lstStyle/>
           <a:p>
-            <a:fld id="{10ED7D75-8BCA-4792-8B33-188BE8B045C9}" type="datetimeFigureOut">
+            <a:fld id="{C5DDA866-DF04-4AEF-ADD4-8AFF018326A8}" type="datetimeFigureOut">
               <a:rPr lang="en-US" smtClean="0"/>
               <a:t>10/3/2026</a:t>
             </a:fld>
@@ -2763,7 +2763,7 @@
           <a:bodyPr/>
           <a:lstStyle/>
           <a:p>
-            <a:fld id="{EDD050AF-432A-42B3-B4EC-757E823036E9}" type="slidenum">
+            <a:fld id="{B3BADF7A-34E3-4F53-BB65-9FE23DA90D0C}" type="slidenum">
               <a:rPr lang="en-US" smtClean="0"/>
               <a:t>‹#›</a:t>
             </a:fld>
@@ -2776,7 +2776,7 @@
           <p:cNvPr id="8" name="body">
             <a:extLst>
               <a:ext uri="{FF2B5EF4-FFF2-40B4-BE49-F238E27FC236}">
-                <a16:creationId xmlns:a16="http://schemas.microsoft.com/office/drawing/2014/main" id="{4E088F21-3769-4C0E-7BBA-7C970B1F4FC8}"/>
+                <a16:creationId xmlns:a16="http://schemas.microsoft.com/office/drawing/2014/main" id="{9F6DCE20-4282-3D02-545A-1D19FACDFBD2}"/>
               </a:ext>
             </a:extLst>
           </p:cNvPr>
@@ -2816,7 +2816,7 @@
           <p:cNvPr id="9" name="kpi_value_1">
             <a:extLst>
               <a:ext uri="{FF2B5EF4-FFF2-40B4-BE49-F238E27FC236}">
-                <a16:creationId xmlns:a16="http://schemas.microsoft.com/office/drawing/2014/main" id="{36E6A9C6-7578-5B27-4F0B-6D13C7D5080D}"/>
+                <a16:creationId xmlns:a16="http://schemas.microsoft.com/office/drawing/2014/main" id="{20FC2C31-5803-B1EF-81E1-7C8AEE745F0C}"/>
               </a:ext>
             </a:extLst>
           </p:cNvPr>
@@ -2869,7 +2869,7 @@
           <p:cNvPr id="10" name="kpi_label_1">
             <a:extLst>
               <a:ext uri="{FF2B5EF4-FFF2-40B4-BE49-F238E27FC236}">
-                <a16:creationId xmlns:a16="http://schemas.microsoft.com/office/drawing/2014/main" id="{B2D4D756-06C8-B2AB-3A57-2D197D8B3319}"/>
+                <a16:creationId xmlns:a16="http://schemas.microsoft.com/office/drawing/2014/main" id="{04D2E11E-4DCC-B6C2-D13B-50659851C684}"/>
               </a:ext>
             </a:extLst>
           </p:cNvPr>
@@ -2917,7 +2917,7 @@
           <p:cNvPr id="11" name="source">
             <a:extLst>
               <a:ext uri="{FF2B5EF4-FFF2-40B4-BE49-F238E27FC236}">
-                <a16:creationId xmlns:a16="http://schemas.microsoft.com/office/drawing/2014/main" id="{7A1D7695-16E6-7DC8-BFA1-A74A2DC08368}"/>
+                <a16:creationId xmlns:a16="http://schemas.microsoft.com/office/drawing/2014/main" id="{B82D0E9E-E2ED-4088-CD27-CDF85DD58A39}"/>
               </a:ext>
             </a:extLst>
           </p:cNvPr>
@@ -2972,7 +2972,7 @@
     </p:spTree>
     <p:extLst>
       <p:ext uri="{BB962C8B-B14F-4D97-AF65-F5344CB8AC3E}">
-        <p14:creationId xmlns:p14="http://schemas.microsoft.com/office/powerpoint/2010/main" val="3055188047"/>
+        <p14:creationId xmlns:p14="http://schemas.microsoft.com/office/powerpoint/2010/main" val="2842017667"/>
       </p:ext>
     </p:extLst>
   </p:cSld>
@@ -3004,7 +3004,7 @@
           <p:cNvPr id="7" name="creative_background">
             <a:extLst>
               <a:ext uri="{FF2B5EF4-FFF2-40B4-BE49-F238E27FC236}">
-                <a16:creationId xmlns:a16="http://schemas.microsoft.com/office/drawing/2014/main" id="{287E6A50-07F5-4512-8101-32FF78A89288}"/>
+                <a16:creationId xmlns:a16="http://schemas.microsoft.com/office/drawing/2014/main" id="{CE5A9272-20C9-53EB-FF04-28E31805165B}"/>
               </a:ext>
             </a:extLst>
           </p:cNvPr>
@@ -3077,7 +3077,7 @@
           <a:bodyPr/>
           <a:lstStyle/>
           <a:p>
-            <a:fld id="{10ED7D75-8BCA-4792-8B33-188BE8B045C9}" type="datetimeFigureOut">
+            <a:fld id="{C5DDA866-DF04-4AEF-ADD4-8AFF018326A8}" type="datetimeFigureOut">
               <a:rPr lang="en-US" smtClean="0"/>
               <a:t>10/3/2026</a:t>
             </a:fld>
@@ -3119,7 +3119,7 @@
           <a:bodyPr/>
           <a:lstStyle/>
           <a:p>
-            <a:fld id="{EDD050AF-432A-42B3-B4EC-757E823036E9}" type="slidenum">
+            <a:fld id="{B3BADF7A-34E3-4F53-BB65-9FE23DA90D0C}" type="slidenum">
               <a:rPr lang="en-US" smtClean="0"/>
               <a:t>‹#›</a:t>
             </a:fld>
@@ -3132,7 +3132,7 @@
           <p:cNvPr id="8" name="body">
             <a:extLst>
               <a:ext uri="{FF2B5EF4-FFF2-40B4-BE49-F238E27FC236}">
-                <a16:creationId xmlns:a16="http://schemas.microsoft.com/office/drawing/2014/main" id="{454305C6-05C5-EAED-E04F-0FBA4CEAF98D}"/>
+                <a16:creationId xmlns:a16="http://schemas.microsoft.com/office/drawing/2014/main" id="{EF15FF1C-195B-8534-29EC-DD7F12BC4EBC}"/>
               </a:ext>
             </a:extLst>
           </p:cNvPr>
@@ -3172,7 +3172,7 @@
           <p:cNvPr id="9" name="kpi_value_1">
             <a:extLst>
               <a:ext uri="{FF2B5EF4-FFF2-40B4-BE49-F238E27FC236}">
-                <a16:creationId xmlns:a16="http://schemas.microsoft.com/office/drawing/2014/main" id="{2BE65C1D-3409-4FA8-AF96-7E3E01E0CA05}"/>
+                <a16:creationId xmlns:a16="http://schemas.microsoft.com/office/drawing/2014/main" id="{D11485A4-C786-335A-9C42-5662E96BF0D6}"/>
               </a:ext>
             </a:extLst>
           </p:cNvPr>
@@ -3225,7 +3225,7 @@
           <p:cNvPr id="10" name="kpi_label_1">
             <a:extLst>
               <a:ext uri="{FF2B5EF4-FFF2-40B4-BE49-F238E27FC236}">
-                <a16:creationId xmlns:a16="http://schemas.microsoft.com/office/drawing/2014/main" id="{99841234-E920-54C0-15EC-6D0407E11B92}"/>
+                <a16:creationId xmlns:a16="http://schemas.microsoft.com/office/drawing/2014/main" id="{A2C200B6-A447-D1B0-6DB1-462E42795A0E}"/>
               </a:ext>
             </a:extLst>
           </p:cNvPr>
@@ -3273,7 +3273,7 @@
           <p:cNvPr id="11" name="kpi_value_2">
             <a:extLst>
               <a:ext uri="{FF2B5EF4-FFF2-40B4-BE49-F238E27FC236}">
-                <a16:creationId xmlns:a16="http://schemas.microsoft.com/office/drawing/2014/main" id="{C80008BA-396A-34E1-C8C4-5DF25FB5F84C}"/>
+                <a16:creationId xmlns:a16="http://schemas.microsoft.com/office/drawing/2014/main" id="{43C76429-6A1F-7CE7-AB97-49B3C61ACFBA}"/>
               </a:ext>
             </a:extLst>
           </p:cNvPr>
@@ -3326,7 +3326,7 @@
           <p:cNvPr id="12" name="kpi_label_2">
             <a:extLst>
               <a:ext uri="{FF2B5EF4-FFF2-40B4-BE49-F238E27FC236}">
-                <a16:creationId xmlns:a16="http://schemas.microsoft.com/office/drawing/2014/main" id="{D5BE4218-84B7-46ED-FBED-1990FFF6A2DE}"/>
+                <a16:creationId xmlns:a16="http://schemas.microsoft.com/office/drawing/2014/main" id="{5A545BF1-60A6-4A9D-67EF-6FA3012DC4EB}"/>
               </a:ext>
             </a:extLst>
           </p:cNvPr>
@@ -3374,7 +3374,7 @@
           <p:cNvPr id="13" name="kpi_value_3">
             <a:extLst>
               <a:ext uri="{FF2B5EF4-FFF2-40B4-BE49-F238E27FC236}">
-                <a16:creationId xmlns:a16="http://schemas.microsoft.com/office/drawing/2014/main" id="{07C3055A-B25C-9656-202A-682F26EB9975}"/>
+                <a16:creationId xmlns:a16="http://schemas.microsoft.com/office/drawing/2014/main" id="{45654B90-B05E-410B-FF88-3A9562CCE0DC}"/>
               </a:ext>
             </a:extLst>
           </p:cNvPr>
@@ -3427,7 +3427,7 @@
           <p:cNvPr id="14" name="kpi_label_3">
             <a:extLst>
               <a:ext uri="{FF2B5EF4-FFF2-40B4-BE49-F238E27FC236}">
-                <a16:creationId xmlns:a16="http://schemas.microsoft.com/office/drawing/2014/main" id="{A1E4CC16-9E9B-A143-DB69-C92C09EBCCED}"/>
+                <a16:creationId xmlns:a16="http://schemas.microsoft.com/office/drawing/2014/main" id="{486EF39B-898B-71C3-F1FE-F45C64A8C84A}"/>
               </a:ext>
             </a:extLst>
           </p:cNvPr>
@@ -3475,7 +3475,7 @@
           <p:cNvPr id="15" name="kpi_value_4">
             <a:extLst>
               <a:ext uri="{FF2B5EF4-FFF2-40B4-BE49-F238E27FC236}">
-                <a16:creationId xmlns:a16="http://schemas.microsoft.com/office/drawing/2014/main" id="{DAEC246B-1517-4857-69E2-B23D6478397E}"/>
+                <a16:creationId xmlns:a16="http://schemas.microsoft.com/office/drawing/2014/main" id="{71674B4D-2DA5-C288-796A-38591692049F}"/>
               </a:ext>
             </a:extLst>
           </p:cNvPr>
@@ -3528,7 +3528,7 @@
           <p:cNvPr id="16" name="kpi_label_4">
             <a:extLst>
               <a:ext uri="{FF2B5EF4-FFF2-40B4-BE49-F238E27FC236}">
-                <a16:creationId xmlns:a16="http://schemas.microsoft.com/office/drawing/2014/main" id="{1178FC08-DCE4-E4CA-92F7-AE4D8A2A4658}"/>
+                <a16:creationId xmlns:a16="http://schemas.microsoft.com/office/drawing/2014/main" id="{52AB1C7D-CD2F-949A-FBC9-639EAD64B08E}"/>
               </a:ext>
             </a:extLst>
           </p:cNvPr>
@@ -3576,7 +3576,7 @@
           <p:cNvPr id="17" name="source">
             <a:extLst>
               <a:ext uri="{FF2B5EF4-FFF2-40B4-BE49-F238E27FC236}">
-                <a16:creationId xmlns:a16="http://schemas.microsoft.com/office/drawing/2014/main" id="{F9390A7C-BB5C-98B3-4AB9-C44D55672550}"/>
+                <a16:creationId xmlns:a16="http://schemas.microsoft.com/office/drawing/2014/main" id="{BA147568-E5AB-005A-9598-09FF93AB6946}"/>
               </a:ext>
             </a:extLst>
           </p:cNvPr>
@@ -3631,7 +3631,7 @@
     </p:spTree>
     <p:extLst>
       <p:ext uri="{BB962C8B-B14F-4D97-AF65-F5344CB8AC3E}">
-        <p14:creationId xmlns:p14="http://schemas.microsoft.com/office/powerpoint/2010/main" val="4099002859"/>
+        <p14:creationId xmlns:p14="http://schemas.microsoft.com/office/powerpoint/2010/main" val="1947574649"/>
       </p:ext>
     </p:extLst>
   </p:cSld>
@@ -3663,7 +3663,7 @@
           <p:cNvPr id="7" name="creative_background">
             <a:extLst>
               <a:ext uri="{FF2B5EF4-FFF2-40B4-BE49-F238E27FC236}">
-                <a16:creationId xmlns:a16="http://schemas.microsoft.com/office/drawing/2014/main" id="{2888AF29-745E-44CC-D877-1E6E234D54CC}"/>
+                <a16:creationId xmlns:a16="http://schemas.microsoft.com/office/drawing/2014/main" id="{428AA623-1FBF-145E-1A7A-1C5454257E99}"/>
               </a:ext>
             </a:extLst>
           </p:cNvPr>
@@ -3736,7 +3736,7 @@
           <a:bodyPr/>
           <a:lstStyle/>
           <a:p>
-            <a:fld id="{10ED7D75-8BCA-4792-8B33-188BE8B045C9}" type="datetimeFigureOut">
+            <a:fld id="{C5DDA866-DF04-4AEF-ADD4-8AFF018326A8}" type="datetimeFigureOut">
               <a:rPr lang="en-US" smtClean="0"/>
               <a:t>10/3/2026</a:t>
             </a:fld>
@@ -3778,7 +3778,7 @@
           <a:bodyPr/>
           <a:lstStyle/>
           <a:p>
-            <a:fld id="{EDD050AF-432A-42B3-B4EC-757E823036E9}" type="slidenum">
+            <a:fld id="{B3BADF7A-34E3-4F53-BB65-9FE23DA90D0C}" type="slidenum">
               <a:rPr lang="en-US" smtClean="0"/>
               <a:t>‹#›</a:t>
             </a:fld>
@@ -3791,7 +3791,7 @@
           <p:cNvPr id="8" name="body">
             <a:extLst>
               <a:ext uri="{FF2B5EF4-FFF2-40B4-BE49-F238E27FC236}">
-                <a16:creationId xmlns:a16="http://schemas.microsoft.com/office/drawing/2014/main" id="{29B980CA-FA26-8F63-98CC-12DF490AEA79}"/>
+                <a16:creationId xmlns:a16="http://schemas.microsoft.com/office/drawing/2014/main" id="{47857655-78C6-DE2F-3D72-3DF00C9CCD8F}"/>
               </a:ext>
             </a:extLst>
           </p:cNvPr>
@@ -3831,7 +3831,7 @@
           <p:cNvPr id="9" name="kpi_value_1">
             <a:extLst>
               <a:ext uri="{FF2B5EF4-FFF2-40B4-BE49-F238E27FC236}">
-                <a16:creationId xmlns:a16="http://schemas.microsoft.com/office/drawing/2014/main" id="{20374B39-A3A3-E7C5-DC43-94F102BDF195}"/>
+                <a16:creationId xmlns:a16="http://schemas.microsoft.com/office/drawing/2014/main" id="{772F1255-0F4B-9C16-D33C-1016124848DC}"/>
               </a:ext>
             </a:extLst>
           </p:cNvPr>
@@ -3884,7 +3884,7 @@
           <p:cNvPr id="10" name="kpi_label_1">
             <a:extLst>
               <a:ext uri="{FF2B5EF4-FFF2-40B4-BE49-F238E27FC236}">
-                <a16:creationId xmlns:a16="http://schemas.microsoft.com/office/drawing/2014/main" id="{B35B5CB2-A2AD-8CA1-0AB4-5916004AD1DD}"/>
+                <a16:creationId xmlns:a16="http://schemas.microsoft.com/office/drawing/2014/main" id="{E2C3540C-6B38-DF2C-5B55-61DAACADA107}"/>
               </a:ext>
             </a:extLst>
           </p:cNvPr>
@@ -3932,7 +3932,7 @@
           <p:cNvPr id="11" name="kpi_value_2">
             <a:extLst>
               <a:ext uri="{FF2B5EF4-FFF2-40B4-BE49-F238E27FC236}">
-                <a16:creationId xmlns:a16="http://schemas.microsoft.com/office/drawing/2014/main" id="{F2D1D074-CB36-FA97-4567-10B788D4B6DF}"/>
+                <a16:creationId xmlns:a16="http://schemas.microsoft.com/office/drawing/2014/main" id="{7D4B79C7-CC15-F3AB-81C5-A4A9EC076319}"/>
               </a:ext>
             </a:extLst>
           </p:cNvPr>
@@ -3985,7 +3985,7 @@
           <p:cNvPr id="12" name="kpi_label_2">
             <a:extLst>
               <a:ext uri="{FF2B5EF4-FFF2-40B4-BE49-F238E27FC236}">
-                <a16:creationId xmlns:a16="http://schemas.microsoft.com/office/drawing/2014/main" id="{BAFB7447-5BE1-1397-394A-23FBA596A24F}"/>
+                <a16:creationId xmlns:a16="http://schemas.microsoft.com/office/drawing/2014/main" id="{86A807D7-6C85-4D5F-EC14-98C076185A81}"/>
               </a:ext>
             </a:extLst>
           </p:cNvPr>
@@ -4033,7 +4033,7 @@
           <p:cNvPr id="13" name="source">
             <a:extLst>
               <a:ext uri="{FF2B5EF4-FFF2-40B4-BE49-F238E27FC236}">
-                <a16:creationId xmlns:a16="http://schemas.microsoft.com/office/drawing/2014/main" id="{D26711C8-369E-7ADE-420F-00F761FAEF3B}"/>
+                <a16:creationId xmlns:a16="http://schemas.microsoft.com/office/drawing/2014/main" id="{CB49C547-D6D6-F9CC-7BB8-F718F1037B36}"/>
               </a:ext>
             </a:extLst>
           </p:cNvPr>
@@ -4088,7 +4088,7 @@
     </p:spTree>
     <p:extLst>
       <p:ext uri="{BB962C8B-B14F-4D97-AF65-F5344CB8AC3E}">
-        <p14:creationId xmlns:p14="http://schemas.microsoft.com/office/powerpoint/2010/main" val="3075663148"/>
+        <p14:creationId xmlns:p14="http://schemas.microsoft.com/office/powerpoint/2010/main" val="3556163834"/>
       </p:ext>
     </p:extLst>
   </p:cSld>
@@ -4120,7 +4120,7 @@
           <p:cNvPr id="7" name="creative_background">
             <a:extLst>
               <a:ext uri="{FF2B5EF4-FFF2-40B4-BE49-F238E27FC236}">
-                <a16:creationId xmlns:a16="http://schemas.microsoft.com/office/drawing/2014/main" id="{9DE16947-3C96-BE10-7BF7-2D4AD0011A39}"/>
+                <a16:creationId xmlns:a16="http://schemas.microsoft.com/office/drawing/2014/main" id="{C1FFD335-17A8-F556-1B17-6FB00C2A43F7}"/>
               </a:ext>
             </a:extLst>
           </p:cNvPr>
@@ -4193,7 +4193,7 @@
           <a:bodyPr/>
           <a:lstStyle/>
           <a:p>
-            <a:fld id="{10ED7D75-8BCA-4792-8B33-188BE8B045C9}" type="datetimeFigureOut">
+            <a:fld id="{C5DDA866-DF04-4AEF-ADD4-8AFF018326A8}" type="datetimeFigureOut">
               <a:rPr lang="en-US" smtClean="0"/>
               <a:t>10/3/2026</a:t>
             </a:fld>
@@ -4235,7 +4235,7 @@
           <a:bodyPr/>
           <a:lstStyle/>
           <a:p>
-            <a:fld id="{EDD050AF-432A-42B3-B4EC-757E823036E9}" type="slidenum">
+            <a:fld id="{B3BADF7A-34E3-4F53-BB65-9FE23DA90D0C}" type="slidenum">
               <a:rPr lang="en-US" smtClean="0"/>
               <a:t>‹#›</a:t>
             </a:fld>
@@ -4248,7 +4248,7 @@
           <p:cNvPr id="8" name="body">
             <a:extLst>
               <a:ext uri="{FF2B5EF4-FFF2-40B4-BE49-F238E27FC236}">
-                <a16:creationId xmlns:a16="http://schemas.microsoft.com/office/drawing/2014/main" id="{0591D5EB-A78E-D72A-8F64-CFC8D1B04343}"/>
+                <a16:creationId xmlns:a16="http://schemas.microsoft.com/office/drawing/2014/main" id="{F2F8F02E-8357-73C3-54D2-1BB52310E66E}"/>
               </a:ext>
             </a:extLst>
           </p:cNvPr>
@@ -4288,7 +4288,7 @@
           <p:cNvPr id="9" name="kpi_value_1">
             <a:extLst>
               <a:ext uri="{FF2B5EF4-FFF2-40B4-BE49-F238E27FC236}">
-                <a16:creationId xmlns:a16="http://schemas.microsoft.com/office/drawing/2014/main" id="{E1659F68-0014-F9B5-C618-7CB3B051BD5F}"/>
+                <a16:creationId xmlns:a16="http://schemas.microsoft.com/office/drawing/2014/main" id="{228636D9-6910-28AC-97ED-A2DD4D947AAD}"/>
               </a:ext>
             </a:extLst>
           </p:cNvPr>
@@ -4341,7 +4341,7 @@
           <p:cNvPr id="10" name="kpi_label_1">
             <a:extLst>
               <a:ext uri="{FF2B5EF4-FFF2-40B4-BE49-F238E27FC236}">
-                <a16:creationId xmlns:a16="http://schemas.microsoft.com/office/drawing/2014/main" id="{0AB94429-4B2B-AE64-7321-A1AD0A280271}"/>
+                <a16:creationId xmlns:a16="http://schemas.microsoft.com/office/drawing/2014/main" id="{FE7E6D2A-B463-C0FE-59C7-FDCA54E91D39}"/>
               </a:ext>
             </a:extLst>
           </p:cNvPr>
@@ -4389,7 +4389,7 @@
           <p:cNvPr id="11" name="kpi_value_2">
             <a:extLst>
               <a:ext uri="{FF2B5EF4-FFF2-40B4-BE49-F238E27FC236}">
-                <a16:creationId xmlns:a16="http://schemas.microsoft.com/office/drawing/2014/main" id="{08753A1B-1E07-269E-CC2F-D3679704C540}"/>
+                <a16:creationId xmlns:a16="http://schemas.microsoft.com/office/drawing/2014/main" id="{F79D7683-1E9D-E4CC-1A94-0B7103E6D442}"/>
               </a:ext>
             </a:extLst>
           </p:cNvPr>
@@ -4442,7 +4442,7 @@
           <p:cNvPr id="12" name="kpi_label_2">
             <a:extLst>
               <a:ext uri="{FF2B5EF4-FFF2-40B4-BE49-F238E27FC236}">
-                <a16:creationId xmlns:a16="http://schemas.microsoft.com/office/drawing/2014/main" id="{EA94974C-20D6-B60B-B896-1C24A4C8E7E1}"/>
+                <a16:creationId xmlns:a16="http://schemas.microsoft.com/office/drawing/2014/main" id="{ECAB2FBC-C26E-D1B0-CB82-13D8E47C4FB1}"/>
               </a:ext>
             </a:extLst>
           </p:cNvPr>
@@ -4490,7 +4490,7 @@
           <p:cNvPr id="13" name="kpi_value_3">
             <a:extLst>
               <a:ext uri="{FF2B5EF4-FFF2-40B4-BE49-F238E27FC236}">
-                <a16:creationId xmlns:a16="http://schemas.microsoft.com/office/drawing/2014/main" id="{BD98E7A0-F074-F35F-1694-C92A2EB5FF47}"/>
+                <a16:creationId xmlns:a16="http://schemas.microsoft.com/office/drawing/2014/main" id="{9E448A82-A923-3F9C-5285-383AFFD8B558}"/>
               </a:ext>
             </a:extLst>
           </p:cNvPr>
@@ -4543,7 +4543,7 @@
           <p:cNvPr id="14" name="kpi_label_3">
             <a:extLst>
               <a:ext uri="{FF2B5EF4-FFF2-40B4-BE49-F238E27FC236}">
-                <a16:creationId xmlns:a16="http://schemas.microsoft.com/office/drawing/2014/main" id="{B3A3F29E-2E70-C566-CB7D-19BE7F555FC6}"/>
+                <a16:creationId xmlns:a16="http://schemas.microsoft.com/office/drawing/2014/main" id="{B2764F01-FC4E-C804-B375-3A6A908A894E}"/>
               </a:ext>
             </a:extLst>
           </p:cNvPr>
@@ -4591,7 +4591,7 @@
           <p:cNvPr id="15" name="kpi_value_4">
             <a:extLst>
               <a:ext uri="{FF2B5EF4-FFF2-40B4-BE49-F238E27FC236}">
-                <a16:creationId xmlns:a16="http://schemas.microsoft.com/office/drawing/2014/main" id="{CFFF5C9A-A433-AC2F-9E7B-44651405FC5F}"/>
+                <a16:creationId xmlns:a16="http://schemas.microsoft.com/office/drawing/2014/main" id="{D50FC6B7-A4F0-34CC-5C97-1FB7E147A20C}"/>
               </a:ext>
             </a:extLst>
           </p:cNvPr>
@@ -4644,7 +4644,7 @@
           <p:cNvPr id="16" name="kpi_label_4">
             <a:extLst>
               <a:ext uri="{FF2B5EF4-FFF2-40B4-BE49-F238E27FC236}">
-                <a16:creationId xmlns:a16="http://schemas.microsoft.com/office/drawing/2014/main" id="{27E8F0CB-9966-2C01-663E-FD08C543DC35}"/>
+                <a16:creationId xmlns:a16="http://schemas.microsoft.com/office/drawing/2014/main" id="{AD4450FD-8FBE-46B5-315C-360E9E7B37DB}"/>
               </a:ext>
             </a:extLst>
           </p:cNvPr>
@@ -4692,7 +4692,7 @@
           <p:cNvPr id="17" name="source">
             <a:extLst>
               <a:ext uri="{FF2B5EF4-FFF2-40B4-BE49-F238E27FC236}">
-                <a16:creationId xmlns:a16="http://schemas.microsoft.com/office/drawing/2014/main" id="{7C1DE3E7-37EA-C8E8-0F58-3D8C52DDF000}"/>
+                <a16:creationId xmlns:a16="http://schemas.microsoft.com/office/drawing/2014/main" id="{8C3418F0-507A-9BF5-ED18-35F9D978411A}"/>
               </a:ext>
             </a:extLst>
           </p:cNvPr>
@@ -4747,7 +4747,7 @@
     </p:spTree>
     <p:extLst>
       <p:ext uri="{BB962C8B-B14F-4D97-AF65-F5344CB8AC3E}">
-        <p14:creationId xmlns:p14="http://schemas.microsoft.com/office/powerpoint/2010/main" val="163606917"/>
+        <p14:creationId xmlns:p14="http://schemas.microsoft.com/office/powerpoint/2010/main" val="2868259807"/>
       </p:ext>
     </p:extLst>
   </p:cSld>
@@ -4779,7 +4779,7 @@
           <p:cNvPr id="7" name="creative_background">
             <a:extLst>
               <a:ext uri="{FF2B5EF4-FFF2-40B4-BE49-F238E27FC236}">
-                <a16:creationId xmlns:a16="http://schemas.microsoft.com/office/drawing/2014/main" id="{C4129F8F-99A4-0E44-F189-F7DE0631415D}"/>
+                <a16:creationId xmlns:a16="http://schemas.microsoft.com/office/drawing/2014/main" id="{C1E32754-AD72-4423-B446-605BD51119B8}"/>
               </a:ext>
             </a:extLst>
           </p:cNvPr>
@@ -4852,7 +4852,7 @@
           <a:bodyPr/>
           <a:lstStyle/>
           <a:p>
-            <a:fld id="{10ED7D75-8BCA-4792-8B33-188BE8B045C9}" type="datetimeFigureOut">
+            <a:fld id="{C5DDA866-DF04-4AEF-ADD4-8AFF018326A8}" type="datetimeFigureOut">
               <a:rPr lang="en-US" smtClean="0"/>
               <a:t>10/3/2026</a:t>
             </a:fld>
@@ -4894,7 +4894,7 @@
           <a:bodyPr/>
           <a:lstStyle/>
           <a:p>
-            <a:fld id="{EDD050AF-432A-42B3-B4EC-757E823036E9}" type="slidenum">
+            <a:fld id="{B3BADF7A-34E3-4F53-BB65-9FE23DA90D0C}" type="slidenum">
               <a:rPr lang="en-US" smtClean="0"/>
               <a:t>‹#›</a:t>
             </a:fld>
@@ -4907,7 +4907,7 @@
           <p:cNvPr id="8" name="item_1_title">
             <a:extLst>
               <a:ext uri="{FF2B5EF4-FFF2-40B4-BE49-F238E27FC236}">
-                <a16:creationId xmlns:a16="http://schemas.microsoft.com/office/drawing/2014/main" id="{7AF65E89-D1FF-F6BF-0781-B1FB09856E56}"/>
+                <a16:creationId xmlns:a16="http://schemas.microsoft.com/office/drawing/2014/main" id="{D71674E9-B502-E4E3-87F6-ECFE3B644C42}"/>
               </a:ext>
             </a:extLst>
           </p:cNvPr>
@@ -4957,7 +4957,7 @@
           <p:cNvPr id="9" name="item_1">
             <a:extLst>
               <a:ext uri="{FF2B5EF4-FFF2-40B4-BE49-F238E27FC236}">
-                <a16:creationId xmlns:a16="http://schemas.microsoft.com/office/drawing/2014/main" id="{B9713993-81CA-4A85-5CA0-B4D01D2512FE}"/>
+                <a16:creationId xmlns:a16="http://schemas.microsoft.com/office/drawing/2014/main" id="{972EB0D4-CA56-A0F6-E172-F930F301760B}"/>
               </a:ext>
             </a:extLst>
           </p:cNvPr>
@@ -5005,7 +5005,7 @@
           <p:cNvPr id="10" name="item_2_title">
             <a:extLst>
               <a:ext uri="{FF2B5EF4-FFF2-40B4-BE49-F238E27FC236}">
-                <a16:creationId xmlns:a16="http://schemas.microsoft.com/office/drawing/2014/main" id="{49393C99-EC5D-90C8-BA92-9EE7E11604D9}"/>
+                <a16:creationId xmlns:a16="http://schemas.microsoft.com/office/drawing/2014/main" id="{C087C155-B973-6C3C-7E23-22E58E271EA3}"/>
               </a:ext>
             </a:extLst>
           </p:cNvPr>
@@ -5058,7 +5058,7 @@
           <p:cNvPr id="11" name="item_2">
             <a:extLst>
               <a:ext uri="{FF2B5EF4-FFF2-40B4-BE49-F238E27FC236}">
-                <a16:creationId xmlns:a16="http://schemas.microsoft.com/office/drawing/2014/main" id="{88457445-9F95-2A6A-39E9-88F10DA11A84}"/>
+                <a16:creationId xmlns:a16="http://schemas.microsoft.com/office/drawing/2014/main" id="{AC375A78-7C86-CFDA-7F4F-7140F2F5F023}"/>
               </a:ext>
             </a:extLst>
           </p:cNvPr>
@@ -5106,7 +5106,7 @@
           <p:cNvPr id="12" name="item_3_title">
             <a:extLst>
               <a:ext uri="{FF2B5EF4-FFF2-40B4-BE49-F238E27FC236}">
-                <a16:creationId xmlns:a16="http://schemas.microsoft.com/office/drawing/2014/main" id="{31598C20-CC5A-B53D-C705-AB11E90AA05E}"/>
+                <a16:creationId xmlns:a16="http://schemas.microsoft.com/office/drawing/2014/main" id="{1730C7AE-61A4-174F-FBD3-BD25936F6818}"/>
               </a:ext>
             </a:extLst>
           </p:cNvPr>
@@ -5159,7 +5159,7 @@
           <p:cNvPr id="13" name="item_3">
             <a:extLst>
               <a:ext uri="{FF2B5EF4-FFF2-40B4-BE49-F238E27FC236}">
-                <a16:creationId xmlns:a16="http://schemas.microsoft.com/office/drawing/2014/main" id="{734F34AD-8247-C57C-3E72-ABBFCF2BDD83}"/>
+                <a16:creationId xmlns:a16="http://schemas.microsoft.com/office/drawing/2014/main" id="{D228F514-0AC8-F1F2-7237-109A6CD74051}"/>
               </a:ext>
             </a:extLst>
           </p:cNvPr>
@@ -5207,7 +5207,7 @@
           <p:cNvPr id="14" name="item_4_title">
             <a:extLst>
               <a:ext uri="{FF2B5EF4-FFF2-40B4-BE49-F238E27FC236}">
-                <a16:creationId xmlns:a16="http://schemas.microsoft.com/office/drawing/2014/main" id="{07EDA047-7864-E46D-C520-2921475F3446}"/>
+                <a16:creationId xmlns:a16="http://schemas.microsoft.com/office/drawing/2014/main" id="{2871C8B2-76A6-62AE-3425-0579A9F6DCE3}"/>
               </a:ext>
             </a:extLst>
           </p:cNvPr>
@@ -5260,7 +5260,7 @@
           <p:cNvPr id="15" name="item_4">
             <a:extLst>
               <a:ext uri="{FF2B5EF4-FFF2-40B4-BE49-F238E27FC236}">
-                <a16:creationId xmlns:a16="http://schemas.microsoft.com/office/drawing/2014/main" id="{1EAF6E2D-52A7-89F1-04C0-D0F47B0E0988}"/>
+                <a16:creationId xmlns:a16="http://schemas.microsoft.com/office/drawing/2014/main" id="{71BCA380-A1B8-BFAB-8C82-1586A7E0D54D}"/>
               </a:ext>
             </a:extLst>
           </p:cNvPr>
@@ -5308,7 +5308,7 @@
           <p:cNvPr id="16" name="source">
             <a:extLst>
               <a:ext uri="{FF2B5EF4-FFF2-40B4-BE49-F238E27FC236}">
-                <a16:creationId xmlns:a16="http://schemas.microsoft.com/office/drawing/2014/main" id="{4DA16E7D-A1D9-AA6C-FF65-1653276BB829}"/>
+                <a16:creationId xmlns:a16="http://schemas.microsoft.com/office/drawing/2014/main" id="{5AF49936-8EDD-6993-12E7-A5BCB08719D4}"/>
               </a:ext>
             </a:extLst>
           </p:cNvPr>
@@ -5363,7 +5363,7 @@
     </p:spTree>
     <p:extLst>
       <p:ext uri="{BB962C8B-B14F-4D97-AF65-F5344CB8AC3E}">
-        <p14:creationId xmlns:p14="http://schemas.microsoft.com/office/powerpoint/2010/main" val="3393263733"/>
+        <p14:creationId xmlns:p14="http://schemas.microsoft.com/office/powerpoint/2010/main" val="471609012"/>
       </p:ext>
     </p:extLst>
   </p:cSld>
@@ -5395,7 +5395,7 @@
           <p:cNvPr id="7" name="creative_background">
             <a:extLst>
               <a:ext uri="{FF2B5EF4-FFF2-40B4-BE49-F238E27FC236}">
-                <a16:creationId xmlns:a16="http://schemas.microsoft.com/office/drawing/2014/main" id="{1A31172D-99B5-3507-DCAA-93B54E5642F3}"/>
+                <a16:creationId xmlns:a16="http://schemas.microsoft.com/office/drawing/2014/main" id="{4BE4611E-922D-BEE1-F6AD-ED8497788297}"/>
               </a:ext>
             </a:extLst>
           </p:cNvPr>
@@ -5468,7 +5468,7 @@
           <a:bodyPr/>
           <a:lstStyle/>
           <a:p>
-            <a:fld id="{10ED7D75-8BCA-4792-8B33-188BE8B045C9}" type="datetimeFigureOut">
+            <a:fld id="{C5DDA866-DF04-4AEF-ADD4-8AFF018326A8}" type="datetimeFigureOut">
               <a:rPr lang="en-US" smtClean="0"/>
               <a:t>10/3/2026</a:t>
             </a:fld>
@@ -5510,7 +5510,7 @@
           <a:bodyPr/>
           <a:lstStyle/>
           <a:p>
-            <a:fld id="{EDD050AF-432A-42B3-B4EC-757E823036E9}" type="slidenum">
+            <a:fld id="{B3BADF7A-34E3-4F53-BB65-9FE23DA90D0C}" type="slidenum">
               <a:rPr lang="en-US" smtClean="0"/>
               <a:t>‹#›</a:t>
             </a:fld>
@@ -5523,7 +5523,7 @@
           <p:cNvPr id="8" name="marker_1">
             <a:extLst>
               <a:ext uri="{FF2B5EF4-FFF2-40B4-BE49-F238E27FC236}">
-                <a16:creationId xmlns:a16="http://schemas.microsoft.com/office/drawing/2014/main" id="{5C2F2EFC-367E-B69D-6ACB-59F7156E64EC}"/>
+                <a16:creationId xmlns:a16="http://schemas.microsoft.com/office/drawing/2014/main" id="{2457897D-1D69-0959-EEA5-AC2567A63EB0}"/>
               </a:ext>
             </a:extLst>
           </p:cNvPr>
@@ -5579,7 +5579,7 @@
           <p:cNvPr id="9" name="item_1_title">
             <a:extLst>
               <a:ext uri="{FF2B5EF4-FFF2-40B4-BE49-F238E27FC236}">
-                <a16:creationId xmlns:a16="http://schemas.microsoft.com/office/drawing/2014/main" id="{8F8451C0-4FAB-A237-161C-B78F3ACA8B7B}"/>
+                <a16:creationId xmlns:a16="http://schemas.microsoft.com/office/drawing/2014/main" id="{F0142AEC-D8C9-730C-A05C-51C86BF77E20}"/>
               </a:ext>
             </a:extLst>
           </p:cNvPr>
@@ -5632,7 +5632,7 @@
           <p:cNvPr id="10" name="item_1">
             <a:extLst>
               <a:ext uri="{FF2B5EF4-FFF2-40B4-BE49-F238E27FC236}">
-                <a16:creationId xmlns:a16="http://schemas.microsoft.com/office/drawing/2014/main" id="{12504672-EA29-FF35-7D05-F53510E6C3BD}"/>
+                <a16:creationId xmlns:a16="http://schemas.microsoft.com/office/drawing/2014/main" id="{7FC939E9-8BC6-55E2-28E0-C05CE4946561}"/>
               </a:ext>
             </a:extLst>
           </p:cNvPr>
@@ -5680,7 +5680,7 @@
           <p:cNvPr id="11" name="marker_2">
             <a:extLst>
               <a:ext uri="{FF2B5EF4-FFF2-40B4-BE49-F238E27FC236}">
-                <a16:creationId xmlns:a16="http://schemas.microsoft.com/office/drawing/2014/main" id="{531750FB-ED1A-2298-31F2-1D3B0A6B4D02}"/>
+                <a16:creationId xmlns:a16="http://schemas.microsoft.com/office/drawing/2014/main" id="{C5C0400C-7C47-5DF1-4704-44F4459BBFE0}"/>
               </a:ext>
             </a:extLst>
           </p:cNvPr>
@@ -5736,7 +5736,7 @@
           <p:cNvPr id="12" name="item_2_title">
             <a:extLst>
               <a:ext uri="{FF2B5EF4-FFF2-40B4-BE49-F238E27FC236}">
-                <a16:creationId xmlns:a16="http://schemas.microsoft.com/office/drawing/2014/main" id="{E3CA37BB-D915-3B4E-F3BE-99D39B7A8A63}"/>
+                <a16:creationId xmlns:a16="http://schemas.microsoft.com/office/drawing/2014/main" id="{9BB8DD53-3B3A-D8CC-486B-88439D173F36}"/>
               </a:ext>
             </a:extLst>
           </p:cNvPr>
@@ -5789,7 +5789,7 @@
           <p:cNvPr id="13" name="item_2">
             <a:extLst>
               <a:ext uri="{FF2B5EF4-FFF2-40B4-BE49-F238E27FC236}">
-                <a16:creationId xmlns:a16="http://schemas.microsoft.com/office/drawing/2014/main" id="{E17FD7AB-5323-6AFB-F550-6491A1247941}"/>
+                <a16:creationId xmlns:a16="http://schemas.microsoft.com/office/drawing/2014/main" id="{24E9FF03-586E-FFE2-DFEE-5FCCF231F2BD}"/>
               </a:ext>
             </a:extLst>
           </p:cNvPr>
@@ -5837,7 +5837,7 @@
           <p:cNvPr id="14" name="source">
             <a:extLst>
               <a:ext uri="{FF2B5EF4-FFF2-40B4-BE49-F238E27FC236}">
-                <a16:creationId xmlns:a16="http://schemas.microsoft.com/office/drawing/2014/main" id="{CF19734B-04D6-D0F1-5F48-42CB3BF64FA0}"/>
+                <a16:creationId xmlns:a16="http://schemas.microsoft.com/office/drawing/2014/main" id="{DAB6B5E6-FE4E-9FC7-4071-4620902DC8EC}"/>
               </a:ext>
             </a:extLst>
           </p:cNvPr>
@@ -5892,7 +5892,7 @@
     </p:spTree>
     <p:extLst>
       <p:ext uri="{BB962C8B-B14F-4D97-AF65-F5344CB8AC3E}">
-        <p14:creationId xmlns:p14="http://schemas.microsoft.com/office/powerpoint/2010/main" val="1727640777"/>
+        <p14:creationId xmlns:p14="http://schemas.microsoft.com/office/powerpoint/2010/main" val="2971952321"/>
       </p:ext>
     </p:extLst>
   </p:cSld>
@@ -5924,7 +5924,7 @@
           <p:cNvPr id="7" name="creative_background">
             <a:extLst>
               <a:ext uri="{FF2B5EF4-FFF2-40B4-BE49-F238E27FC236}">
-                <a16:creationId xmlns:a16="http://schemas.microsoft.com/office/drawing/2014/main" id="{A9E354FC-6C6D-E674-23B0-032A7121357C}"/>
+                <a16:creationId xmlns:a16="http://schemas.microsoft.com/office/drawing/2014/main" id="{38985886-1A20-208F-51D6-25F4FB14E33F}"/>
               </a:ext>
             </a:extLst>
           </p:cNvPr>
@@ -5997,7 +5997,7 @@
           <a:bodyPr/>
           <a:lstStyle/>
           <a:p>
-            <a:fld id="{10ED7D75-8BCA-4792-8B33-188BE8B045C9}" type="datetimeFigureOut">
+            <a:fld id="{C5DDA866-DF04-4AEF-ADD4-8AFF018326A8}" type="datetimeFigureOut">
               <a:rPr lang="en-US" smtClean="0"/>
               <a:t>10/3/2026</a:t>
             </a:fld>
@@ -6039,7 +6039,7 @@
           <a:bodyPr/>
           <a:lstStyle/>
           <a:p>
-            <a:fld id="{EDD050AF-432A-42B3-B4EC-757E823036E9}" type="slidenum">
+            <a:fld id="{B3BADF7A-34E3-4F53-BB65-9FE23DA90D0C}" type="slidenum">
               <a:rPr lang="en-US" smtClean="0"/>
               <a:t>‹#›</a:t>
             </a:fld>
@@ -6052,7 +6052,7 @@
           <p:cNvPr id="8" name="item_1_title">
             <a:extLst>
               <a:ext uri="{FF2B5EF4-FFF2-40B4-BE49-F238E27FC236}">
-                <a16:creationId xmlns:a16="http://schemas.microsoft.com/office/drawing/2014/main" id="{59659368-1494-9909-2DBC-191B529C8F6A}"/>
+                <a16:creationId xmlns:a16="http://schemas.microsoft.com/office/drawing/2014/main" id="{54896430-D7AF-3B73-5230-55CD654BE0D3}"/>
               </a:ext>
             </a:extLst>
           </p:cNvPr>
@@ -6102,7 +6102,7 @@
           <p:cNvPr id="9" name="item_1">
             <a:extLst>
               <a:ext uri="{FF2B5EF4-FFF2-40B4-BE49-F238E27FC236}">
-                <a16:creationId xmlns:a16="http://schemas.microsoft.com/office/drawing/2014/main" id="{F9D3D4C1-354B-41FF-E66D-4C9AEED849B2}"/>
+                <a16:creationId xmlns:a16="http://schemas.microsoft.com/office/drawing/2014/main" id="{2D0E2FED-B6E7-9BD8-35E8-4570E6EDBF5D}"/>
               </a:ext>
             </a:extLst>
           </p:cNvPr>
@@ -6150,7 +6150,7 @@
           <p:cNvPr id="10" name="item_2_title">
             <a:extLst>
               <a:ext uri="{FF2B5EF4-FFF2-40B4-BE49-F238E27FC236}">
-                <a16:creationId xmlns:a16="http://schemas.microsoft.com/office/drawing/2014/main" id="{C12E4FA2-B2A2-703E-76D5-ABE436F07922}"/>
+                <a16:creationId xmlns:a16="http://schemas.microsoft.com/office/drawing/2014/main" id="{04E91C5A-FA3D-8695-170D-F21AC7027B63}"/>
               </a:ext>
             </a:extLst>
           </p:cNvPr>
@@ -6203,7 +6203,7 @@
           <p:cNvPr id="11" name="item_2">
             <a:extLst>
               <a:ext uri="{FF2B5EF4-FFF2-40B4-BE49-F238E27FC236}">
-                <a16:creationId xmlns:a16="http://schemas.microsoft.com/office/drawing/2014/main" id="{C7CCDB14-2EED-576D-FC03-C220394497FB}"/>
+                <a16:creationId xmlns:a16="http://schemas.microsoft.com/office/drawing/2014/main" id="{177EBE58-84AC-9DF4-37EE-5EBC4588C2B4}"/>
               </a:ext>
             </a:extLst>
           </p:cNvPr>
@@ -6251,7 +6251,7 @@
           <p:cNvPr id="12" name="item_3_title">
             <a:extLst>
               <a:ext uri="{FF2B5EF4-FFF2-40B4-BE49-F238E27FC236}">
-                <a16:creationId xmlns:a16="http://schemas.microsoft.com/office/drawing/2014/main" id="{61401E81-8ADC-F1E8-1744-F5FA65F37591}"/>
+                <a16:creationId xmlns:a16="http://schemas.microsoft.com/office/drawing/2014/main" id="{3A15C407-CD3D-1714-325B-899FE967FCB1}"/>
               </a:ext>
             </a:extLst>
           </p:cNvPr>
@@ -6304,7 +6304,7 @@
           <p:cNvPr id="13" name="item_3">
             <a:extLst>
               <a:ext uri="{FF2B5EF4-FFF2-40B4-BE49-F238E27FC236}">
-                <a16:creationId xmlns:a16="http://schemas.microsoft.com/office/drawing/2014/main" id="{435E1D32-E374-76D7-60FD-EA1AEE4264CA}"/>
+                <a16:creationId xmlns:a16="http://schemas.microsoft.com/office/drawing/2014/main" id="{C07A71B9-4E8E-6D6F-4D54-273922B9413C}"/>
               </a:ext>
             </a:extLst>
           </p:cNvPr>
@@ -6352,7 +6352,7 @@
           <p:cNvPr id="14" name="item_4_title">
             <a:extLst>
               <a:ext uri="{FF2B5EF4-FFF2-40B4-BE49-F238E27FC236}">
-                <a16:creationId xmlns:a16="http://schemas.microsoft.com/office/drawing/2014/main" id="{16867D90-E2C2-D56A-0876-29A10B142BAE}"/>
+                <a16:creationId xmlns:a16="http://schemas.microsoft.com/office/drawing/2014/main" id="{36BDB821-85B1-6E13-33C3-A2DDAFFBB4AD}"/>
               </a:ext>
             </a:extLst>
           </p:cNvPr>
@@ -6405,7 +6405,7 @@
           <p:cNvPr id="15" name="item_4">
             <a:extLst>
               <a:ext uri="{FF2B5EF4-FFF2-40B4-BE49-F238E27FC236}">
-                <a16:creationId xmlns:a16="http://schemas.microsoft.com/office/drawing/2014/main" id="{D891BFBB-B0E8-E5E4-5B94-9251FF9A775D}"/>
+                <a16:creationId xmlns:a16="http://schemas.microsoft.com/office/drawing/2014/main" id="{C7F5B5CC-CF6A-BA26-1984-00ECFABE0C46}"/>
               </a:ext>
             </a:extLst>
           </p:cNvPr>
@@ -6453,7 +6453,7 @@
           <p:cNvPr id="16" name="source">
             <a:extLst>
               <a:ext uri="{FF2B5EF4-FFF2-40B4-BE49-F238E27FC236}">
-                <a16:creationId xmlns:a16="http://schemas.microsoft.com/office/drawing/2014/main" id="{EF5BBA39-BBFD-0172-5D4B-DE83F87130AE}"/>
+                <a16:creationId xmlns:a16="http://schemas.microsoft.com/office/drawing/2014/main" id="{CB8AA93E-2583-55C6-BDEA-B4DCE0287CD1}"/>
               </a:ext>
             </a:extLst>
           </p:cNvPr>
@@ -6508,7 +6508,7 @@
     </p:spTree>
     <p:extLst>
       <p:ext uri="{BB962C8B-B14F-4D97-AF65-F5344CB8AC3E}">
-        <p14:creationId xmlns:p14="http://schemas.microsoft.com/office/powerpoint/2010/main" val="3063948419"/>
+        <p14:creationId xmlns:p14="http://schemas.microsoft.com/office/powerpoint/2010/main" val="7666695"/>
       </p:ext>
     </p:extLst>
   </p:cSld>
@@ -6540,7 +6540,7 @@
           <p:cNvPr id="7" name="creative_background">
             <a:extLst>
               <a:ext uri="{FF2B5EF4-FFF2-40B4-BE49-F238E27FC236}">
-                <a16:creationId xmlns:a16="http://schemas.microsoft.com/office/drawing/2014/main" id="{97A80702-9F0F-69C9-3D31-844496ED9BE1}"/>
+                <a16:creationId xmlns:a16="http://schemas.microsoft.com/office/drawing/2014/main" id="{DDA9D0B9-B170-3AE7-5027-5C064783F9DD}"/>
               </a:ext>
             </a:extLst>
           </p:cNvPr>
@@ -6613,7 +6613,7 @@
           <a:bodyPr/>
           <a:lstStyle/>
           <a:p>
-            <a:fld id="{10ED7D75-8BCA-4792-8B33-188BE8B045C9}" type="datetimeFigureOut">
+            <a:fld id="{C5DDA866-DF04-4AEF-ADD4-8AFF018326A8}" type="datetimeFigureOut">
               <a:rPr lang="en-US" smtClean="0"/>
               <a:t>10/3/2026</a:t>
             </a:fld>
@@ -6655,7 +6655,7 @@
           <a:bodyPr/>
           <a:lstStyle/>
           <a:p>
-            <a:fld id="{EDD050AF-432A-42B3-B4EC-757E823036E9}" type="slidenum">
+            <a:fld id="{B3BADF7A-34E3-4F53-BB65-9FE23DA90D0C}" type="slidenum">
               <a:rPr lang="en-US" smtClean="0"/>
               <a:t>‹#›</a:t>
             </a:fld>
@@ -6668,7 +6668,7 @@
           <p:cNvPr id="8" name="item_1_title">
             <a:extLst>
               <a:ext uri="{FF2B5EF4-FFF2-40B4-BE49-F238E27FC236}">
-                <a16:creationId xmlns:a16="http://schemas.microsoft.com/office/drawing/2014/main" id="{02280044-E4A1-A389-EB8C-A10A8B772935}"/>
+                <a16:creationId xmlns:a16="http://schemas.microsoft.com/office/drawing/2014/main" id="{E22DB2D2-C383-25E9-CF7A-1FADA04485FE}"/>
               </a:ext>
             </a:extLst>
           </p:cNvPr>
@@ -6718,7 +6718,7 @@
           <p:cNvPr id="9" name="item_1">
             <a:extLst>
               <a:ext uri="{FF2B5EF4-FFF2-40B4-BE49-F238E27FC236}">
-                <a16:creationId xmlns:a16="http://schemas.microsoft.com/office/drawing/2014/main" id="{CA6A4E69-521F-8F4D-5ACD-182C7FE3C25A}"/>
+                <a16:creationId xmlns:a16="http://schemas.microsoft.com/office/drawing/2014/main" id="{1D526D5B-BBD1-5DEC-50AD-B9852B3341F3}"/>
               </a:ext>
             </a:extLst>
           </p:cNvPr>
@@ -6766,7 +6766,7 @@
           <p:cNvPr id="10" name="item_2_title">
             <a:extLst>
               <a:ext uri="{FF2B5EF4-FFF2-40B4-BE49-F238E27FC236}">
-                <a16:creationId xmlns:a16="http://schemas.microsoft.com/office/drawing/2014/main" id="{BCDAFB60-5344-E718-90AE-0EBD9FFF0A23}"/>
+                <a16:creationId xmlns:a16="http://schemas.microsoft.com/office/drawing/2014/main" id="{D22F57AA-795C-9E55-B96F-82BD55F0D879}"/>
               </a:ext>
             </a:extLst>
           </p:cNvPr>
@@ -6819,7 +6819,7 @@
           <p:cNvPr id="11" name="item_2">
             <a:extLst>
               <a:ext uri="{FF2B5EF4-FFF2-40B4-BE49-F238E27FC236}">
-                <a16:creationId xmlns:a16="http://schemas.microsoft.com/office/drawing/2014/main" id="{8C079E6E-F531-3FA2-BBE4-83D3659A12DA}"/>
+                <a16:creationId xmlns:a16="http://schemas.microsoft.com/office/drawing/2014/main" id="{6F540C72-DB3D-8871-AC73-798699C8E233}"/>
               </a:ext>
             </a:extLst>
           </p:cNvPr>
@@ -6867,7 +6867,7 @@
           <p:cNvPr id="12" name="item_3_title">
             <a:extLst>
               <a:ext uri="{FF2B5EF4-FFF2-40B4-BE49-F238E27FC236}">
-                <a16:creationId xmlns:a16="http://schemas.microsoft.com/office/drawing/2014/main" id="{45E6C117-FFA5-AF86-596F-65F13665D671}"/>
+                <a16:creationId xmlns:a16="http://schemas.microsoft.com/office/drawing/2014/main" id="{721EC035-DAFF-9116-18D6-F21E583FB57A}"/>
               </a:ext>
             </a:extLst>
           </p:cNvPr>
@@ -6920,7 +6920,7 @@
           <p:cNvPr id="13" name="item_3">
             <a:extLst>
               <a:ext uri="{FF2B5EF4-FFF2-40B4-BE49-F238E27FC236}">
-                <a16:creationId xmlns:a16="http://schemas.microsoft.com/office/drawing/2014/main" id="{AC6A0DBA-E557-2B9E-47CB-D5EBF427007D}"/>
+                <a16:creationId xmlns:a16="http://schemas.microsoft.com/office/drawing/2014/main" id="{DF62C88F-39BE-8D1D-7BB4-E4D187079837}"/>
               </a:ext>
             </a:extLst>
           </p:cNvPr>
@@ -6968,7 +6968,7 @@
           <p:cNvPr id="14" name="item_4_title">
             <a:extLst>
               <a:ext uri="{FF2B5EF4-FFF2-40B4-BE49-F238E27FC236}">
-                <a16:creationId xmlns:a16="http://schemas.microsoft.com/office/drawing/2014/main" id="{B135357A-1599-54F0-9551-14FBC2E9FDB4}"/>
+                <a16:creationId xmlns:a16="http://schemas.microsoft.com/office/drawing/2014/main" id="{A98222C7-C460-C0AB-0E31-003340982CA8}"/>
               </a:ext>
             </a:extLst>
           </p:cNvPr>
@@ -7021,7 +7021,7 @@
           <p:cNvPr id="15" name="item_4">
             <a:extLst>
               <a:ext uri="{FF2B5EF4-FFF2-40B4-BE49-F238E27FC236}">
-                <a16:creationId xmlns:a16="http://schemas.microsoft.com/office/drawing/2014/main" id="{F1EC1D0E-A375-2BDF-FED2-E203BFC6EA2C}"/>
+                <a16:creationId xmlns:a16="http://schemas.microsoft.com/office/drawing/2014/main" id="{9A79F9A8-26CF-366F-D57E-3FCE228F396E}"/>
               </a:ext>
             </a:extLst>
           </p:cNvPr>
@@ -7069,7 +7069,7 @@
           <p:cNvPr id="16" name="source">
             <a:extLst>
               <a:ext uri="{FF2B5EF4-FFF2-40B4-BE49-F238E27FC236}">
-                <a16:creationId xmlns:a16="http://schemas.microsoft.com/office/drawing/2014/main" id="{4D590703-047D-35DD-43B6-1CF7B69B0130}"/>
+                <a16:creationId xmlns:a16="http://schemas.microsoft.com/office/drawing/2014/main" id="{9E703325-FCDF-8AF3-52C2-626BB645B4C7}"/>
               </a:ext>
             </a:extLst>
           </p:cNvPr>
@@ -7124,7 +7124,7 @@
     </p:spTree>
     <p:extLst>
       <p:ext uri="{BB962C8B-B14F-4D97-AF65-F5344CB8AC3E}">
-        <p14:creationId xmlns:p14="http://schemas.microsoft.com/office/powerpoint/2010/main" val="1887811975"/>
+        <p14:creationId xmlns:p14="http://schemas.microsoft.com/office/powerpoint/2010/main" val="3935700548"/>
       </p:ext>
     </p:extLst>
   </p:cSld>
@@ -7156,7 +7156,7 @@
           <p:cNvPr id="7" name="creative_background">
             <a:extLst>
               <a:ext uri="{FF2B5EF4-FFF2-40B4-BE49-F238E27FC236}">
-                <a16:creationId xmlns:a16="http://schemas.microsoft.com/office/drawing/2014/main" id="{23CFAF3B-9CD1-F0F5-3AB2-2E9AF3A8E63C}"/>
+                <a16:creationId xmlns:a16="http://schemas.microsoft.com/office/drawing/2014/main" id="{583CDAEB-E1D5-978B-3972-C5EA105B5AF5}"/>
               </a:ext>
             </a:extLst>
           </p:cNvPr>
@@ -7229,7 +7229,7 @@
           <a:bodyPr/>
           <a:lstStyle/>
           <a:p>
-            <a:fld id="{10ED7D75-8BCA-4792-8B33-188BE8B045C9}" type="datetimeFigureOut">
+            <a:fld id="{C5DDA866-DF04-4AEF-ADD4-8AFF018326A8}" type="datetimeFigureOut">
               <a:rPr lang="en-US" smtClean="0"/>
               <a:t>10/3/2026</a:t>
             </a:fld>
@@ -7271,7 +7271,7 @@
           <a:bodyPr/>
           <a:lstStyle/>
           <a:p>
-            <a:fld id="{EDD050AF-432A-42B3-B4EC-757E823036E9}" type="slidenum">
+            <a:fld id="{B3BADF7A-34E3-4F53-BB65-9FE23DA90D0C}" type="slidenum">
               <a:rPr lang="en-US" smtClean="0"/>
               <a:t>‹#›</a:t>
             </a:fld>
@@ -7284,7 +7284,7 @@
           <p:cNvPr id="8" name="kpi_value_1">
             <a:extLst>
               <a:ext uri="{FF2B5EF4-FFF2-40B4-BE49-F238E27FC236}">
-                <a16:creationId xmlns:a16="http://schemas.microsoft.com/office/drawing/2014/main" id="{BBB6A7A1-DE56-1152-8F85-D2FA8C542C74}"/>
+                <a16:creationId xmlns:a16="http://schemas.microsoft.com/office/drawing/2014/main" id="{83F796AC-9C49-1ED8-4F81-10D6D3E0B786}"/>
               </a:ext>
             </a:extLst>
           </p:cNvPr>
@@ -7334,7 +7334,7 @@
           <p:cNvPr id="9" name="kpi_label_1">
             <a:extLst>
               <a:ext uri="{FF2B5EF4-FFF2-40B4-BE49-F238E27FC236}">
-                <a16:creationId xmlns:a16="http://schemas.microsoft.com/office/drawing/2014/main" id="{251A601D-E53E-224A-9DF9-9E809E18E420}"/>
+                <a16:creationId xmlns:a16="http://schemas.microsoft.com/office/drawing/2014/main" id="{B8B17B9C-3B63-9AF2-0160-87BDF317B0E8}"/>
               </a:ext>
             </a:extLst>
           </p:cNvPr>
@@ -7382,7 +7382,7 @@
           <p:cNvPr id="10" name="quote">
             <a:extLst>
               <a:ext uri="{FF2B5EF4-FFF2-40B4-BE49-F238E27FC236}">
-                <a16:creationId xmlns:a16="http://schemas.microsoft.com/office/drawing/2014/main" id="{02661B4A-57A0-BF15-57E5-2E2268666B29}"/>
+                <a16:creationId xmlns:a16="http://schemas.microsoft.com/office/drawing/2014/main" id="{C902A0CC-6F05-48C5-56DD-0FC9624DEE41}"/>
               </a:ext>
             </a:extLst>
           </p:cNvPr>
@@ -7432,7 +7432,7 @@
           <p:cNvPr id="11" name="attribution">
             <a:extLst>
               <a:ext uri="{FF2B5EF4-FFF2-40B4-BE49-F238E27FC236}">
-                <a16:creationId xmlns:a16="http://schemas.microsoft.com/office/drawing/2014/main" id="{4DE23E3E-E556-94B9-B2A5-0BBC0B87D47C}"/>
+                <a16:creationId xmlns:a16="http://schemas.microsoft.com/office/drawing/2014/main" id="{77CA54C3-860A-0C63-2F7B-ACC49C78B830}"/>
               </a:ext>
             </a:extLst>
           </p:cNvPr>
@@ -7480,7 +7480,7 @@
           <p:cNvPr id="12" name="item_1_title">
             <a:extLst>
               <a:ext uri="{FF2B5EF4-FFF2-40B4-BE49-F238E27FC236}">
-                <a16:creationId xmlns:a16="http://schemas.microsoft.com/office/drawing/2014/main" id="{68280565-9F63-2FB1-841B-7D9F53CBC834}"/>
+                <a16:creationId xmlns:a16="http://schemas.microsoft.com/office/drawing/2014/main" id="{667FD638-6B13-15E0-C23A-D045B038CAD7}"/>
               </a:ext>
             </a:extLst>
           </p:cNvPr>
@@ -7533,7 +7533,7 @@
           <p:cNvPr id="13" name="item_1">
             <a:extLst>
               <a:ext uri="{FF2B5EF4-FFF2-40B4-BE49-F238E27FC236}">
-                <a16:creationId xmlns:a16="http://schemas.microsoft.com/office/drawing/2014/main" id="{76A9A922-7FF5-E3B5-1D74-D7762717E2B8}"/>
+                <a16:creationId xmlns:a16="http://schemas.microsoft.com/office/drawing/2014/main" id="{C270AD22-034C-F3CB-02AF-A794952B96C3}"/>
               </a:ext>
             </a:extLst>
           </p:cNvPr>
@@ -7581,7 +7581,7 @@
           <p:cNvPr id="14" name="source">
             <a:extLst>
               <a:ext uri="{FF2B5EF4-FFF2-40B4-BE49-F238E27FC236}">
-                <a16:creationId xmlns:a16="http://schemas.microsoft.com/office/drawing/2014/main" id="{76B457D2-8B9C-9691-96A2-8B31E26F20A1}"/>
+                <a16:creationId xmlns:a16="http://schemas.microsoft.com/office/drawing/2014/main" id="{1DA28C20-323A-CA51-610C-379CD7C3C489}"/>
               </a:ext>
             </a:extLst>
           </p:cNvPr>
@@ -7636,7 +7636,7 @@
     </p:spTree>
     <p:extLst>
       <p:ext uri="{BB962C8B-B14F-4D97-AF65-F5344CB8AC3E}">
-        <p14:creationId xmlns:p14="http://schemas.microsoft.com/office/powerpoint/2010/main" val="3989926669"/>
+        <p14:creationId xmlns:p14="http://schemas.microsoft.com/office/powerpoint/2010/main" val="1706621010"/>
       </p:ext>
     </p:extLst>
   </p:cSld>
@@ -7668,7 +7668,7 @@
           <p:cNvPr id="7" name="creative_background">
             <a:extLst>
               <a:ext uri="{FF2B5EF4-FFF2-40B4-BE49-F238E27FC236}">
-                <a16:creationId xmlns:a16="http://schemas.microsoft.com/office/drawing/2014/main" id="{ABB008A0-3BD7-FFB8-F254-3B137C0C53C2}"/>
+                <a16:creationId xmlns:a16="http://schemas.microsoft.com/office/drawing/2014/main" id="{98E20DCA-9185-116C-99D8-4FBAC9319AEA}"/>
               </a:ext>
             </a:extLst>
           </p:cNvPr>
@@ -7741,7 +7741,7 @@
           <a:bodyPr/>
           <a:lstStyle/>
           <a:p>
-            <a:fld id="{10ED7D75-8BCA-4792-8B33-188BE8B045C9}" type="datetimeFigureOut">
+            <a:fld id="{C5DDA866-DF04-4AEF-ADD4-8AFF018326A8}" type="datetimeFigureOut">
               <a:rPr lang="en-US" smtClean="0"/>
               <a:t>10/3/2026</a:t>
             </a:fld>
@@ -7783,7 +7783,7 @@
           <a:bodyPr/>
           <a:lstStyle/>
           <a:p>
-            <a:fld id="{EDD050AF-432A-42B3-B4EC-757E823036E9}" type="slidenum">
+            <a:fld id="{B3BADF7A-34E3-4F53-BB65-9FE23DA90D0C}" type="slidenum">
               <a:rPr lang="en-US" smtClean="0"/>
               <a:t>‹#›</a:t>
             </a:fld>
@@ -7796,7 +7796,7 @@
           <p:cNvPr id="8" name="item_1_title">
             <a:extLst>
               <a:ext uri="{FF2B5EF4-FFF2-40B4-BE49-F238E27FC236}">
-                <a16:creationId xmlns:a16="http://schemas.microsoft.com/office/drawing/2014/main" id="{D7C34665-34FD-0A72-5D8F-2BD46FB6240E}"/>
+                <a16:creationId xmlns:a16="http://schemas.microsoft.com/office/drawing/2014/main" id="{9A7736B7-C466-C03C-4EC4-BBF43F2D0F78}"/>
               </a:ext>
             </a:extLst>
           </p:cNvPr>
@@ -7846,7 +7846,7 @@
           <p:cNvPr id="9" name="item_1">
             <a:extLst>
               <a:ext uri="{FF2B5EF4-FFF2-40B4-BE49-F238E27FC236}">
-                <a16:creationId xmlns:a16="http://schemas.microsoft.com/office/drawing/2014/main" id="{194D93F5-31DE-C820-8B37-DE12EE734D9C}"/>
+                <a16:creationId xmlns:a16="http://schemas.microsoft.com/office/drawing/2014/main" id="{895349DF-8A0C-1E65-F79C-D87C73850E51}"/>
               </a:ext>
             </a:extLst>
           </p:cNvPr>
@@ -7894,7 +7894,7 @@
           <p:cNvPr id="10" name="item_2_title">
             <a:extLst>
               <a:ext uri="{FF2B5EF4-FFF2-40B4-BE49-F238E27FC236}">
-                <a16:creationId xmlns:a16="http://schemas.microsoft.com/office/drawing/2014/main" id="{79570BE8-DB9D-296B-F936-93ABC99CBE2B}"/>
+                <a16:creationId xmlns:a16="http://schemas.microsoft.com/office/drawing/2014/main" id="{2E5DA06F-0CB5-98EC-C483-6309FC6EBA19}"/>
               </a:ext>
             </a:extLst>
           </p:cNvPr>
@@ -7947,7 +7947,7 @@
           <p:cNvPr id="11" name="item_2">
             <a:extLst>
               <a:ext uri="{FF2B5EF4-FFF2-40B4-BE49-F238E27FC236}">
-                <a16:creationId xmlns:a16="http://schemas.microsoft.com/office/drawing/2014/main" id="{91009830-37DF-DC9B-6049-BBBC2D69E509}"/>
+                <a16:creationId xmlns:a16="http://schemas.microsoft.com/office/drawing/2014/main" id="{87D89079-B07A-36BF-B93B-586D6E2CBB92}"/>
               </a:ext>
             </a:extLst>
           </p:cNvPr>
@@ -7995,7 +7995,7 @@
           <p:cNvPr id="12" name="item_3_title">
             <a:extLst>
               <a:ext uri="{FF2B5EF4-FFF2-40B4-BE49-F238E27FC236}">
-                <a16:creationId xmlns:a16="http://schemas.microsoft.com/office/drawing/2014/main" id="{F46DB6BA-65B2-A13F-2CA1-A3DE0BC41E1B}"/>
+                <a16:creationId xmlns:a16="http://schemas.microsoft.com/office/drawing/2014/main" id="{FF6FA2BF-5973-BCED-5738-BC94D5E81078}"/>
               </a:ext>
             </a:extLst>
           </p:cNvPr>
@@ -8048,7 +8048,7 @@
           <p:cNvPr id="13" name="item_3">
             <a:extLst>
               <a:ext uri="{FF2B5EF4-FFF2-40B4-BE49-F238E27FC236}">
-                <a16:creationId xmlns:a16="http://schemas.microsoft.com/office/drawing/2014/main" id="{B92CC31D-DE7D-9A42-E068-61C124DC4A0E}"/>
+                <a16:creationId xmlns:a16="http://schemas.microsoft.com/office/drawing/2014/main" id="{E11D5930-95C6-9C1E-A582-15EEDE392AAE}"/>
               </a:ext>
             </a:extLst>
           </p:cNvPr>
@@ -8096,7 +8096,7 @@
           <p:cNvPr id="14" name="source">
             <a:extLst>
               <a:ext uri="{FF2B5EF4-FFF2-40B4-BE49-F238E27FC236}">
-                <a16:creationId xmlns:a16="http://schemas.microsoft.com/office/drawing/2014/main" id="{AE3FC558-A1F7-F02F-A6A6-A4694D259198}"/>
+                <a16:creationId xmlns:a16="http://schemas.microsoft.com/office/drawing/2014/main" id="{941A02BA-EA63-CE21-F2AC-82D758D1BA19}"/>
               </a:ext>
             </a:extLst>
           </p:cNvPr>
@@ -8151,7 +8151,7 @@
     </p:spTree>
     <p:extLst>
       <p:ext uri="{BB962C8B-B14F-4D97-AF65-F5344CB8AC3E}">
-        <p14:creationId xmlns:p14="http://schemas.microsoft.com/office/powerpoint/2010/main" val="3966420930"/>
+        <p14:creationId xmlns:p14="http://schemas.microsoft.com/office/powerpoint/2010/main" val="1805483604"/>
       </p:ext>
     </p:extLst>
   </p:cSld>
@@ -8183,7 +8183,7 @@
           <p:cNvPr id="7" name="creative_background">
             <a:extLst>
               <a:ext uri="{FF2B5EF4-FFF2-40B4-BE49-F238E27FC236}">
-                <a16:creationId xmlns:a16="http://schemas.microsoft.com/office/drawing/2014/main" id="{15281689-E6F7-83CC-DF57-0D55A0830EDE}"/>
+                <a16:creationId xmlns:a16="http://schemas.microsoft.com/office/drawing/2014/main" id="{D125D63A-2659-C440-4C2B-E8777BF9EA40}"/>
               </a:ext>
             </a:extLst>
           </p:cNvPr>
@@ -8256,7 +8256,7 @@
           <a:bodyPr/>
           <a:lstStyle/>
           <a:p>
-            <a:fld id="{10ED7D75-8BCA-4792-8B33-188BE8B045C9}" type="datetimeFigureOut">
+            <a:fld id="{C5DDA866-DF04-4AEF-ADD4-8AFF018326A8}" type="datetimeFigureOut">
               <a:rPr lang="en-US" smtClean="0"/>
               <a:t>10/3/2026</a:t>
             </a:fld>
@@ -8298,7 +8298,7 @@
           <a:bodyPr/>
           <a:lstStyle/>
           <a:p>
-            <a:fld id="{EDD050AF-432A-42B3-B4EC-757E823036E9}" type="slidenum">
+            <a:fld id="{B3BADF7A-34E3-4F53-BB65-9FE23DA90D0C}" type="slidenum">
               <a:rPr lang="en-US" smtClean="0"/>
               <a:t>‹#›</a:t>
             </a:fld>
@@ -8311,7 +8311,7 @@
           <p:cNvPr id="8" name="marker_1">
             <a:extLst>
               <a:ext uri="{FF2B5EF4-FFF2-40B4-BE49-F238E27FC236}">
-                <a16:creationId xmlns:a16="http://schemas.microsoft.com/office/drawing/2014/main" id="{8D2E5058-81F1-D541-2E88-A47D4CF183F3}"/>
+                <a16:creationId xmlns:a16="http://schemas.microsoft.com/office/drawing/2014/main" id="{728523DF-086E-FE9E-1284-01B089AC5F90}"/>
               </a:ext>
             </a:extLst>
           </p:cNvPr>
@@ -8367,7 +8367,7 @@
           <p:cNvPr id="9" name="item_1_title">
             <a:extLst>
               <a:ext uri="{FF2B5EF4-FFF2-40B4-BE49-F238E27FC236}">
-                <a16:creationId xmlns:a16="http://schemas.microsoft.com/office/drawing/2014/main" id="{BAB897BF-FB6C-C0E3-B752-BA36B2BC42D9}"/>
+                <a16:creationId xmlns:a16="http://schemas.microsoft.com/office/drawing/2014/main" id="{2F9A7365-947A-039E-1FFF-277695826559}"/>
               </a:ext>
             </a:extLst>
           </p:cNvPr>
@@ -8420,7 +8420,7 @@
           <p:cNvPr id="10" name="item_1">
             <a:extLst>
               <a:ext uri="{FF2B5EF4-FFF2-40B4-BE49-F238E27FC236}">
-                <a16:creationId xmlns:a16="http://schemas.microsoft.com/office/drawing/2014/main" id="{E7BAA097-4EC7-495D-441E-BF7977641EE5}"/>
+                <a16:creationId xmlns:a16="http://schemas.microsoft.com/office/drawing/2014/main" id="{F3E7E347-05EC-E911-1666-673A7A29DEE7}"/>
               </a:ext>
             </a:extLst>
           </p:cNvPr>
@@ -8468,7 +8468,7 @@
           <p:cNvPr id="11" name="marker_2">
             <a:extLst>
               <a:ext uri="{FF2B5EF4-FFF2-40B4-BE49-F238E27FC236}">
-                <a16:creationId xmlns:a16="http://schemas.microsoft.com/office/drawing/2014/main" id="{539D2A93-8E3D-8EEA-7F66-880133C40401}"/>
+                <a16:creationId xmlns:a16="http://schemas.microsoft.com/office/drawing/2014/main" id="{225E4012-85FC-FD0A-A53A-C844FF823C6F}"/>
               </a:ext>
             </a:extLst>
           </p:cNvPr>
@@ -8524,7 +8524,7 @@
           <p:cNvPr id="12" name="item_2_title">
             <a:extLst>
               <a:ext uri="{FF2B5EF4-FFF2-40B4-BE49-F238E27FC236}">
-                <a16:creationId xmlns:a16="http://schemas.microsoft.com/office/drawing/2014/main" id="{13CED4D1-5818-A53C-D7B5-99BD04F37D74}"/>
+                <a16:creationId xmlns:a16="http://schemas.microsoft.com/office/drawing/2014/main" id="{A47D816E-3CFF-DE0D-340B-EAE5856EA37A}"/>
               </a:ext>
             </a:extLst>
           </p:cNvPr>
@@ -8577,7 +8577,7 @@
           <p:cNvPr id="13" name="item_2">
             <a:extLst>
               <a:ext uri="{FF2B5EF4-FFF2-40B4-BE49-F238E27FC236}">
-                <a16:creationId xmlns:a16="http://schemas.microsoft.com/office/drawing/2014/main" id="{D667F73D-2363-DA60-325B-8462EEB188DC}"/>
+                <a16:creationId xmlns:a16="http://schemas.microsoft.com/office/drawing/2014/main" id="{65663B74-2CAD-BC2D-CA45-B141C5EA3982}"/>
               </a:ext>
             </a:extLst>
           </p:cNvPr>
@@ -8625,7 +8625,7 @@
           <p:cNvPr id="14" name="source">
             <a:extLst>
               <a:ext uri="{FF2B5EF4-FFF2-40B4-BE49-F238E27FC236}">
-                <a16:creationId xmlns:a16="http://schemas.microsoft.com/office/drawing/2014/main" id="{1A55F7C7-3FCD-5271-DE67-3C831CBD275B}"/>
+                <a16:creationId xmlns:a16="http://schemas.microsoft.com/office/drawing/2014/main" id="{436E3F41-E5AA-1751-C789-529F9A768F7E}"/>
               </a:ext>
             </a:extLst>
           </p:cNvPr>
@@ -8680,7 +8680,7 @@
     </p:spTree>
     <p:extLst>
       <p:ext uri="{BB962C8B-B14F-4D97-AF65-F5344CB8AC3E}">
-        <p14:creationId xmlns:p14="http://schemas.microsoft.com/office/powerpoint/2010/main" val="958188220"/>
+        <p14:creationId xmlns:p14="http://schemas.microsoft.com/office/powerpoint/2010/main" val="2467847845"/>
       </p:ext>
     </p:extLst>
   </p:cSld>
@@ -8712,7 +8712,7 @@
           <p:cNvPr id="7" name="creative_background">
             <a:extLst>
               <a:ext uri="{FF2B5EF4-FFF2-40B4-BE49-F238E27FC236}">
-                <a16:creationId xmlns:a16="http://schemas.microsoft.com/office/drawing/2014/main" id="{ABD3B9FE-D760-8BB6-9847-714DD2D36BD6}"/>
+                <a16:creationId xmlns:a16="http://schemas.microsoft.com/office/drawing/2014/main" id="{50E9CED5-F5C0-C2B9-9CC2-EC9BFA93ECE7}"/>
               </a:ext>
             </a:extLst>
           </p:cNvPr>
@@ -8785,7 +8785,7 @@
           <a:bodyPr/>
           <a:lstStyle/>
           <a:p>
-            <a:fld id="{10ED7D75-8BCA-4792-8B33-188BE8B045C9}" type="datetimeFigureOut">
+            <a:fld id="{C5DDA866-DF04-4AEF-ADD4-8AFF018326A8}" type="datetimeFigureOut">
               <a:rPr lang="en-US" smtClean="0"/>
               <a:t>10/3/2026</a:t>
             </a:fld>
@@ -8827,7 +8827,7 @@
           <a:bodyPr/>
           <a:lstStyle/>
           <a:p>
-            <a:fld id="{EDD050AF-432A-42B3-B4EC-757E823036E9}" type="slidenum">
+            <a:fld id="{B3BADF7A-34E3-4F53-BB65-9FE23DA90D0C}" type="slidenum">
               <a:rPr lang="en-US" smtClean="0"/>
               <a:t>‹#›</a:t>
             </a:fld>
@@ -8840,7 +8840,7 @@
           <p:cNvPr id="8" name="kpi_value_1">
             <a:extLst>
               <a:ext uri="{FF2B5EF4-FFF2-40B4-BE49-F238E27FC236}">
-                <a16:creationId xmlns:a16="http://schemas.microsoft.com/office/drawing/2014/main" id="{9ADC4DAB-26F5-CD5F-462B-5F4EF9F4D673}"/>
+                <a16:creationId xmlns:a16="http://schemas.microsoft.com/office/drawing/2014/main" id="{5F8F6E2E-DF4D-B2BF-F4F2-A39F97EE21E6}"/>
               </a:ext>
             </a:extLst>
           </p:cNvPr>
@@ -8890,7 +8890,7 @@
           <p:cNvPr id="9" name="kpi_label_1">
             <a:extLst>
               <a:ext uri="{FF2B5EF4-FFF2-40B4-BE49-F238E27FC236}">
-                <a16:creationId xmlns:a16="http://schemas.microsoft.com/office/drawing/2014/main" id="{9591D87C-0B59-1438-7C73-9AE721A7DED1}"/>
+                <a16:creationId xmlns:a16="http://schemas.microsoft.com/office/drawing/2014/main" id="{C09CF606-65B3-7DCD-8EA6-40126D962E65}"/>
               </a:ext>
             </a:extLst>
           </p:cNvPr>
@@ -8938,7 +8938,7 @@
           <p:cNvPr id="10" name="quote">
             <a:extLst>
               <a:ext uri="{FF2B5EF4-FFF2-40B4-BE49-F238E27FC236}">
-                <a16:creationId xmlns:a16="http://schemas.microsoft.com/office/drawing/2014/main" id="{BC6DD4F2-C3B5-79B5-3332-D4DB005CCAEE}"/>
+                <a16:creationId xmlns:a16="http://schemas.microsoft.com/office/drawing/2014/main" id="{6905A810-9094-38C7-9193-161EA909FD90}"/>
               </a:ext>
             </a:extLst>
           </p:cNvPr>
@@ -8988,7 +8988,7 @@
           <p:cNvPr id="11" name="attribution">
             <a:extLst>
               <a:ext uri="{FF2B5EF4-FFF2-40B4-BE49-F238E27FC236}">
-                <a16:creationId xmlns:a16="http://schemas.microsoft.com/office/drawing/2014/main" id="{D7460A4E-FBE3-0B20-BF3E-F2160350C3E9}"/>
+                <a16:creationId xmlns:a16="http://schemas.microsoft.com/office/drawing/2014/main" id="{8E3633E4-49D5-0629-6E57-12C568817FC7}"/>
               </a:ext>
             </a:extLst>
           </p:cNvPr>
@@ -9036,7 +9036,7 @@
           <p:cNvPr id="12" name="item_1_title">
             <a:extLst>
               <a:ext uri="{FF2B5EF4-FFF2-40B4-BE49-F238E27FC236}">
-                <a16:creationId xmlns:a16="http://schemas.microsoft.com/office/drawing/2014/main" id="{9D6F2EF4-F1E7-7490-5D4F-52B7B3658DEC}"/>
+                <a16:creationId xmlns:a16="http://schemas.microsoft.com/office/drawing/2014/main" id="{7EB74F81-A693-0CE6-AB82-75251454BF33}"/>
               </a:ext>
             </a:extLst>
           </p:cNvPr>
@@ -9089,7 +9089,7 @@
           <p:cNvPr id="13" name="item_1">
             <a:extLst>
               <a:ext uri="{FF2B5EF4-FFF2-40B4-BE49-F238E27FC236}">
-                <a16:creationId xmlns:a16="http://schemas.microsoft.com/office/drawing/2014/main" id="{F0CE9CC3-F903-6E41-AE14-AD183133529D}"/>
+                <a16:creationId xmlns:a16="http://schemas.microsoft.com/office/drawing/2014/main" id="{F913B169-3BB3-F0F0-A674-12E549C5900F}"/>
               </a:ext>
             </a:extLst>
           </p:cNvPr>
@@ -9137,7 +9137,7 @@
           <p:cNvPr id="14" name="source">
             <a:extLst>
               <a:ext uri="{FF2B5EF4-FFF2-40B4-BE49-F238E27FC236}">
-                <a16:creationId xmlns:a16="http://schemas.microsoft.com/office/drawing/2014/main" id="{75287459-779D-C4D9-053E-6CBC4BE19345}"/>
+                <a16:creationId xmlns:a16="http://schemas.microsoft.com/office/drawing/2014/main" id="{CB7643E3-A0D8-5814-6864-D091BCEEA804}"/>
               </a:ext>
             </a:extLst>
           </p:cNvPr>
@@ -9192,7 +9192,7 @@
     </p:spTree>
     <p:extLst>
       <p:ext uri="{BB962C8B-B14F-4D97-AF65-F5344CB8AC3E}">
-        <p14:creationId xmlns:p14="http://schemas.microsoft.com/office/powerpoint/2010/main" val="2417905079"/>
+        <p14:creationId xmlns:p14="http://schemas.microsoft.com/office/powerpoint/2010/main" val="3687441673"/>
       </p:ext>
     </p:extLst>
   </p:cSld>
@@ -9224,7 +9224,7 @@
           <p:cNvPr id="7" name="creative_background">
             <a:extLst>
               <a:ext uri="{FF2B5EF4-FFF2-40B4-BE49-F238E27FC236}">
-                <a16:creationId xmlns:a16="http://schemas.microsoft.com/office/drawing/2014/main" id="{3CBA71BE-600E-6073-EC1E-F197F27778B0}"/>
+                <a16:creationId xmlns:a16="http://schemas.microsoft.com/office/drawing/2014/main" id="{E9C3DEF8-D20D-9680-6191-8E975FEB7CF1}"/>
               </a:ext>
             </a:extLst>
           </p:cNvPr>
@@ -9297,7 +9297,7 @@
           <a:bodyPr/>
           <a:lstStyle/>
           <a:p>
-            <a:fld id="{10ED7D75-8BCA-4792-8B33-188BE8B045C9}" type="datetimeFigureOut">
+            <a:fld id="{C5DDA866-DF04-4AEF-ADD4-8AFF018326A8}" type="datetimeFigureOut">
               <a:rPr lang="en-US" smtClean="0"/>
               <a:t>10/3/2026</a:t>
             </a:fld>
@@ -9339,7 +9339,7 @@
           <a:bodyPr/>
           <a:lstStyle/>
           <a:p>
-            <a:fld id="{EDD050AF-432A-42B3-B4EC-757E823036E9}" type="slidenum">
+            <a:fld id="{B3BADF7A-34E3-4F53-BB65-9FE23DA90D0C}" type="slidenum">
               <a:rPr lang="en-US" smtClean="0"/>
               <a:t>‹#›</a:t>
             </a:fld>
@@ -9352,7 +9352,7 @@
           <p:cNvPr id="8" name="marker_1">
             <a:extLst>
               <a:ext uri="{FF2B5EF4-FFF2-40B4-BE49-F238E27FC236}">
-                <a16:creationId xmlns:a16="http://schemas.microsoft.com/office/drawing/2014/main" id="{75DA9DA4-0A46-BCCD-5E4E-ABBA68729FD2}"/>
+                <a16:creationId xmlns:a16="http://schemas.microsoft.com/office/drawing/2014/main" id="{BD0D5A47-0273-0621-4B05-C082A7561E60}"/>
               </a:ext>
             </a:extLst>
           </p:cNvPr>
@@ -9408,7 +9408,7 @@
           <p:cNvPr id="9" name="item_1">
             <a:extLst>
               <a:ext uri="{FF2B5EF4-FFF2-40B4-BE49-F238E27FC236}">
-                <a16:creationId xmlns:a16="http://schemas.microsoft.com/office/drawing/2014/main" id="{5A17039B-7E29-6F2D-74B8-EA1C3BF9E0C1}"/>
+                <a16:creationId xmlns:a16="http://schemas.microsoft.com/office/drawing/2014/main" id="{D8F8EFC6-8784-5313-3BAB-EC41B46DF047}"/>
               </a:ext>
             </a:extLst>
           </p:cNvPr>
@@ -9456,7 +9456,7 @@
           <p:cNvPr id="10" name="marker_2">
             <a:extLst>
               <a:ext uri="{FF2B5EF4-FFF2-40B4-BE49-F238E27FC236}">
-                <a16:creationId xmlns:a16="http://schemas.microsoft.com/office/drawing/2014/main" id="{07CD14B5-29E6-360B-AD8F-E87EAA075851}"/>
+                <a16:creationId xmlns:a16="http://schemas.microsoft.com/office/drawing/2014/main" id="{F0CCE60D-29DA-C90E-751C-BE46DA0645D8}"/>
               </a:ext>
             </a:extLst>
           </p:cNvPr>
@@ -9512,7 +9512,7 @@
           <p:cNvPr id="11" name="item_2">
             <a:extLst>
               <a:ext uri="{FF2B5EF4-FFF2-40B4-BE49-F238E27FC236}">
-                <a16:creationId xmlns:a16="http://schemas.microsoft.com/office/drawing/2014/main" id="{70A296D8-7069-1FAB-7371-E4956230877E}"/>
+                <a16:creationId xmlns:a16="http://schemas.microsoft.com/office/drawing/2014/main" id="{738AFEF7-9DD5-86B6-EE4F-44AAD351DC30}"/>
               </a:ext>
             </a:extLst>
           </p:cNvPr>
@@ -9560,7 +9560,7 @@
           <p:cNvPr id="12" name="marker_3">
             <a:extLst>
               <a:ext uri="{FF2B5EF4-FFF2-40B4-BE49-F238E27FC236}">
-                <a16:creationId xmlns:a16="http://schemas.microsoft.com/office/drawing/2014/main" id="{E9EA6C8B-99A2-0420-21C7-A24643BA28E0}"/>
+                <a16:creationId xmlns:a16="http://schemas.microsoft.com/office/drawing/2014/main" id="{BF699802-1AA7-4B77-8865-1D9768F5A5BB}"/>
               </a:ext>
             </a:extLst>
           </p:cNvPr>
@@ -9616,7 +9616,7 @@
           <p:cNvPr id="13" name="item_3">
             <a:extLst>
               <a:ext uri="{FF2B5EF4-FFF2-40B4-BE49-F238E27FC236}">
-                <a16:creationId xmlns:a16="http://schemas.microsoft.com/office/drawing/2014/main" id="{A39A4E5D-31FB-FDD6-3D7A-9548F90628E0}"/>
+                <a16:creationId xmlns:a16="http://schemas.microsoft.com/office/drawing/2014/main" id="{144B05A2-2C01-01C8-4D01-3FDC676C6042}"/>
               </a:ext>
             </a:extLst>
           </p:cNvPr>
@@ -9664,7 +9664,7 @@
           <p:cNvPr id="14" name="marker_4">
             <a:extLst>
               <a:ext uri="{FF2B5EF4-FFF2-40B4-BE49-F238E27FC236}">
-                <a16:creationId xmlns:a16="http://schemas.microsoft.com/office/drawing/2014/main" id="{CEFCE449-4B40-28C2-C1DF-776D8F60ADB4}"/>
+                <a16:creationId xmlns:a16="http://schemas.microsoft.com/office/drawing/2014/main" id="{944610BF-2A3D-1F07-0E94-F3829ED046E8}"/>
               </a:ext>
             </a:extLst>
           </p:cNvPr>
@@ -9720,7 +9720,7 @@
           <p:cNvPr id="15" name="item_4">
             <a:extLst>
               <a:ext uri="{FF2B5EF4-FFF2-40B4-BE49-F238E27FC236}">
-                <a16:creationId xmlns:a16="http://schemas.microsoft.com/office/drawing/2014/main" id="{66BC734F-14D1-5A28-090E-5EFCC0DF472A}"/>
+                <a16:creationId xmlns:a16="http://schemas.microsoft.com/office/drawing/2014/main" id="{706E80E9-E600-C8B1-02C2-201E45FFB0B6}"/>
               </a:ext>
             </a:extLst>
           </p:cNvPr>
@@ -9768,7 +9768,7 @@
           <p:cNvPr id="16" name="source">
             <a:extLst>
               <a:ext uri="{FF2B5EF4-FFF2-40B4-BE49-F238E27FC236}">
-                <a16:creationId xmlns:a16="http://schemas.microsoft.com/office/drawing/2014/main" id="{F35E1020-8F98-E1EE-5DEC-CA273C80419E}"/>
+                <a16:creationId xmlns:a16="http://schemas.microsoft.com/office/drawing/2014/main" id="{57BF8F2B-6336-9A11-5EF7-FC1A6FBF15A7}"/>
               </a:ext>
             </a:extLst>
           </p:cNvPr>
@@ -9823,7 +9823,7 @@
     </p:spTree>
     <p:extLst>
       <p:ext uri="{BB962C8B-B14F-4D97-AF65-F5344CB8AC3E}">
-        <p14:creationId xmlns:p14="http://schemas.microsoft.com/office/powerpoint/2010/main" val="2136316966"/>
+        <p14:creationId xmlns:p14="http://schemas.microsoft.com/office/powerpoint/2010/main" val="1435747067"/>
       </p:ext>
     </p:extLst>
   </p:cSld>
@@ -9855,7 +9855,7 @@
           <p:cNvPr id="7" name="creative_background">
             <a:extLst>
               <a:ext uri="{FF2B5EF4-FFF2-40B4-BE49-F238E27FC236}">
-                <a16:creationId xmlns:a16="http://schemas.microsoft.com/office/drawing/2014/main" id="{1AE835F4-2E67-BC96-E52B-074075EF614E}"/>
+                <a16:creationId xmlns:a16="http://schemas.microsoft.com/office/drawing/2014/main" id="{69A99619-9218-FA50-07A7-A587F3932563}"/>
               </a:ext>
             </a:extLst>
           </p:cNvPr>
@@ -9928,7 +9928,7 @@
           <a:bodyPr/>
           <a:lstStyle/>
           <a:p>
-            <a:fld id="{10ED7D75-8BCA-4792-8B33-188BE8B045C9}" type="datetimeFigureOut">
+            <a:fld id="{C5DDA866-DF04-4AEF-ADD4-8AFF018326A8}" type="datetimeFigureOut">
               <a:rPr lang="en-US" smtClean="0"/>
               <a:t>10/3/2026</a:t>
             </a:fld>
@@ -9970,7 +9970,7 @@
           <a:bodyPr/>
           <a:lstStyle/>
           <a:p>
-            <a:fld id="{EDD050AF-432A-42B3-B4EC-757E823036E9}" type="slidenum">
+            <a:fld id="{B3BADF7A-34E3-4F53-BB65-9FE23DA90D0C}" type="slidenum">
               <a:rPr lang="en-US" smtClean="0"/>
               <a:t>‹#›</a:t>
             </a:fld>
@@ -9983,7 +9983,7 @@
           <p:cNvPr id="8" name="decisions_title">
             <a:extLst>
               <a:ext uri="{FF2B5EF4-FFF2-40B4-BE49-F238E27FC236}">
-                <a16:creationId xmlns:a16="http://schemas.microsoft.com/office/drawing/2014/main" id="{7401B1FE-AF83-C57F-BDEE-B878ED75D922}"/>
+                <a16:creationId xmlns:a16="http://schemas.microsoft.com/office/drawing/2014/main" id="{5493EC2A-0576-335C-7B5C-26CA246CFF29}"/>
               </a:ext>
             </a:extLst>
           </p:cNvPr>
@@ -10033,7 +10033,7 @@
           <p:cNvPr id="9" name="decisions">
             <a:extLst>
               <a:ext uri="{FF2B5EF4-FFF2-40B4-BE49-F238E27FC236}">
-                <a16:creationId xmlns:a16="http://schemas.microsoft.com/office/drawing/2014/main" id="{D2CE8524-C39C-9405-BA67-CF5188ABA024}"/>
+                <a16:creationId xmlns:a16="http://schemas.microsoft.com/office/drawing/2014/main" id="{3AC790CC-1AAB-A077-4E5D-B9FFFC54D2D5}"/>
               </a:ext>
             </a:extLst>
           </p:cNvPr>
@@ -10076,7 +10076,7 @@
           <p:cNvPr id="10" name="item_1_title">
             <a:extLst>
               <a:ext uri="{FF2B5EF4-FFF2-40B4-BE49-F238E27FC236}">
-                <a16:creationId xmlns:a16="http://schemas.microsoft.com/office/drawing/2014/main" id="{6927B997-4FA0-6760-03C3-E6C6B9D76624}"/>
+                <a16:creationId xmlns:a16="http://schemas.microsoft.com/office/drawing/2014/main" id="{ED3F8C12-4CAC-2D32-FAA5-5C053C32D5C5}"/>
               </a:ext>
             </a:extLst>
           </p:cNvPr>
@@ -10129,7 +10129,7 @@
           <p:cNvPr id="11" name="item_1">
             <a:extLst>
               <a:ext uri="{FF2B5EF4-FFF2-40B4-BE49-F238E27FC236}">
-                <a16:creationId xmlns:a16="http://schemas.microsoft.com/office/drawing/2014/main" id="{FB5A8D84-6520-00CE-B77B-094ACE59D53D}"/>
+                <a16:creationId xmlns:a16="http://schemas.microsoft.com/office/drawing/2014/main" id="{837A0C6D-D0CB-2150-DAE4-22781744B6D7}"/>
               </a:ext>
             </a:extLst>
           </p:cNvPr>
@@ -10177,7 +10177,7 @@
           <p:cNvPr id="12" name="item_2_title">
             <a:extLst>
               <a:ext uri="{FF2B5EF4-FFF2-40B4-BE49-F238E27FC236}">
-                <a16:creationId xmlns:a16="http://schemas.microsoft.com/office/drawing/2014/main" id="{90ECD861-CD75-A41C-0807-88CBF111CB21}"/>
+                <a16:creationId xmlns:a16="http://schemas.microsoft.com/office/drawing/2014/main" id="{16D418B3-4537-1559-F1A8-5FDFDB6DCE6A}"/>
               </a:ext>
             </a:extLst>
           </p:cNvPr>
@@ -10230,7 +10230,7 @@
           <p:cNvPr id="13" name="item_2">
             <a:extLst>
               <a:ext uri="{FF2B5EF4-FFF2-40B4-BE49-F238E27FC236}">
-                <a16:creationId xmlns:a16="http://schemas.microsoft.com/office/drawing/2014/main" id="{7A3A271F-90C9-76BC-9C60-59DABD67DCC4}"/>
+                <a16:creationId xmlns:a16="http://schemas.microsoft.com/office/drawing/2014/main" id="{4D6EA814-A0E6-DC10-6393-1C49E3BF1755}"/>
               </a:ext>
             </a:extLst>
           </p:cNvPr>
@@ -10278,7 +10278,7 @@
           <p:cNvPr id="14" name="item_3_title">
             <a:extLst>
               <a:ext uri="{FF2B5EF4-FFF2-40B4-BE49-F238E27FC236}">
-                <a16:creationId xmlns:a16="http://schemas.microsoft.com/office/drawing/2014/main" id="{A4995732-B05E-94AC-2A19-8865F73ADBCA}"/>
+                <a16:creationId xmlns:a16="http://schemas.microsoft.com/office/drawing/2014/main" id="{0A216FEE-2634-A824-6E1B-0DCE2B31FD03}"/>
               </a:ext>
             </a:extLst>
           </p:cNvPr>
@@ -10331,7 +10331,7 @@
           <p:cNvPr id="15" name="item_3">
             <a:extLst>
               <a:ext uri="{FF2B5EF4-FFF2-40B4-BE49-F238E27FC236}">
-                <a16:creationId xmlns:a16="http://schemas.microsoft.com/office/drawing/2014/main" id="{942666FE-A86A-60F3-732A-D68652F70C7C}"/>
+                <a16:creationId xmlns:a16="http://schemas.microsoft.com/office/drawing/2014/main" id="{2F91E331-5A10-D69B-FA8A-79E66158CB2D}"/>
               </a:ext>
             </a:extLst>
           </p:cNvPr>
@@ -10379,7 +10379,7 @@
           <p:cNvPr id="16" name="source">
             <a:extLst>
               <a:ext uri="{FF2B5EF4-FFF2-40B4-BE49-F238E27FC236}">
-                <a16:creationId xmlns:a16="http://schemas.microsoft.com/office/drawing/2014/main" id="{9AD79A3D-B0AD-5691-92E3-322C14BADD7F}"/>
+                <a16:creationId xmlns:a16="http://schemas.microsoft.com/office/drawing/2014/main" id="{7D04884B-03A0-8CFA-7B52-932DE6F27633}"/>
               </a:ext>
             </a:extLst>
           </p:cNvPr>
@@ -10434,7 +10434,7 @@
     </p:spTree>
     <p:extLst>
       <p:ext uri="{BB962C8B-B14F-4D97-AF65-F5344CB8AC3E}">
-        <p14:creationId xmlns:p14="http://schemas.microsoft.com/office/powerpoint/2010/main" val="3006582326"/>
+        <p14:creationId xmlns:p14="http://schemas.microsoft.com/office/powerpoint/2010/main" val="2299138747"/>
       </p:ext>
     </p:extLst>
   </p:cSld>
@@ -10466,7 +10466,7 @@
           <p:cNvPr id="7" name="creative_background">
             <a:extLst>
               <a:ext uri="{FF2B5EF4-FFF2-40B4-BE49-F238E27FC236}">
-                <a16:creationId xmlns:a16="http://schemas.microsoft.com/office/drawing/2014/main" id="{ABF7EF36-8C53-4DBB-7B71-0021E51DAF98}"/>
+                <a16:creationId xmlns:a16="http://schemas.microsoft.com/office/drawing/2014/main" id="{2C19DCE0-5B9C-BD74-4404-66CBB7E290BD}"/>
               </a:ext>
             </a:extLst>
           </p:cNvPr>
@@ -10539,7 +10539,7 @@
           <a:bodyPr/>
           <a:lstStyle/>
           <a:p>
-            <a:fld id="{10ED7D75-8BCA-4792-8B33-188BE8B045C9}" type="datetimeFigureOut">
+            <a:fld id="{C5DDA866-DF04-4AEF-ADD4-8AFF018326A8}" type="datetimeFigureOut">
               <a:rPr lang="en-US" smtClean="0"/>
               <a:t>10/3/2026</a:t>
             </a:fld>
@@ -10581,7 +10581,7 @@
           <a:bodyPr/>
           <a:lstStyle/>
           <a:p>
-            <a:fld id="{EDD050AF-432A-42B3-B4EC-757E823036E9}" type="slidenum">
+            <a:fld id="{B3BADF7A-34E3-4F53-BB65-9FE23DA90D0C}" type="slidenum">
               <a:rPr lang="en-US" smtClean="0"/>
               <a:t>‹#›</a:t>
             </a:fld>
@@ -10594,7 +10594,7 @@
           <p:cNvPr id="8" name="body">
             <a:extLst>
               <a:ext uri="{FF2B5EF4-FFF2-40B4-BE49-F238E27FC236}">
-                <a16:creationId xmlns:a16="http://schemas.microsoft.com/office/drawing/2014/main" id="{18B8114B-56CB-1D94-E24D-99505C984D9A}"/>
+                <a16:creationId xmlns:a16="http://schemas.microsoft.com/office/drawing/2014/main" id="{0346A32D-78B2-03CD-2D68-0B5BB0650EAB}"/>
               </a:ext>
             </a:extLst>
           </p:cNvPr>
@@ -10634,7 +10634,7 @@
           <p:cNvPr id="9" name="kpi_value_1">
             <a:extLst>
               <a:ext uri="{FF2B5EF4-FFF2-40B4-BE49-F238E27FC236}">
-                <a16:creationId xmlns:a16="http://schemas.microsoft.com/office/drawing/2014/main" id="{4640859F-F492-633A-95F3-6ED5996831D1}"/>
+                <a16:creationId xmlns:a16="http://schemas.microsoft.com/office/drawing/2014/main" id="{AB942302-B5B7-0107-7F65-04A48ED6E32B}"/>
               </a:ext>
             </a:extLst>
           </p:cNvPr>
@@ -10687,7 +10687,7 @@
           <p:cNvPr id="10" name="kpi_label_1">
             <a:extLst>
               <a:ext uri="{FF2B5EF4-FFF2-40B4-BE49-F238E27FC236}">
-                <a16:creationId xmlns:a16="http://schemas.microsoft.com/office/drawing/2014/main" id="{41C58D8A-F526-9508-6729-C24F5C5A2D8F}"/>
+                <a16:creationId xmlns:a16="http://schemas.microsoft.com/office/drawing/2014/main" id="{3D086127-5BC4-F362-D84D-E30BE0D5455F}"/>
               </a:ext>
             </a:extLst>
           </p:cNvPr>
@@ -10735,7 +10735,7 @@
           <p:cNvPr id="11" name="kpi_value_2">
             <a:extLst>
               <a:ext uri="{FF2B5EF4-FFF2-40B4-BE49-F238E27FC236}">
-                <a16:creationId xmlns:a16="http://schemas.microsoft.com/office/drawing/2014/main" id="{9774CD8D-8EF4-6575-1751-B83D81676E03}"/>
+                <a16:creationId xmlns:a16="http://schemas.microsoft.com/office/drawing/2014/main" id="{DCDF920A-9D56-A3D7-5BFF-E79964DCADD1}"/>
               </a:ext>
             </a:extLst>
           </p:cNvPr>
@@ -10788,7 +10788,7 @@
           <p:cNvPr id="12" name="kpi_label_2">
             <a:extLst>
               <a:ext uri="{FF2B5EF4-FFF2-40B4-BE49-F238E27FC236}">
-                <a16:creationId xmlns:a16="http://schemas.microsoft.com/office/drawing/2014/main" id="{00E21EEB-76ED-5796-0AE2-ADAC8BF089BE}"/>
+                <a16:creationId xmlns:a16="http://schemas.microsoft.com/office/drawing/2014/main" id="{D016D15F-35F6-A936-745C-99084FBCC924}"/>
               </a:ext>
             </a:extLst>
           </p:cNvPr>
@@ -10836,7 +10836,7 @@
           <p:cNvPr id="13" name="source">
             <a:extLst>
               <a:ext uri="{FF2B5EF4-FFF2-40B4-BE49-F238E27FC236}">
-                <a16:creationId xmlns:a16="http://schemas.microsoft.com/office/drawing/2014/main" id="{80C05DA9-D409-63C3-4F1F-4A37CFFB295E}"/>
+                <a16:creationId xmlns:a16="http://schemas.microsoft.com/office/drawing/2014/main" id="{744B23BE-3770-611B-64D8-3EABD88D6EBE}"/>
               </a:ext>
             </a:extLst>
           </p:cNvPr>
@@ -10891,7 +10891,7 @@
     </p:spTree>
     <p:extLst>
       <p:ext uri="{BB962C8B-B14F-4D97-AF65-F5344CB8AC3E}">
-        <p14:creationId xmlns:p14="http://schemas.microsoft.com/office/powerpoint/2010/main" val="909375685"/>
+        <p14:creationId xmlns:p14="http://schemas.microsoft.com/office/powerpoint/2010/main" val="4159505870"/>
       </p:ext>
     </p:extLst>
   </p:cSld>
@@ -10923,7 +10923,7 @@
           <p:cNvPr id="7" name="creative_background">
             <a:extLst>
               <a:ext uri="{FF2B5EF4-FFF2-40B4-BE49-F238E27FC236}">
-                <a16:creationId xmlns:a16="http://schemas.microsoft.com/office/drawing/2014/main" id="{451E9E67-0454-3A4D-78BD-8AB2E8BE648A}"/>
+                <a16:creationId xmlns:a16="http://schemas.microsoft.com/office/drawing/2014/main" id="{7ECE9EF9-F4D1-AB34-F5BD-A2977C1CCBC2}"/>
               </a:ext>
             </a:extLst>
           </p:cNvPr>
@@ -10996,7 +10996,7 @@
           <a:bodyPr/>
           <a:lstStyle/>
           <a:p>
-            <a:fld id="{10ED7D75-8BCA-4792-8B33-188BE8B045C9}" type="datetimeFigureOut">
+            <a:fld id="{C5DDA866-DF04-4AEF-ADD4-8AFF018326A8}" type="datetimeFigureOut">
               <a:rPr lang="en-US" smtClean="0"/>
               <a:t>10/3/2026</a:t>
             </a:fld>
@@ -11038,7 +11038,7 @@
           <a:bodyPr/>
           <a:lstStyle/>
           <a:p>
-            <a:fld id="{EDD050AF-432A-42B3-B4EC-757E823036E9}" type="slidenum">
+            <a:fld id="{B3BADF7A-34E3-4F53-BB65-9FE23DA90D0C}" type="slidenum">
               <a:rPr lang="en-US" smtClean="0"/>
               <a:t>‹#›</a:t>
             </a:fld>
@@ -11051,7 +11051,7 @@
           <p:cNvPr id="8" name="body">
             <a:extLst>
               <a:ext uri="{FF2B5EF4-FFF2-40B4-BE49-F238E27FC236}">
-                <a16:creationId xmlns:a16="http://schemas.microsoft.com/office/drawing/2014/main" id="{B2072524-B019-06E5-440B-4304E50C7ED2}"/>
+                <a16:creationId xmlns:a16="http://schemas.microsoft.com/office/drawing/2014/main" id="{E46199E9-ABBC-434F-4371-F16C94F4DBF1}"/>
               </a:ext>
             </a:extLst>
           </p:cNvPr>
@@ -11091,7 +11091,7 @@
           <p:cNvPr id="9" name="kpi_value_1">
             <a:extLst>
               <a:ext uri="{FF2B5EF4-FFF2-40B4-BE49-F238E27FC236}">
-                <a16:creationId xmlns:a16="http://schemas.microsoft.com/office/drawing/2014/main" id="{D26E2428-4D08-FE94-133A-211F06CD14C9}"/>
+                <a16:creationId xmlns:a16="http://schemas.microsoft.com/office/drawing/2014/main" id="{B4ABCF8A-F321-72C1-1338-B2F3128B4685}"/>
               </a:ext>
             </a:extLst>
           </p:cNvPr>
@@ -11144,7 +11144,7 @@
           <p:cNvPr id="10" name="kpi_label_1">
             <a:extLst>
               <a:ext uri="{FF2B5EF4-FFF2-40B4-BE49-F238E27FC236}">
-                <a16:creationId xmlns:a16="http://schemas.microsoft.com/office/drawing/2014/main" id="{B4C62D21-A276-FFCA-E54B-F23558F18275}"/>
+                <a16:creationId xmlns:a16="http://schemas.microsoft.com/office/drawing/2014/main" id="{42E1EBB5-48F4-224D-082F-E49A5BD38AC0}"/>
               </a:ext>
             </a:extLst>
           </p:cNvPr>
@@ -11192,7 +11192,7 @@
           <p:cNvPr id="11" name="kpi_value_2">
             <a:extLst>
               <a:ext uri="{FF2B5EF4-FFF2-40B4-BE49-F238E27FC236}">
-                <a16:creationId xmlns:a16="http://schemas.microsoft.com/office/drawing/2014/main" id="{C3B3F146-078A-11F3-0335-AFF848CD537A}"/>
+                <a16:creationId xmlns:a16="http://schemas.microsoft.com/office/drawing/2014/main" id="{AF6D3426-7662-84A1-4854-C465EFA3B566}"/>
               </a:ext>
             </a:extLst>
           </p:cNvPr>
@@ -11245,7 +11245,7 @@
           <p:cNvPr id="12" name="kpi_label_2">
             <a:extLst>
               <a:ext uri="{FF2B5EF4-FFF2-40B4-BE49-F238E27FC236}">
-                <a16:creationId xmlns:a16="http://schemas.microsoft.com/office/drawing/2014/main" id="{79C53591-4021-97A8-F9A3-FA9972929B2C}"/>
+                <a16:creationId xmlns:a16="http://schemas.microsoft.com/office/drawing/2014/main" id="{A317069A-3B4D-EC6E-3B4F-E3BCB84D90F5}"/>
               </a:ext>
             </a:extLst>
           </p:cNvPr>
@@ -11293,7 +11293,7 @@
           <p:cNvPr id="13" name="kpi_value_3">
             <a:extLst>
               <a:ext uri="{FF2B5EF4-FFF2-40B4-BE49-F238E27FC236}">
-                <a16:creationId xmlns:a16="http://schemas.microsoft.com/office/drawing/2014/main" id="{9FEB2A2D-2CDE-32FE-AEB1-3BAD5578FDD8}"/>
+                <a16:creationId xmlns:a16="http://schemas.microsoft.com/office/drawing/2014/main" id="{123A2BDB-2493-DA79-84D8-0CED135B48B9}"/>
               </a:ext>
             </a:extLst>
           </p:cNvPr>
@@ -11346,7 +11346,7 @@
           <p:cNvPr id="14" name="kpi_label_3">
             <a:extLst>
               <a:ext uri="{FF2B5EF4-FFF2-40B4-BE49-F238E27FC236}">
-                <a16:creationId xmlns:a16="http://schemas.microsoft.com/office/drawing/2014/main" id="{0B5CC9E9-E128-FA85-7D53-F5F66FFC8288}"/>
+                <a16:creationId xmlns:a16="http://schemas.microsoft.com/office/drawing/2014/main" id="{1C8DD19B-2B26-FCB5-06FE-4652BA6CEA31}"/>
               </a:ext>
             </a:extLst>
           </p:cNvPr>
@@ -11394,7 +11394,7 @@
           <p:cNvPr id="15" name="kpi_value_4">
             <a:extLst>
               <a:ext uri="{FF2B5EF4-FFF2-40B4-BE49-F238E27FC236}">
-                <a16:creationId xmlns:a16="http://schemas.microsoft.com/office/drawing/2014/main" id="{FCDEE46A-7B8E-9BB6-0AF6-76F3926EB62F}"/>
+                <a16:creationId xmlns:a16="http://schemas.microsoft.com/office/drawing/2014/main" id="{FA01E137-CA6F-E4D7-8804-8900659F2C7B}"/>
               </a:ext>
             </a:extLst>
           </p:cNvPr>
@@ -11447,7 +11447,7 @@
           <p:cNvPr id="16" name="kpi_label_4">
             <a:extLst>
               <a:ext uri="{FF2B5EF4-FFF2-40B4-BE49-F238E27FC236}">
-                <a16:creationId xmlns:a16="http://schemas.microsoft.com/office/drawing/2014/main" id="{5DD3D0F6-AFA3-48C2-A726-42AD42472DAD}"/>
+                <a16:creationId xmlns:a16="http://schemas.microsoft.com/office/drawing/2014/main" id="{65DFC636-AF8C-07D6-2396-8338BA737A5D}"/>
               </a:ext>
             </a:extLst>
           </p:cNvPr>
@@ -11495,7 +11495,7 @@
           <p:cNvPr id="17" name="source">
             <a:extLst>
               <a:ext uri="{FF2B5EF4-FFF2-40B4-BE49-F238E27FC236}">
-                <a16:creationId xmlns:a16="http://schemas.microsoft.com/office/drawing/2014/main" id="{B9A89D14-1706-CE0B-A251-E7191E2BF849}"/>
+                <a16:creationId xmlns:a16="http://schemas.microsoft.com/office/drawing/2014/main" id="{27F3341F-F518-C226-AC5A-FF0074FB1803}"/>
               </a:ext>
             </a:extLst>
           </p:cNvPr>
@@ -11550,7 +11550,7 @@
     </p:spTree>
     <p:extLst>
       <p:ext uri="{BB962C8B-B14F-4D97-AF65-F5344CB8AC3E}">
-        <p14:creationId xmlns:p14="http://schemas.microsoft.com/office/powerpoint/2010/main" val="1241915248"/>
+        <p14:creationId xmlns:p14="http://schemas.microsoft.com/office/powerpoint/2010/main" val="2832572188"/>
       </p:ext>
     </p:extLst>
   </p:cSld>
@@ -11582,7 +11582,7 @@
           <p:cNvPr id="7" name="creative_background">
             <a:extLst>
               <a:ext uri="{FF2B5EF4-FFF2-40B4-BE49-F238E27FC236}">
-                <a16:creationId xmlns:a16="http://schemas.microsoft.com/office/drawing/2014/main" id="{B9B390C2-EC17-411B-AFCA-6C907977AAE7}"/>
+                <a16:creationId xmlns:a16="http://schemas.microsoft.com/office/drawing/2014/main" id="{53EAE19D-3B1D-33A9-9B29-60F48CA0B8C8}"/>
               </a:ext>
             </a:extLst>
           </p:cNvPr>
@@ -11655,7 +11655,7 @@
           <a:bodyPr/>
           <a:lstStyle/>
           <a:p>
-            <a:fld id="{10ED7D75-8BCA-4792-8B33-188BE8B045C9}" type="datetimeFigureOut">
+            <a:fld id="{C5DDA866-DF04-4AEF-ADD4-8AFF018326A8}" type="datetimeFigureOut">
               <a:rPr lang="en-US" smtClean="0"/>
               <a:t>10/3/2026</a:t>
             </a:fld>
@@ -11697,7 +11697,7 @@
           <a:bodyPr/>
           <a:lstStyle/>
           <a:p>
-            <a:fld id="{EDD050AF-432A-42B3-B4EC-757E823036E9}" type="slidenum">
+            <a:fld id="{B3BADF7A-34E3-4F53-BB65-9FE23DA90D0C}" type="slidenum">
               <a:rPr lang="en-US" smtClean="0"/>
               <a:t>‹#›</a:t>
             </a:fld>
@@ -11710,7 +11710,7 @@
           <p:cNvPr id="8" name="body">
             <a:extLst>
               <a:ext uri="{FF2B5EF4-FFF2-40B4-BE49-F238E27FC236}">
-                <a16:creationId xmlns:a16="http://schemas.microsoft.com/office/drawing/2014/main" id="{307C7336-EE26-DE5D-3822-D7C398FED4A6}"/>
+                <a16:creationId xmlns:a16="http://schemas.microsoft.com/office/drawing/2014/main" id="{B34139D2-7FB8-C132-F6A2-825E1A9C71D9}"/>
               </a:ext>
             </a:extLst>
           </p:cNvPr>
@@ -11750,7 +11750,7 @@
           <p:cNvPr id="9" name="quote">
             <a:extLst>
               <a:ext uri="{FF2B5EF4-FFF2-40B4-BE49-F238E27FC236}">
-                <a16:creationId xmlns:a16="http://schemas.microsoft.com/office/drawing/2014/main" id="{05C1FE27-1DF6-A04B-DE38-F7E05EE2BE25}"/>
+                <a16:creationId xmlns:a16="http://schemas.microsoft.com/office/drawing/2014/main" id="{32D2BC1C-C6FB-4D45-BF68-C73D05D53A75}"/>
               </a:ext>
             </a:extLst>
           </p:cNvPr>
@@ -11800,7 +11800,7 @@
           <p:cNvPr id="10" name="attribution">
             <a:extLst>
               <a:ext uri="{FF2B5EF4-FFF2-40B4-BE49-F238E27FC236}">
-                <a16:creationId xmlns:a16="http://schemas.microsoft.com/office/drawing/2014/main" id="{163BFC4D-C2EA-51DF-8245-DE668A9722E5}"/>
+                <a16:creationId xmlns:a16="http://schemas.microsoft.com/office/drawing/2014/main" id="{5EB63CDF-3BF7-87C2-445F-B7E6D4786C6C}"/>
               </a:ext>
             </a:extLst>
           </p:cNvPr>
@@ -11848,7 +11848,7 @@
           <p:cNvPr id="11" name="source">
             <a:extLst>
               <a:ext uri="{FF2B5EF4-FFF2-40B4-BE49-F238E27FC236}">
-                <a16:creationId xmlns:a16="http://schemas.microsoft.com/office/drawing/2014/main" id="{564F4171-7F21-7AA5-5386-A02395FB46E9}"/>
+                <a16:creationId xmlns:a16="http://schemas.microsoft.com/office/drawing/2014/main" id="{E641EBCB-1923-DF28-82F0-F4A7754DBB34}"/>
               </a:ext>
             </a:extLst>
           </p:cNvPr>
@@ -11903,7 +11903,7 @@
     </p:spTree>
     <p:extLst>
       <p:ext uri="{BB962C8B-B14F-4D97-AF65-F5344CB8AC3E}">
-        <p14:creationId xmlns:p14="http://schemas.microsoft.com/office/powerpoint/2010/main" val="2542758336"/>
+        <p14:creationId xmlns:p14="http://schemas.microsoft.com/office/powerpoint/2010/main" val="2473349100"/>
       </p:ext>
     </p:extLst>
   </p:cSld>
@@ -11935,7 +11935,7 @@
           <p:cNvPr id="7" name="creative_background">
             <a:extLst>
               <a:ext uri="{FF2B5EF4-FFF2-40B4-BE49-F238E27FC236}">
-                <a16:creationId xmlns:a16="http://schemas.microsoft.com/office/drawing/2014/main" id="{0995EDA9-6431-7139-AA0E-31A24FCE0DEB}"/>
+                <a16:creationId xmlns:a16="http://schemas.microsoft.com/office/drawing/2014/main" id="{AA09EA44-EB9B-92B0-7BC0-A989DBC3042F}"/>
               </a:ext>
             </a:extLst>
           </p:cNvPr>
@@ -12008,7 +12008,7 @@
           <a:bodyPr/>
           <a:lstStyle/>
           <a:p>
-            <a:fld id="{10ED7D75-8BCA-4792-8B33-188BE8B045C9}" type="datetimeFigureOut">
+            <a:fld id="{C5DDA866-DF04-4AEF-ADD4-8AFF018326A8}" type="datetimeFigureOut">
               <a:rPr lang="en-US" smtClean="0"/>
               <a:t>10/3/2026</a:t>
             </a:fld>
@@ -12050,7 +12050,7 @@
           <a:bodyPr/>
           <a:lstStyle/>
           <a:p>
-            <a:fld id="{EDD050AF-432A-42B3-B4EC-757E823036E9}" type="slidenum">
+            <a:fld id="{B3BADF7A-34E3-4F53-BB65-9FE23DA90D0C}" type="slidenum">
               <a:rPr lang="en-US" smtClean="0"/>
               <a:t>‹#›</a:t>
             </a:fld>
@@ -12063,7 +12063,7 @@
           <p:cNvPr id="8" name="item_1_title">
             <a:extLst>
               <a:ext uri="{FF2B5EF4-FFF2-40B4-BE49-F238E27FC236}">
-                <a16:creationId xmlns:a16="http://schemas.microsoft.com/office/drawing/2014/main" id="{6637B837-4691-3191-8522-1C6CE4EAE960}"/>
+                <a16:creationId xmlns:a16="http://schemas.microsoft.com/office/drawing/2014/main" id="{C6A5F7BB-FF8F-E1D5-F4F8-BC7723F13332}"/>
               </a:ext>
             </a:extLst>
           </p:cNvPr>
@@ -12113,7 +12113,7 @@
           <p:cNvPr id="9" name="item_1">
             <a:extLst>
               <a:ext uri="{FF2B5EF4-FFF2-40B4-BE49-F238E27FC236}">
-                <a16:creationId xmlns:a16="http://schemas.microsoft.com/office/drawing/2014/main" id="{90E9A96D-E877-677C-24BD-5834BBF47757}"/>
+                <a16:creationId xmlns:a16="http://schemas.microsoft.com/office/drawing/2014/main" id="{A56F5075-07DB-3644-164B-D8DB7D3D87D6}"/>
               </a:ext>
             </a:extLst>
           </p:cNvPr>
@@ -12161,7 +12161,7 @@
           <p:cNvPr id="10" name="item_2_title">
             <a:extLst>
               <a:ext uri="{FF2B5EF4-FFF2-40B4-BE49-F238E27FC236}">
-                <a16:creationId xmlns:a16="http://schemas.microsoft.com/office/drawing/2014/main" id="{5113A1CD-053F-8C41-9077-CEEEF0F3A581}"/>
+                <a16:creationId xmlns:a16="http://schemas.microsoft.com/office/drawing/2014/main" id="{58DB4DF6-9E07-127F-B4BF-D0E2E889BDCD}"/>
               </a:ext>
             </a:extLst>
           </p:cNvPr>
@@ -12214,7 +12214,7 @@
           <p:cNvPr id="11" name="item_2">
             <a:extLst>
               <a:ext uri="{FF2B5EF4-FFF2-40B4-BE49-F238E27FC236}">
-                <a16:creationId xmlns:a16="http://schemas.microsoft.com/office/drawing/2014/main" id="{B879C18F-0F84-878E-0F11-D5CC7D14B9FF}"/>
+                <a16:creationId xmlns:a16="http://schemas.microsoft.com/office/drawing/2014/main" id="{D8FB0A36-6591-9CCC-ACA2-DC8143542DF7}"/>
               </a:ext>
             </a:extLst>
           </p:cNvPr>
@@ -12262,7 +12262,7 @@
           <p:cNvPr id="12" name="item_3_title">
             <a:extLst>
               <a:ext uri="{FF2B5EF4-FFF2-40B4-BE49-F238E27FC236}">
-                <a16:creationId xmlns:a16="http://schemas.microsoft.com/office/drawing/2014/main" id="{CF479349-43FA-1486-A67D-A4F996782E7C}"/>
+                <a16:creationId xmlns:a16="http://schemas.microsoft.com/office/drawing/2014/main" id="{AEA69F5E-49C8-897E-6584-BF0D46654F9C}"/>
               </a:ext>
             </a:extLst>
           </p:cNvPr>
@@ -12315,7 +12315,7 @@
           <p:cNvPr id="13" name="item_3">
             <a:extLst>
               <a:ext uri="{FF2B5EF4-FFF2-40B4-BE49-F238E27FC236}">
-                <a16:creationId xmlns:a16="http://schemas.microsoft.com/office/drawing/2014/main" id="{4A76BF18-1C30-837C-DE22-DFECEBEE522F}"/>
+                <a16:creationId xmlns:a16="http://schemas.microsoft.com/office/drawing/2014/main" id="{84829AA9-1DE9-3F78-3E76-95253FF482A9}"/>
               </a:ext>
             </a:extLst>
           </p:cNvPr>
@@ -12363,7 +12363,7 @@
           <p:cNvPr id="14" name="source">
             <a:extLst>
               <a:ext uri="{FF2B5EF4-FFF2-40B4-BE49-F238E27FC236}">
-                <a16:creationId xmlns:a16="http://schemas.microsoft.com/office/drawing/2014/main" id="{F0E76077-2038-7EB5-84B7-5FF0AD777047}"/>
+                <a16:creationId xmlns:a16="http://schemas.microsoft.com/office/drawing/2014/main" id="{1C392350-05F5-206F-FE26-9627A2CEFE03}"/>
               </a:ext>
             </a:extLst>
           </p:cNvPr>
@@ -12418,7 +12418,7 @@
     </p:spTree>
     <p:extLst>
       <p:ext uri="{BB962C8B-B14F-4D97-AF65-F5344CB8AC3E}">
-        <p14:creationId xmlns:p14="http://schemas.microsoft.com/office/powerpoint/2010/main" val="3205408474"/>
+        <p14:creationId xmlns:p14="http://schemas.microsoft.com/office/powerpoint/2010/main" val="3329471221"/>
       </p:ext>
     </p:extLst>
   </p:cSld>
@@ -12450,7 +12450,7 @@
           <p:cNvPr id="7" name="creative_background">
             <a:extLst>
               <a:ext uri="{FF2B5EF4-FFF2-40B4-BE49-F238E27FC236}">
-                <a16:creationId xmlns:a16="http://schemas.microsoft.com/office/drawing/2014/main" id="{B38751B9-49F4-78E5-1C7C-4BC33D57517D}"/>
+                <a16:creationId xmlns:a16="http://schemas.microsoft.com/office/drawing/2014/main" id="{29FD7033-4F1A-C54A-0FA4-F80B4093C81A}"/>
               </a:ext>
             </a:extLst>
           </p:cNvPr>
@@ -12523,7 +12523,7 @@
           <a:bodyPr/>
           <a:lstStyle/>
           <a:p>
-            <a:fld id="{10ED7D75-8BCA-4792-8B33-188BE8B045C9}" type="datetimeFigureOut">
+            <a:fld id="{C5DDA866-DF04-4AEF-ADD4-8AFF018326A8}" type="datetimeFigureOut">
               <a:rPr lang="en-US" smtClean="0"/>
               <a:t>10/3/2026</a:t>
             </a:fld>
@@ -12565,7 +12565,7 @@
           <a:bodyPr/>
           <a:lstStyle/>
           <a:p>
-            <a:fld id="{EDD050AF-432A-42B3-B4EC-757E823036E9}" type="slidenum">
+            <a:fld id="{B3BADF7A-34E3-4F53-BB65-9FE23DA90D0C}" type="slidenum">
               <a:rPr lang="en-US" smtClean="0"/>
               <a:t>‹#›</a:t>
             </a:fld>
@@ -12578,7 +12578,7 @@
           <p:cNvPr id="8" name="item_1_title">
             <a:extLst>
               <a:ext uri="{FF2B5EF4-FFF2-40B4-BE49-F238E27FC236}">
-                <a16:creationId xmlns:a16="http://schemas.microsoft.com/office/drawing/2014/main" id="{5AB75ECD-AA8A-580C-7548-F3BF156790B4}"/>
+                <a16:creationId xmlns:a16="http://schemas.microsoft.com/office/drawing/2014/main" id="{BC6A2A1E-EB65-4105-C39E-ADE0B636E21A}"/>
               </a:ext>
             </a:extLst>
           </p:cNvPr>
@@ -12628,7 +12628,7 @@
           <p:cNvPr id="9" name="item_1">
             <a:extLst>
               <a:ext uri="{FF2B5EF4-FFF2-40B4-BE49-F238E27FC236}">
-                <a16:creationId xmlns:a16="http://schemas.microsoft.com/office/drawing/2014/main" id="{6820DCAD-345B-6C19-48CE-370AC2992727}"/>
+                <a16:creationId xmlns:a16="http://schemas.microsoft.com/office/drawing/2014/main" id="{58141330-AEE1-8BC9-A93E-B514EB24737C}"/>
               </a:ext>
             </a:extLst>
           </p:cNvPr>
@@ -12676,7 +12676,7 @@
           <p:cNvPr id="10" name="item_2_title">
             <a:extLst>
               <a:ext uri="{FF2B5EF4-FFF2-40B4-BE49-F238E27FC236}">
-                <a16:creationId xmlns:a16="http://schemas.microsoft.com/office/drawing/2014/main" id="{A0EA23FA-63DE-F48B-723A-9DBBC3BA5D4E}"/>
+                <a16:creationId xmlns:a16="http://schemas.microsoft.com/office/drawing/2014/main" id="{B6F28D6D-DDE4-6878-15F6-4010E48F2063}"/>
               </a:ext>
             </a:extLst>
           </p:cNvPr>
@@ -12729,7 +12729,7 @@
           <p:cNvPr id="11" name="item_2">
             <a:extLst>
               <a:ext uri="{FF2B5EF4-FFF2-40B4-BE49-F238E27FC236}">
-                <a16:creationId xmlns:a16="http://schemas.microsoft.com/office/drawing/2014/main" id="{EBA958A2-BFE5-C659-7982-647F7764A61A}"/>
+                <a16:creationId xmlns:a16="http://schemas.microsoft.com/office/drawing/2014/main" id="{3327835A-7601-445F-603C-3FEBCF13F87C}"/>
               </a:ext>
             </a:extLst>
           </p:cNvPr>
@@ -12777,7 +12777,7 @@
           <p:cNvPr id="12" name="source">
             <a:extLst>
               <a:ext uri="{FF2B5EF4-FFF2-40B4-BE49-F238E27FC236}">
-                <a16:creationId xmlns:a16="http://schemas.microsoft.com/office/drawing/2014/main" id="{ED1486C2-1ACC-BC13-3018-BC098FAD5A0F}"/>
+                <a16:creationId xmlns:a16="http://schemas.microsoft.com/office/drawing/2014/main" id="{6A3D4032-71AC-9121-6D00-70ABB38D009D}"/>
               </a:ext>
             </a:extLst>
           </p:cNvPr>
@@ -12832,7 +12832,7 @@
     </p:spTree>
     <p:extLst>
       <p:ext uri="{BB962C8B-B14F-4D97-AF65-F5344CB8AC3E}">
-        <p14:creationId xmlns:p14="http://schemas.microsoft.com/office/powerpoint/2010/main" val="655003264"/>
+        <p14:creationId xmlns:p14="http://schemas.microsoft.com/office/powerpoint/2010/main" val="1778729549"/>
       </p:ext>
     </p:extLst>
   </p:cSld>
@@ -12864,7 +12864,7 @@
           <p:cNvPr id="7" name="creative_background">
             <a:extLst>
               <a:ext uri="{FF2B5EF4-FFF2-40B4-BE49-F238E27FC236}">
-                <a16:creationId xmlns:a16="http://schemas.microsoft.com/office/drawing/2014/main" id="{9387438D-E439-0C2E-5D78-6CB265F8AE8B}"/>
+                <a16:creationId xmlns:a16="http://schemas.microsoft.com/office/drawing/2014/main" id="{BF5AD1CF-23FA-D5F4-1DD8-446E760584A5}"/>
               </a:ext>
             </a:extLst>
           </p:cNvPr>
@@ -12937,7 +12937,7 @@
           <a:bodyPr/>
           <a:lstStyle/>
           <a:p>
-            <a:fld id="{10ED7D75-8BCA-4792-8B33-188BE8B045C9}" type="datetimeFigureOut">
+            <a:fld id="{C5DDA866-DF04-4AEF-ADD4-8AFF018326A8}" type="datetimeFigureOut">
               <a:rPr lang="en-US" smtClean="0"/>
               <a:t>10/3/2026</a:t>
             </a:fld>
@@ -12979,7 +12979,7 @@
           <a:bodyPr/>
           <a:lstStyle/>
           <a:p>
-            <a:fld id="{EDD050AF-432A-42B3-B4EC-757E823036E9}" type="slidenum">
+            <a:fld id="{B3BADF7A-34E3-4F53-BB65-9FE23DA90D0C}" type="slidenum">
               <a:rPr lang="en-US" smtClean="0"/>
               <a:t>‹#›</a:t>
             </a:fld>
@@ -12992,7 +12992,7 @@
           <p:cNvPr id="8" name="chart">
             <a:extLst>
               <a:ext uri="{FF2B5EF4-FFF2-40B4-BE49-F238E27FC236}">
-                <a16:creationId xmlns:a16="http://schemas.microsoft.com/office/drawing/2014/main" id="{DEE4DD0C-1032-D22F-D450-2BB7C364544A}"/>
+                <a16:creationId xmlns:a16="http://schemas.microsoft.com/office/drawing/2014/main" id="{60DD0141-A3AB-B18F-A59B-3776DA6DE3C8}"/>
               </a:ext>
             </a:extLst>
           </p:cNvPr>
@@ -13022,7 +13022,7 @@
           <p:cNvPr id="9" name="body">
             <a:extLst>
               <a:ext uri="{FF2B5EF4-FFF2-40B4-BE49-F238E27FC236}">
-                <a16:creationId xmlns:a16="http://schemas.microsoft.com/office/drawing/2014/main" id="{E8295216-8593-51AB-145F-D531CE3558A3}"/>
+                <a16:creationId xmlns:a16="http://schemas.microsoft.com/office/drawing/2014/main" id="{69173EA1-9738-0AF3-9179-215E8D4849F2}"/>
               </a:ext>
             </a:extLst>
           </p:cNvPr>
@@ -13065,7 +13065,7 @@
           <p:cNvPr id="10" name="source">
             <a:extLst>
               <a:ext uri="{FF2B5EF4-FFF2-40B4-BE49-F238E27FC236}">
-                <a16:creationId xmlns:a16="http://schemas.microsoft.com/office/drawing/2014/main" id="{81A4F5E3-72E0-B995-9A71-DABB355BD162}"/>
+                <a16:creationId xmlns:a16="http://schemas.microsoft.com/office/drawing/2014/main" id="{BEB2AB3B-7B1D-1F47-9AAE-BAA5A7944D36}"/>
               </a:ext>
             </a:extLst>
           </p:cNvPr>
@@ -13120,7 +13120,7 @@
     </p:spTree>
     <p:extLst>
       <p:ext uri="{BB962C8B-B14F-4D97-AF65-F5344CB8AC3E}">
-        <p14:creationId xmlns:p14="http://schemas.microsoft.com/office/powerpoint/2010/main" val="936704395"/>
+        <p14:creationId xmlns:p14="http://schemas.microsoft.com/office/powerpoint/2010/main" val="3319313085"/>
       </p:ext>
     </p:extLst>
   </p:cSld>
@@ -13152,7 +13152,7 @@
           <p:cNvPr id="7" name="creative_background">
             <a:extLst>
               <a:ext uri="{FF2B5EF4-FFF2-40B4-BE49-F238E27FC236}">
-                <a16:creationId xmlns:a16="http://schemas.microsoft.com/office/drawing/2014/main" id="{4FD67468-CD8C-C7D1-379E-48B6C4387AC1}"/>
+                <a16:creationId xmlns:a16="http://schemas.microsoft.com/office/drawing/2014/main" id="{8A666075-4D27-5E07-554F-FC18C837B082}"/>
               </a:ext>
             </a:extLst>
           </p:cNvPr>
@@ -13225,7 +13225,7 @@
           <a:bodyPr/>
           <a:lstStyle/>
           <a:p>
-            <a:fld id="{10ED7D75-8BCA-4792-8B33-188BE8B045C9}" type="datetimeFigureOut">
+            <a:fld id="{C5DDA866-DF04-4AEF-ADD4-8AFF018326A8}" type="datetimeFigureOut">
               <a:rPr lang="en-US" smtClean="0"/>
               <a:t>10/3/2026</a:t>
             </a:fld>
@@ -13267,7 +13267,7 @@
           <a:bodyPr/>
           <a:lstStyle/>
           <a:p>
-            <a:fld id="{EDD050AF-432A-42B3-B4EC-757E823036E9}" type="slidenum">
+            <a:fld id="{B3BADF7A-34E3-4F53-BB65-9FE23DA90D0C}" type="slidenum">
               <a:rPr lang="en-US" smtClean="0"/>
               <a:t>‹#›</a:t>
             </a:fld>
@@ -13280,7 +13280,7 @@
           <p:cNvPr id="8" name="item_1_title">
             <a:extLst>
               <a:ext uri="{FF2B5EF4-FFF2-40B4-BE49-F238E27FC236}">
-                <a16:creationId xmlns:a16="http://schemas.microsoft.com/office/drawing/2014/main" id="{FF9A4A1E-3D8E-AB77-9DF3-E0786E114178}"/>
+                <a16:creationId xmlns:a16="http://schemas.microsoft.com/office/drawing/2014/main" id="{FFBF4879-3587-861E-DCEB-5D28DB9CB104}"/>
               </a:ext>
             </a:extLst>
           </p:cNvPr>
@@ -13330,7 +13330,7 @@
           <p:cNvPr id="9" name="item_1">
             <a:extLst>
               <a:ext uri="{FF2B5EF4-FFF2-40B4-BE49-F238E27FC236}">
-                <a16:creationId xmlns:a16="http://schemas.microsoft.com/office/drawing/2014/main" id="{28E880E7-7AE2-2E0E-44B9-3A9C0166E2BF}"/>
+                <a16:creationId xmlns:a16="http://schemas.microsoft.com/office/drawing/2014/main" id="{A5A1A687-916F-2DF1-22F1-74C0E7689834}"/>
               </a:ext>
             </a:extLst>
           </p:cNvPr>
@@ -13378,7 +13378,7 @@
           <p:cNvPr id="10" name="item_2_title">
             <a:extLst>
               <a:ext uri="{FF2B5EF4-FFF2-40B4-BE49-F238E27FC236}">
-                <a16:creationId xmlns:a16="http://schemas.microsoft.com/office/drawing/2014/main" id="{3770C723-21E2-A310-7FE4-03C8AADF31AF}"/>
+                <a16:creationId xmlns:a16="http://schemas.microsoft.com/office/drawing/2014/main" id="{84319223-AF73-BDE0-E78E-18F54C0285B5}"/>
               </a:ext>
             </a:extLst>
           </p:cNvPr>
@@ -13431,7 +13431,7 @@
           <p:cNvPr id="11" name="item_2">
             <a:extLst>
               <a:ext uri="{FF2B5EF4-FFF2-40B4-BE49-F238E27FC236}">
-                <a16:creationId xmlns:a16="http://schemas.microsoft.com/office/drawing/2014/main" id="{AA1B0547-0609-AA73-C647-7E3FC008689A}"/>
+                <a16:creationId xmlns:a16="http://schemas.microsoft.com/office/drawing/2014/main" id="{86007F08-773F-C0D8-D5F9-51BB6B23B2EB}"/>
               </a:ext>
             </a:extLst>
           </p:cNvPr>
@@ -13479,7 +13479,7 @@
           <p:cNvPr id="12" name="item_3_title">
             <a:extLst>
               <a:ext uri="{FF2B5EF4-FFF2-40B4-BE49-F238E27FC236}">
-                <a16:creationId xmlns:a16="http://schemas.microsoft.com/office/drawing/2014/main" id="{16BF76A0-66A8-FA47-46EA-848908CDBF73}"/>
+                <a16:creationId xmlns:a16="http://schemas.microsoft.com/office/drawing/2014/main" id="{F615795E-7F03-5429-A67B-4A6CF33709BB}"/>
               </a:ext>
             </a:extLst>
           </p:cNvPr>
@@ -13532,7 +13532,7 @@
           <p:cNvPr id="13" name="item_3">
             <a:extLst>
               <a:ext uri="{FF2B5EF4-FFF2-40B4-BE49-F238E27FC236}">
-                <a16:creationId xmlns:a16="http://schemas.microsoft.com/office/drawing/2014/main" id="{A02611FB-778C-F86D-E590-7763D5340F47}"/>
+                <a16:creationId xmlns:a16="http://schemas.microsoft.com/office/drawing/2014/main" id="{D9AC5B95-DB9E-8486-5277-1BCA6EEEC28E}"/>
               </a:ext>
             </a:extLst>
           </p:cNvPr>
@@ -13580,7 +13580,7 @@
           <p:cNvPr id="14" name="item_4_title">
             <a:extLst>
               <a:ext uri="{FF2B5EF4-FFF2-40B4-BE49-F238E27FC236}">
-                <a16:creationId xmlns:a16="http://schemas.microsoft.com/office/drawing/2014/main" id="{968597CB-EBB5-DB4B-51F0-517328BD25AF}"/>
+                <a16:creationId xmlns:a16="http://schemas.microsoft.com/office/drawing/2014/main" id="{44468ADA-3F07-C467-69BB-3407E4DBE88A}"/>
               </a:ext>
             </a:extLst>
           </p:cNvPr>
@@ -13633,7 +13633,7 @@
           <p:cNvPr id="15" name="item_4">
             <a:extLst>
               <a:ext uri="{FF2B5EF4-FFF2-40B4-BE49-F238E27FC236}">
-                <a16:creationId xmlns:a16="http://schemas.microsoft.com/office/drawing/2014/main" id="{5968239C-5BB4-595E-4359-FC8BD9DE7806}"/>
+                <a16:creationId xmlns:a16="http://schemas.microsoft.com/office/drawing/2014/main" id="{53031E09-1431-7AA9-4A60-E6C668E1460F}"/>
               </a:ext>
             </a:extLst>
           </p:cNvPr>
@@ -13681,7 +13681,7 @@
           <p:cNvPr id="16" name="source">
             <a:extLst>
               <a:ext uri="{FF2B5EF4-FFF2-40B4-BE49-F238E27FC236}">
-                <a16:creationId xmlns:a16="http://schemas.microsoft.com/office/drawing/2014/main" id="{B0F855A3-5CB9-EBB9-E1F8-D18EB0256C69}"/>
+                <a16:creationId xmlns:a16="http://schemas.microsoft.com/office/drawing/2014/main" id="{792582A5-B718-55AB-9149-15BDE45A7991}"/>
               </a:ext>
             </a:extLst>
           </p:cNvPr>
@@ -13736,7 +13736,7 @@
     </p:spTree>
     <p:extLst>
       <p:ext uri="{BB962C8B-B14F-4D97-AF65-F5344CB8AC3E}">
-        <p14:creationId xmlns:p14="http://schemas.microsoft.com/office/powerpoint/2010/main" val="3810604169"/>
+        <p14:creationId xmlns:p14="http://schemas.microsoft.com/office/powerpoint/2010/main" val="1249991632"/>
       </p:ext>
     </p:extLst>
   </p:cSld>
@@ -13773,7 +13773,7 @@
           <p:cNvPr id="9" name="creative_background_master">
             <a:extLst>
               <a:ext uri="{FF2B5EF4-FFF2-40B4-BE49-F238E27FC236}">
-                <a16:creationId xmlns:a16="http://schemas.microsoft.com/office/drawing/2014/main" id="{AFD2016D-3BFC-B736-C88F-BF900AD251A3}"/>
+                <a16:creationId xmlns:a16="http://schemas.microsoft.com/office/drawing/2014/main" id="{6FC0AE8F-6E6C-CA2C-0DE7-E7B9D8BC77F4}"/>
               </a:ext>
             </a:extLst>
           </p:cNvPr>
@@ -13934,7 +13934,7 @@
             </a:lvl1pPr>
           </a:lstStyle>
           <a:p>
-            <a:fld id="{10ED7D75-8BCA-4792-8B33-188BE8B045C9}" type="datetimeFigureOut">
+            <a:fld id="{C5DDA866-DF04-4AEF-ADD4-8AFF018326A8}" type="datetimeFigureOut">
               <a:rPr lang="en-US" smtClean="0"/>
               <a:t>10/3/2026</a:t>
             </a:fld>
@@ -14016,7 +14016,7 @@
             </a:lvl1pPr>
           </a:lstStyle>
           <a:p>
-            <a:fld id="{EDD050AF-432A-42B3-B4EC-757E823036E9}" type="slidenum">
+            <a:fld id="{B3BADF7A-34E3-4F53-BB65-9FE23DA90D0C}" type="slidenum">
               <a:rPr lang="en-US" smtClean="0"/>
               <a:t>‹#›</a:t>
             </a:fld>
@@ -14027,7 +14027,7 @@
     </p:spTree>
     <p:extLst>
       <p:ext uri="{BB962C8B-B14F-4D97-AF65-F5344CB8AC3E}">
-        <p14:creationId xmlns:p14="http://schemas.microsoft.com/office/powerpoint/2010/main" val="3287520589"/>
+        <p14:creationId xmlns:p14="http://schemas.microsoft.com/office/powerpoint/2010/main" val="2120572356"/>
       </p:ext>
     </p:extLst>
   </p:cSld>
@@ -14420,10 +14420,10 @@
         <a:srgbClr val="E9E8E4"/>
       </a:lt2>
       <a:accent1>
-        <a:srgbClr val="8A641F"/>
+        <a:srgbClr val="263F3A"/>
       </a:accent1>
       <a:accent2>
-        <a:srgbClr val="263F3A"/>
+        <a:srgbClr val="8A641F"/>
       </a:accent2>
       <a:accent3>
         <a:srgbClr val="4C5150"/>
@@ -14432,7 +14432,7 @@
         <a:srgbClr val="263F3A"/>
       </a:accent4>
       <a:accent5>
-        <a:srgbClr val="8A641F"/>
+        <a:srgbClr val="263F3A"/>
       </a:accent5>
       <a:accent6>
         <a:srgbClr val="4C5150"/>

--- a/design/templates/papyrus-olive/template.pptx
+++ b/design/templates/papyrus-olive/template.pptx
@@ -126,7 +126,7 @@
           <p:cNvPr id="9" name="creative_background">
             <a:extLst>
               <a:ext uri="{FF2B5EF4-FFF2-40B4-BE49-F238E27FC236}">
-                <a16:creationId xmlns:a16="http://schemas.microsoft.com/office/drawing/2014/main" id="{28A5D8D3-22B8-298D-171D-6A36F483D4B8}"/>
+                <a16:creationId xmlns:a16="http://schemas.microsoft.com/office/drawing/2014/main" id="{413D5332-A53A-262F-A491-834AD5B2B571}"/>
               </a:ext>
             </a:extLst>
           </p:cNvPr>
@@ -290,9 +290,9 @@
             </a:lvl1pPr>
           </a:lstStyle>
           <a:p>
-            <a:fld id="{C5DDA866-DF04-4AEF-ADD4-8AFF018326A8}" type="datetimeFigureOut">
+            <a:fld id="{6A94A3F5-3F5C-489D-BBF0-F0DE1F7D2FCF}" type="datetimeFigureOut">
               <a:rPr lang="en-US" smtClean="0"/>
-              <a:t>10/3/2026</a:t>
+              <a:t>10/4/2026</a:t>
             </a:fld>
             <a:endParaRPr lang="en-US"/>
           </a:p>
@@ -332,7 +332,7 @@
           <a:bodyPr/>
           <a:lstStyle/>
           <a:p>
-            <a:fld id="{B3BADF7A-34E3-4F53-BB65-9FE23DA90D0C}" type="slidenum">
+            <a:fld id="{F2F39956-E560-479A-B447-9AC211AA0B75}" type="slidenum">
               <a:rPr lang="en-US" smtClean="0"/>
               <a:t>‹#›</a:t>
             </a:fld>
@@ -343,7 +343,7 @@
     </p:spTree>
     <p:extLst>
       <p:ext uri="{BB962C8B-B14F-4D97-AF65-F5344CB8AC3E}">
-        <p14:creationId xmlns:p14="http://schemas.microsoft.com/office/powerpoint/2010/main" val="1127057768"/>
+        <p14:creationId xmlns:p14="http://schemas.microsoft.com/office/powerpoint/2010/main" val="3610208971"/>
       </p:ext>
     </p:extLst>
   </p:cSld>
@@ -375,7 +375,7 @@
           <p:cNvPr id="7" name="creative_background">
             <a:extLst>
               <a:ext uri="{FF2B5EF4-FFF2-40B4-BE49-F238E27FC236}">
-                <a16:creationId xmlns:a16="http://schemas.microsoft.com/office/drawing/2014/main" id="{B6F03BD5-0413-1019-0EC4-94ADE428CA95}"/>
+                <a16:creationId xmlns:a16="http://schemas.microsoft.com/office/drawing/2014/main" id="{F0228AB8-1258-E940-5BF8-D08B50DE73A2}"/>
               </a:ext>
             </a:extLst>
           </p:cNvPr>
@@ -448,9 +448,9 @@
           <a:bodyPr/>
           <a:lstStyle/>
           <a:p>
-            <a:fld id="{C5DDA866-DF04-4AEF-ADD4-8AFF018326A8}" type="datetimeFigureOut">
+            <a:fld id="{6A94A3F5-3F5C-489D-BBF0-F0DE1F7D2FCF}" type="datetimeFigureOut">
               <a:rPr lang="en-US" smtClean="0"/>
-              <a:t>10/3/2026</a:t>
+              <a:t>10/4/2026</a:t>
             </a:fld>
             <a:endParaRPr lang="en-US"/>
           </a:p>
@@ -490,7 +490,7 @@
           <a:bodyPr/>
           <a:lstStyle/>
           <a:p>
-            <a:fld id="{B3BADF7A-34E3-4F53-BB65-9FE23DA90D0C}" type="slidenum">
+            <a:fld id="{F2F39956-E560-479A-B447-9AC211AA0B75}" type="slidenum">
               <a:rPr lang="en-US" smtClean="0"/>
               <a:t>‹#›</a:t>
             </a:fld>
@@ -503,7 +503,7 @@
           <p:cNvPr id="8" name="body">
             <a:extLst>
               <a:ext uri="{FF2B5EF4-FFF2-40B4-BE49-F238E27FC236}">
-                <a16:creationId xmlns:a16="http://schemas.microsoft.com/office/drawing/2014/main" id="{3A3EEF01-6002-54A9-EA86-307409E23881}"/>
+                <a16:creationId xmlns:a16="http://schemas.microsoft.com/office/drawing/2014/main" id="{96223E68-D12B-CEF9-6F41-E8F3789236EA}"/>
               </a:ext>
             </a:extLst>
           </p:cNvPr>
@@ -543,7 +543,7 @@
           <p:cNvPr id="9" name="source">
             <a:extLst>
               <a:ext uri="{FF2B5EF4-FFF2-40B4-BE49-F238E27FC236}">
-                <a16:creationId xmlns:a16="http://schemas.microsoft.com/office/drawing/2014/main" id="{33D68747-A6C0-A229-2741-1D50A85C2FBB}"/>
+                <a16:creationId xmlns:a16="http://schemas.microsoft.com/office/drawing/2014/main" id="{CB1E224D-07C3-6349-B8A6-518C4A9651B3}"/>
               </a:ext>
             </a:extLst>
           </p:cNvPr>
@@ -598,7 +598,7 @@
     </p:spTree>
     <p:extLst>
       <p:ext uri="{BB962C8B-B14F-4D97-AF65-F5344CB8AC3E}">
-        <p14:creationId xmlns:p14="http://schemas.microsoft.com/office/powerpoint/2010/main" val="2736986148"/>
+        <p14:creationId xmlns:p14="http://schemas.microsoft.com/office/powerpoint/2010/main" val="3624442195"/>
       </p:ext>
     </p:extLst>
   </p:cSld>
@@ -630,7 +630,7 @@
           <p:cNvPr id="7" name="creative_background">
             <a:extLst>
               <a:ext uri="{FF2B5EF4-FFF2-40B4-BE49-F238E27FC236}">
-                <a16:creationId xmlns:a16="http://schemas.microsoft.com/office/drawing/2014/main" id="{050ACB82-067E-551F-E440-8BF07EDD2CAD}"/>
+                <a16:creationId xmlns:a16="http://schemas.microsoft.com/office/drawing/2014/main" id="{80996799-8265-0DC8-C375-EC403FCEC917}"/>
               </a:ext>
             </a:extLst>
           </p:cNvPr>
@@ -703,9 +703,9 @@
           <a:bodyPr/>
           <a:lstStyle/>
           <a:p>
-            <a:fld id="{C5DDA866-DF04-4AEF-ADD4-8AFF018326A8}" type="datetimeFigureOut">
+            <a:fld id="{6A94A3F5-3F5C-489D-BBF0-F0DE1F7D2FCF}" type="datetimeFigureOut">
               <a:rPr lang="en-US" smtClean="0"/>
-              <a:t>10/3/2026</a:t>
+              <a:t>10/4/2026</a:t>
             </a:fld>
             <a:endParaRPr lang="en-US"/>
           </a:p>
@@ -745,7 +745,7 @@
           <a:bodyPr/>
           <a:lstStyle/>
           <a:p>
-            <a:fld id="{B3BADF7A-34E3-4F53-BB65-9FE23DA90D0C}" type="slidenum">
+            <a:fld id="{F2F39956-E560-479A-B447-9AC211AA0B75}" type="slidenum">
               <a:rPr lang="en-US" smtClean="0"/>
               <a:t>‹#›</a:t>
             </a:fld>
@@ -758,7 +758,7 @@
           <p:cNvPr id="8" name="body">
             <a:extLst>
               <a:ext uri="{FF2B5EF4-FFF2-40B4-BE49-F238E27FC236}">
-                <a16:creationId xmlns:a16="http://schemas.microsoft.com/office/drawing/2014/main" id="{69AFDEF1-FDDC-B751-9508-94249A86736D}"/>
+                <a16:creationId xmlns:a16="http://schemas.microsoft.com/office/drawing/2014/main" id="{BBD00BB9-3CA8-00F2-11BE-6876B0A8B9DC}"/>
               </a:ext>
             </a:extLst>
           </p:cNvPr>
@@ -801,7 +801,7 @@
     </p:spTree>
     <p:extLst>
       <p:ext uri="{BB962C8B-B14F-4D97-AF65-F5344CB8AC3E}">
-        <p14:creationId xmlns:p14="http://schemas.microsoft.com/office/powerpoint/2010/main" val="1361852175"/>
+        <p14:creationId xmlns:p14="http://schemas.microsoft.com/office/powerpoint/2010/main" val="288964128"/>
       </p:ext>
     </p:extLst>
   </p:cSld>
@@ -877,7 +877,7 @@
           <p:cNvPr id="6" name="section_number">
             <a:extLst>
               <a:ext uri="{FF2B5EF4-FFF2-40B4-BE49-F238E27FC236}">
-                <a16:creationId xmlns:a16="http://schemas.microsoft.com/office/drawing/2014/main" id="{D8BD0806-345B-D6AA-B72F-DCF1CB6A7C8C}"/>
+                <a16:creationId xmlns:a16="http://schemas.microsoft.com/office/drawing/2014/main" id="{BBDC511A-69C3-1030-81F4-3D3EBA572714}"/>
               </a:ext>
             </a:extLst>
           </p:cNvPr>
@@ -933,7 +933,7 @@
           <p:cNvPr id="7" name="subtitle">
             <a:extLst>
               <a:ext uri="{FF2B5EF4-FFF2-40B4-BE49-F238E27FC236}">
-                <a16:creationId xmlns:a16="http://schemas.microsoft.com/office/drawing/2014/main" id="{FD0A2719-2ED6-62AB-0748-45900E622990}"/>
+                <a16:creationId xmlns:a16="http://schemas.microsoft.com/office/drawing/2014/main" id="{0059AFBD-BDFA-B464-650E-1D593A8C744C}"/>
               </a:ext>
             </a:extLst>
           </p:cNvPr>
@@ -985,7 +985,7 @@
           <p:cNvPr id="8" name="divider_rule">
             <a:extLst>
               <a:ext uri="{FF2B5EF4-FFF2-40B4-BE49-F238E27FC236}">
-                <a16:creationId xmlns:a16="http://schemas.microsoft.com/office/drawing/2014/main" id="{0218BF31-2EEC-FEFB-82DB-982541C952B6}"/>
+                <a16:creationId xmlns:a16="http://schemas.microsoft.com/office/drawing/2014/main" id="{4CDE7696-8B63-6373-ADCA-828518E680E8}"/>
               </a:ext>
             </a:extLst>
           </p:cNvPr>
@@ -1032,7 +1032,7 @@
           <p:cNvPr id="9" name="divider_rule">
             <a:extLst>
               <a:ext uri="{FF2B5EF4-FFF2-40B4-BE49-F238E27FC236}">
-                <a16:creationId xmlns:a16="http://schemas.microsoft.com/office/drawing/2014/main" id="{E8038842-BBB7-558B-3C86-FA899E18D370}"/>
+                <a16:creationId xmlns:a16="http://schemas.microsoft.com/office/drawing/2014/main" id="{0840CDF5-A28B-CE98-E77B-6316EDE3FCCB}"/>
               </a:ext>
             </a:extLst>
           </p:cNvPr>
@@ -1079,7 +1079,7 @@
           <p:cNvPr id="10" name="divider_rule">
             <a:extLst>
               <a:ext uri="{FF2B5EF4-FFF2-40B4-BE49-F238E27FC236}">
-                <a16:creationId xmlns:a16="http://schemas.microsoft.com/office/drawing/2014/main" id="{740F7BA7-C22D-A2F4-165F-6B48D3916BCD}"/>
+                <a16:creationId xmlns:a16="http://schemas.microsoft.com/office/drawing/2014/main" id="{9CBFDA91-251C-E0A4-BF11-F3D7B1D263A2}"/>
               </a:ext>
             </a:extLst>
           </p:cNvPr>
@@ -1124,7 +1124,7 @@
     </p:spTree>
     <p:extLst>
       <p:ext uri="{BB962C8B-B14F-4D97-AF65-F5344CB8AC3E}">
-        <p14:creationId xmlns:p14="http://schemas.microsoft.com/office/powerpoint/2010/main" val="1419388540"/>
+        <p14:creationId xmlns:p14="http://schemas.microsoft.com/office/powerpoint/2010/main" val="3980719965"/>
       </p:ext>
     </p:extLst>
   </p:cSld>
@@ -1156,7 +1156,7 @@
           <p:cNvPr id="7" name="creative_background">
             <a:extLst>
               <a:ext uri="{FF2B5EF4-FFF2-40B4-BE49-F238E27FC236}">
-                <a16:creationId xmlns:a16="http://schemas.microsoft.com/office/drawing/2014/main" id="{B8F95A41-2581-B0D3-6632-45AF20052C71}"/>
+                <a16:creationId xmlns:a16="http://schemas.microsoft.com/office/drawing/2014/main" id="{BCF2B735-6844-7230-609A-0C31C9DC3C03}"/>
               </a:ext>
             </a:extLst>
           </p:cNvPr>
@@ -1229,9 +1229,9 @@
           <a:bodyPr/>
           <a:lstStyle/>
           <a:p>
-            <a:fld id="{C5DDA866-DF04-4AEF-ADD4-8AFF018326A8}" type="datetimeFigureOut">
+            <a:fld id="{6A94A3F5-3F5C-489D-BBF0-F0DE1F7D2FCF}" type="datetimeFigureOut">
               <a:rPr lang="en-US" smtClean="0"/>
-              <a:t>10/3/2026</a:t>
+              <a:t>10/4/2026</a:t>
             </a:fld>
             <a:endParaRPr lang="en-US"/>
           </a:p>
@@ -1271,7 +1271,7 @@
           <a:bodyPr/>
           <a:lstStyle/>
           <a:p>
-            <a:fld id="{B3BADF7A-34E3-4F53-BB65-9FE23DA90D0C}" type="slidenum">
+            <a:fld id="{F2F39956-E560-479A-B447-9AC211AA0B75}" type="slidenum">
               <a:rPr lang="en-US" smtClean="0"/>
               <a:t>‹#›</a:t>
             </a:fld>
@@ -1284,7 +1284,7 @@
           <p:cNvPr id="8" name="item_1_title">
             <a:extLst>
               <a:ext uri="{FF2B5EF4-FFF2-40B4-BE49-F238E27FC236}">
-                <a16:creationId xmlns:a16="http://schemas.microsoft.com/office/drawing/2014/main" id="{FDE0C346-BB37-A1F7-DCFE-05F56B010788}"/>
+                <a16:creationId xmlns:a16="http://schemas.microsoft.com/office/drawing/2014/main" id="{CB4BA5DD-AE73-9EF1-7EDB-5EDBA2658FE7}"/>
               </a:ext>
             </a:extLst>
           </p:cNvPr>
@@ -1334,7 +1334,7 @@
           <p:cNvPr id="9" name="item_1">
             <a:extLst>
               <a:ext uri="{FF2B5EF4-FFF2-40B4-BE49-F238E27FC236}">
-                <a16:creationId xmlns:a16="http://schemas.microsoft.com/office/drawing/2014/main" id="{AFD353FE-8E8F-3E26-3520-AA6A1FD96190}"/>
+                <a16:creationId xmlns:a16="http://schemas.microsoft.com/office/drawing/2014/main" id="{D0DA6684-1A82-935D-67E7-751033499712}"/>
               </a:ext>
             </a:extLst>
           </p:cNvPr>
@@ -1382,7 +1382,7 @@
           <p:cNvPr id="10" name="item_2_title">
             <a:extLst>
               <a:ext uri="{FF2B5EF4-FFF2-40B4-BE49-F238E27FC236}">
-                <a16:creationId xmlns:a16="http://schemas.microsoft.com/office/drawing/2014/main" id="{5C1C7D9E-E481-DC28-A76B-F44E8F3EFC64}"/>
+                <a16:creationId xmlns:a16="http://schemas.microsoft.com/office/drawing/2014/main" id="{D0316170-AF2E-74C9-0F6F-6D44A3CAB6CF}"/>
               </a:ext>
             </a:extLst>
           </p:cNvPr>
@@ -1435,7 +1435,7 @@
           <p:cNvPr id="11" name="item_2">
             <a:extLst>
               <a:ext uri="{FF2B5EF4-FFF2-40B4-BE49-F238E27FC236}">
-                <a16:creationId xmlns:a16="http://schemas.microsoft.com/office/drawing/2014/main" id="{89F7A827-8F1B-DD44-32EF-95642EA45943}"/>
+                <a16:creationId xmlns:a16="http://schemas.microsoft.com/office/drawing/2014/main" id="{5E45DF5C-40AD-4073-B269-4E7185871776}"/>
               </a:ext>
             </a:extLst>
           </p:cNvPr>
@@ -1483,7 +1483,7 @@
           <p:cNvPr id="12" name="item_3_title">
             <a:extLst>
               <a:ext uri="{FF2B5EF4-FFF2-40B4-BE49-F238E27FC236}">
-                <a16:creationId xmlns:a16="http://schemas.microsoft.com/office/drawing/2014/main" id="{FC9172BF-3E59-FD09-DE0E-1C5678AB9F64}"/>
+                <a16:creationId xmlns:a16="http://schemas.microsoft.com/office/drawing/2014/main" id="{6CF9BD62-B7D8-19B7-77D4-DFDC8E418889}"/>
               </a:ext>
             </a:extLst>
           </p:cNvPr>
@@ -1536,7 +1536,7 @@
           <p:cNvPr id="13" name="item_3">
             <a:extLst>
               <a:ext uri="{FF2B5EF4-FFF2-40B4-BE49-F238E27FC236}">
-                <a16:creationId xmlns:a16="http://schemas.microsoft.com/office/drawing/2014/main" id="{7E3F584D-3276-B5AB-B325-2E971FA05D52}"/>
+                <a16:creationId xmlns:a16="http://schemas.microsoft.com/office/drawing/2014/main" id="{D671DBE7-E5A1-45B4-E96B-F3039BC19A96}"/>
               </a:ext>
             </a:extLst>
           </p:cNvPr>
@@ -1584,7 +1584,7 @@
           <p:cNvPr id="14" name="item_4_title">
             <a:extLst>
               <a:ext uri="{FF2B5EF4-FFF2-40B4-BE49-F238E27FC236}">
-                <a16:creationId xmlns:a16="http://schemas.microsoft.com/office/drawing/2014/main" id="{52F6837B-C8C5-B721-E7B7-CDD597B4EB9F}"/>
+                <a16:creationId xmlns:a16="http://schemas.microsoft.com/office/drawing/2014/main" id="{41885BD0-5C5C-05B5-1277-F6B2DFA84FF1}"/>
               </a:ext>
             </a:extLst>
           </p:cNvPr>
@@ -1637,7 +1637,7 @@
           <p:cNvPr id="15" name="item_4">
             <a:extLst>
               <a:ext uri="{FF2B5EF4-FFF2-40B4-BE49-F238E27FC236}">
-                <a16:creationId xmlns:a16="http://schemas.microsoft.com/office/drawing/2014/main" id="{124D8A2D-4148-370A-0C21-6FFB9213D107}"/>
+                <a16:creationId xmlns:a16="http://schemas.microsoft.com/office/drawing/2014/main" id="{03336A97-E4DA-34CF-714A-543424722CB5}"/>
               </a:ext>
             </a:extLst>
           </p:cNvPr>
@@ -1685,7 +1685,7 @@
           <p:cNvPr id="16" name="source">
             <a:extLst>
               <a:ext uri="{FF2B5EF4-FFF2-40B4-BE49-F238E27FC236}">
-                <a16:creationId xmlns:a16="http://schemas.microsoft.com/office/drawing/2014/main" id="{A5BB4514-AE89-126F-28D6-E46664A4B0F9}"/>
+                <a16:creationId xmlns:a16="http://schemas.microsoft.com/office/drawing/2014/main" id="{3FFE88A1-FE75-02D7-A844-5E92082AF0DF}"/>
               </a:ext>
             </a:extLst>
           </p:cNvPr>
@@ -1740,7 +1740,7 @@
     </p:spTree>
     <p:extLst>
       <p:ext uri="{BB962C8B-B14F-4D97-AF65-F5344CB8AC3E}">
-        <p14:creationId xmlns:p14="http://schemas.microsoft.com/office/powerpoint/2010/main" val="1296535755"/>
+        <p14:creationId xmlns:p14="http://schemas.microsoft.com/office/powerpoint/2010/main" val="3591211400"/>
       </p:ext>
     </p:extLst>
   </p:cSld>
@@ -1772,7 +1772,7 @@
           <p:cNvPr id="7" name="creative_background">
             <a:extLst>
               <a:ext uri="{FF2B5EF4-FFF2-40B4-BE49-F238E27FC236}">
-                <a16:creationId xmlns:a16="http://schemas.microsoft.com/office/drawing/2014/main" id="{1E135178-CF95-5C1C-DC34-86D505E161D7}"/>
+                <a16:creationId xmlns:a16="http://schemas.microsoft.com/office/drawing/2014/main" id="{641DD4D0-6575-23CC-33AA-8144B6A9B77F}"/>
               </a:ext>
             </a:extLst>
           </p:cNvPr>
@@ -1845,9 +1845,9 @@
           <a:bodyPr/>
           <a:lstStyle/>
           <a:p>
-            <a:fld id="{C5DDA866-DF04-4AEF-ADD4-8AFF018326A8}" type="datetimeFigureOut">
+            <a:fld id="{6A94A3F5-3F5C-489D-BBF0-F0DE1F7D2FCF}" type="datetimeFigureOut">
               <a:rPr lang="en-US" smtClean="0"/>
-              <a:t>10/3/2026</a:t>
+              <a:t>10/4/2026</a:t>
             </a:fld>
             <a:endParaRPr lang="en-US"/>
           </a:p>
@@ -1887,7 +1887,7 @@
           <a:bodyPr/>
           <a:lstStyle/>
           <a:p>
-            <a:fld id="{B3BADF7A-34E3-4F53-BB65-9FE23DA90D0C}" type="slidenum">
+            <a:fld id="{F2F39956-E560-479A-B447-9AC211AA0B75}" type="slidenum">
               <a:rPr lang="en-US" smtClean="0"/>
               <a:t>‹#›</a:t>
             </a:fld>
@@ -1900,7 +1900,7 @@
           <p:cNvPr id="8" name="body">
             <a:extLst>
               <a:ext uri="{FF2B5EF4-FFF2-40B4-BE49-F238E27FC236}">
-                <a16:creationId xmlns:a16="http://schemas.microsoft.com/office/drawing/2014/main" id="{8B1C0A8F-220E-EAF6-55C0-0352B1A0B096}"/>
+                <a16:creationId xmlns:a16="http://schemas.microsoft.com/office/drawing/2014/main" id="{26605CD4-9895-B409-C0BE-32105E55A5E3}"/>
               </a:ext>
             </a:extLst>
           </p:cNvPr>
@@ -1945,7 +1945,7 @@
           <p:cNvPr id="9" name="source">
             <a:extLst>
               <a:ext uri="{FF2B5EF4-FFF2-40B4-BE49-F238E27FC236}">
-                <a16:creationId xmlns:a16="http://schemas.microsoft.com/office/drawing/2014/main" id="{51776F08-0ECA-21C7-01F7-61BE65C553D5}"/>
+                <a16:creationId xmlns:a16="http://schemas.microsoft.com/office/drawing/2014/main" id="{054300D1-2C99-8E80-A22A-8C31A2BC0644}"/>
               </a:ext>
             </a:extLst>
           </p:cNvPr>
@@ -2000,7 +2000,7 @@
     </p:spTree>
     <p:extLst>
       <p:ext uri="{BB962C8B-B14F-4D97-AF65-F5344CB8AC3E}">
-        <p14:creationId xmlns:p14="http://schemas.microsoft.com/office/powerpoint/2010/main" val="3445989977"/>
+        <p14:creationId xmlns:p14="http://schemas.microsoft.com/office/powerpoint/2010/main" val="2796429018"/>
       </p:ext>
     </p:extLst>
   </p:cSld>
@@ -2032,7 +2032,7 @@
           <p:cNvPr id="7" name="creative_background">
             <a:extLst>
               <a:ext uri="{FF2B5EF4-FFF2-40B4-BE49-F238E27FC236}">
-                <a16:creationId xmlns:a16="http://schemas.microsoft.com/office/drawing/2014/main" id="{BD1AEE64-246E-A0DA-58B1-631AB7C148E2}"/>
+                <a16:creationId xmlns:a16="http://schemas.microsoft.com/office/drawing/2014/main" id="{54190B6C-0C35-F336-BF78-7104191BDCCB}"/>
               </a:ext>
             </a:extLst>
           </p:cNvPr>
@@ -2105,9 +2105,9 @@
           <a:bodyPr/>
           <a:lstStyle/>
           <a:p>
-            <a:fld id="{C5DDA866-DF04-4AEF-ADD4-8AFF018326A8}" type="datetimeFigureOut">
+            <a:fld id="{6A94A3F5-3F5C-489D-BBF0-F0DE1F7D2FCF}" type="datetimeFigureOut">
               <a:rPr lang="en-US" smtClean="0"/>
-              <a:t>10/3/2026</a:t>
+              <a:t>10/4/2026</a:t>
             </a:fld>
             <a:endParaRPr lang="en-US"/>
           </a:p>
@@ -2147,7 +2147,7 @@
           <a:bodyPr/>
           <a:lstStyle/>
           <a:p>
-            <a:fld id="{B3BADF7A-34E3-4F53-BB65-9FE23DA90D0C}" type="slidenum">
+            <a:fld id="{F2F39956-E560-479A-B447-9AC211AA0B75}" type="slidenum">
               <a:rPr lang="en-US" smtClean="0"/>
               <a:t>‹#›</a:t>
             </a:fld>
@@ -2160,7 +2160,7 @@
           <p:cNvPr id="8" name="item_1_title">
             <a:extLst>
               <a:ext uri="{FF2B5EF4-FFF2-40B4-BE49-F238E27FC236}">
-                <a16:creationId xmlns:a16="http://schemas.microsoft.com/office/drawing/2014/main" id="{F9ECD2B2-9283-3794-9C07-A434BBEBDBB2}"/>
+                <a16:creationId xmlns:a16="http://schemas.microsoft.com/office/drawing/2014/main" id="{9FC7B941-3FEF-EAF3-455E-2325C61FB845}"/>
               </a:ext>
             </a:extLst>
           </p:cNvPr>
@@ -2210,7 +2210,7 @@
           <p:cNvPr id="9" name="item_1">
             <a:extLst>
               <a:ext uri="{FF2B5EF4-FFF2-40B4-BE49-F238E27FC236}">
-                <a16:creationId xmlns:a16="http://schemas.microsoft.com/office/drawing/2014/main" id="{B8B02962-AB03-1A70-9993-40F1828F9CA8}"/>
+                <a16:creationId xmlns:a16="http://schemas.microsoft.com/office/drawing/2014/main" id="{22DD8E6F-B5F2-C214-EBD4-74A1DD2A0A60}"/>
               </a:ext>
             </a:extLst>
           </p:cNvPr>
@@ -2258,7 +2258,7 @@
           <p:cNvPr id="10" name="item_2_title">
             <a:extLst>
               <a:ext uri="{FF2B5EF4-FFF2-40B4-BE49-F238E27FC236}">
-                <a16:creationId xmlns:a16="http://schemas.microsoft.com/office/drawing/2014/main" id="{79D1F66B-70B4-BAE4-6AD7-534CAA506BC0}"/>
+                <a16:creationId xmlns:a16="http://schemas.microsoft.com/office/drawing/2014/main" id="{5AC39C2A-7C58-6BFD-133F-5425603A1EA2}"/>
               </a:ext>
             </a:extLst>
           </p:cNvPr>
@@ -2311,7 +2311,7 @@
           <p:cNvPr id="11" name="item_2">
             <a:extLst>
               <a:ext uri="{FF2B5EF4-FFF2-40B4-BE49-F238E27FC236}">
-                <a16:creationId xmlns:a16="http://schemas.microsoft.com/office/drawing/2014/main" id="{04A1A06F-0E1E-4035-3968-B47316900B2F}"/>
+                <a16:creationId xmlns:a16="http://schemas.microsoft.com/office/drawing/2014/main" id="{5DE611E1-EE86-B141-61C6-DEAFDCA73441}"/>
               </a:ext>
             </a:extLst>
           </p:cNvPr>
@@ -2359,7 +2359,7 @@
           <p:cNvPr id="12" name="item_3_title">
             <a:extLst>
               <a:ext uri="{FF2B5EF4-FFF2-40B4-BE49-F238E27FC236}">
-                <a16:creationId xmlns:a16="http://schemas.microsoft.com/office/drawing/2014/main" id="{2DD2DE4F-BA24-1511-32FF-EBB0CBFF18B0}"/>
+                <a16:creationId xmlns:a16="http://schemas.microsoft.com/office/drawing/2014/main" id="{4C1984C7-EEB0-BEEF-B030-BE62FC055161}"/>
               </a:ext>
             </a:extLst>
           </p:cNvPr>
@@ -2412,7 +2412,7 @@
           <p:cNvPr id="13" name="item_3">
             <a:extLst>
               <a:ext uri="{FF2B5EF4-FFF2-40B4-BE49-F238E27FC236}">
-                <a16:creationId xmlns:a16="http://schemas.microsoft.com/office/drawing/2014/main" id="{9C0E8256-0C35-C993-EFC3-7AC8C0674B7E}"/>
+                <a16:creationId xmlns:a16="http://schemas.microsoft.com/office/drawing/2014/main" id="{56AA8ADA-EE77-6DB3-F8EA-7452B1AA660C}"/>
               </a:ext>
             </a:extLst>
           </p:cNvPr>
@@ -2460,7 +2460,7 @@
           <p:cNvPr id="14" name="item_4_title">
             <a:extLst>
               <a:ext uri="{FF2B5EF4-FFF2-40B4-BE49-F238E27FC236}">
-                <a16:creationId xmlns:a16="http://schemas.microsoft.com/office/drawing/2014/main" id="{160D68BE-A20F-3334-D587-CCB05FB60C42}"/>
+                <a16:creationId xmlns:a16="http://schemas.microsoft.com/office/drawing/2014/main" id="{A0A2BCBA-079F-72B5-356E-263CBF941B46}"/>
               </a:ext>
             </a:extLst>
           </p:cNvPr>
@@ -2513,7 +2513,7 @@
           <p:cNvPr id="15" name="item_4">
             <a:extLst>
               <a:ext uri="{FF2B5EF4-FFF2-40B4-BE49-F238E27FC236}">
-                <a16:creationId xmlns:a16="http://schemas.microsoft.com/office/drawing/2014/main" id="{14739726-0F18-1653-DE92-8B2254A54C93}"/>
+                <a16:creationId xmlns:a16="http://schemas.microsoft.com/office/drawing/2014/main" id="{E5D422CA-3540-F64F-15B0-C37FC2ED3C8D}"/>
               </a:ext>
             </a:extLst>
           </p:cNvPr>
@@ -2561,7 +2561,7 @@
           <p:cNvPr id="16" name="source">
             <a:extLst>
               <a:ext uri="{FF2B5EF4-FFF2-40B4-BE49-F238E27FC236}">
-                <a16:creationId xmlns:a16="http://schemas.microsoft.com/office/drawing/2014/main" id="{52CB817C-3299-B1B7-E9C1-784ADC40A5F0}"/>
+                <a16:creationId xmlns:a16="http://schemas.microsoft.com/office/drawing/2014/main" id="{6AD31DFB-CD20-7F0E-28EC-745AE6BFED80}"/>
               </a:ext>
             </a:extLst>
           </p:cNvPr>
@@ -2616,7 +2616,7 @@
     </p:spTree>
     <p:extLst>
       <p:ext uri="{BB962C8B-B14F-4D97-AF65-F5344CB8AC3E}">
-        <p14:creationId xmlns:p14="http://schemas.microsoft.com/office/powerpoint/2010/main" val="3514568092"/>
+        <p14:creationId xmlns:p14="http://schemas.microsoft.com/office/powerpoint/2010/main" val="3263410759"/>
       </p:ext>
     </p:extLst>
   </p:cSld>
@@ -2648,7 +2648,7 @@
           <p:cNvPr id="7" name="creative_background">
             <a:extLst>
               <a:ext uri="{FF2B5EF4-FFF2-40B4-BE49-F238E27FC236}">
-                <a16:creationId xmlns:a16="http://schemas.microsoft.com/office/drawing/2014/main" id="{C1BF9CD3-B8B9-3137-3114-CE026A5ADBA8}"/>
+                <a16:creationId xmlns:a16="http://schemas.microsoft.com/office/drawing/2014/main" id="{514A8BDA-C1E8-6335-0441-D748C96852DE}"/>
               </a:ext>
             </a:extLst>
           </p:cNvPr>
@@ -2721,9 +2721,9 @@
           <a:bodyPr/>
           <a:lstStyle/>
           <a:p>
-            <a:fld id="{C5DDA866-DF04-4AEF-ADD4-8AFF018326A8}" type="datetimeFigureOut">
+            <a:fld id="{6A94A3F5-3F5C-489D-BBF0-F0DE1F7D2FCF}" type="datetimeFigureOut">
               <a:rPr lang="en-US" smtClean="0"/>
-              <a:t>10/3/2026</a:t>
+              <a:t>10/4/2026</a:t>
             </a:fld>
             <a:endParaRPr lang="en-US"/>
           </a:p>
@@ -2763,7 +2763,7 @@
           <a:bodyPr/>
           <a:lstStyle/>
           <a:p>
-            <a:fld id="{B3BADF7A-34E3-4F53-BB65-9FE23DA90D0C}" type="slidenum">
+            <a:fld id="{F2F39956-E560-479A-B447-9AC211AA0B75}" type="slidenum">
               <a:rPr lang="en-US" smtClean="0"/>
               <a:t>‹#›</a:t>
             </a:fld>
@@ -2776,7 +2776,7 @@
           <p:cNvPr id="8" name="body">
             <a:extLst>
               <a:ext uri="{FF2B5EF4-FFF2-40B4-BE49-F238E27FC236}">
-                <a16:creationId xmlns:a16="http://schemas.microsoft.com/office/drawing/2014/main" id="{9F6DCE20-4282-3D02-545A-1D19FACDFBD2}"/>
+                <a16:creationId xmlns:a16="http://schemas.microsoft.com/office/drawing/2014/main" id="{79700200-C8A4-AC3D-F50D-3562A03663CD}"/>
               </a:ext>
             </a:extLst>
           </p:cNvPr>
@@ -2816,7 +2816,7 @@
           <p:cNvPr id="9" name="kpi_value_1">
             <a:extLst>
               <a:ext uri="{FF2B5EF4-FFF2-40B4-BE49-F238E27FC236}">
-                <a16:creationId xmlns:a16="http://schemas.microsoft.com/office/drawing/2014/main" id="{20FC2C31-5803-B1EF-81E1-7C8AEE745F0C}"/>
+                <a16:creationId xmlns:a16="http://schemas.microsoft.com/office/drawing/2014/main" id="{1D907606-961E-75E6-D62A-B398CCDE6E4E}"/>
               </a:ext>
             </a:extLst>
           </p:cNvPr>
@@ -2869,7 +2869,7 @@
           <p:cNvPr id="10" name="kpi_label_1">
             <a:extLst>
               <a:ext uri="{FF2B5EF4-FFF2-40B4-BE49-F238E27FC236}">
-                <a16:creationId xmlns:a16="http://schemas.microsoft.com/office/drawing/2014/main" id="{04D2E11E-4DCC-B6C2-D13B-50659851C684}"/>
+                <a16:creationId xmlns:a16="http://schemas.microsoft.com/office/drawing/2014/main" id="{72C7EC0D-3717-5740-EB77-1A5EA16B6699}"/>
               </a:ext>
             </a:extLst>
           </p:cNvPr>
@@ -2917,7 +2917,7 @@
           <p:cNvPr id="11" name="source">
             <a:extLst>
               <a:ext uri="{FF2B5EF4-FFF2-40B4-BE49-F238E27FC236}">
-                <a16:creationId xmlns:a16="http://schemas.microsoft.com/office/drawing/2014/main" id="{B82D0E9E-E2ED-4088-CD27-CDF85DD58A39}"/>
+                <a16:creationId xmlns:a16="http://schemas.microsoft.com/office/drawing/2014/main" id="{B22BF20B-995E-CE6A-005C-03EE1C0E6691}"/>
               </a:ext>
             </a:extLst>
           </p:cNvPr>
@@ -2972,7 +2972,7 @@
     </p:spTree>
     <p:extLst>
       <p:ext uri="{BB962C8B-B14F-4D97-AF65-F5344CB8AC3E}">
-        <p14:creationId xmlns:p14="http://schemas.microsoft.com/office/powerpoint/2010/main" val="2842017667"/>
+        <p14:creationId xmlns:p14="http://schemas.microsoft.com/office/powerpoint/2010/main" val="829120372"/>
       </p:ext>
     </p:extLst>
   </p:cSld>
@@ -3004,7 +3004,7 @@
           <p:cNvPr id="7" name="creative_background">
             <a:extLst>
               <a:ext uri="{FF2B5EF4-FFF2-40B4-BE49-F238E27FC236}">
-                <a16:creationId xmlns:a16="http://schemas.microsoft.com/office/drawing/2014/main" id="{CE5A9272-20C9-53EB-FF04-28E31805165B}"/>
+                <a16:creationId xmlns:a16="http://schemas.microsoft.com/office/drawing/2014/main" id="{15FAA89E-2636-0559-A933-F7E9CE70BDB5}"/>
               </a:ext>
             </a:extLst>
           </p:cNvPr>
@@ -3077,9 +3077,9 @@
           <a:bodyPr/>
           <a:lstStyle/>
           <a:p>
-            <a:fld id="{C5DDA866-DF04-4AEF-ADD4-8AFF018326A8}" type="datetimeFigureOut">
+            <a:fld id="{6A94A3F5-3F5C-489D-BBF0-F0DE1F7D2FCF}" type="datetimeFigureOut">
               <a:rPr lang="en-US" smtClean="0"/>
-              <a:t>10/3/2026</a:t>
+              <a:t>10/4/2026</a:t>
             </a:fld>
             <a:endParaRPr lang="en-US"/>
           </a:p>
@@ -3119,7 +3119,7 @@
           <a:bodyPr/>
           <a:lstStyle/>
           <a:p>
-            <a:fld id="{B3BADF7A-34E3-4F53-BB65-9FE23DA90D0C}" type="slidenum">
+            <a:fld id="{F2F39956-E560-479A-B447-9AC211AA0B75}" type="slidenum">
               <a:rPr lang="en-US" smtClean="0"/>
               <a:t>‹#›</a:t>
             </a:fld>
@@ -3132,7 +3132,7 @@
           <p:cNvPr id="8" name="body">
             <a:extLst>
               <a:ext uri="{FF2B5EF4-FFF2-40B4-BE49-F238E27FC236}">
-                <a16:creationId xmlns:a16="http://schemas.microsoft.com/office/drawing/2014/main" id="{EF15FF1C-195B-8534-29EC-DD7F12BC4EBC}"/>
+                <a16:creationId xmlns:a16="http://schemas.microsoft.com/office/drawing/2014/main" id="{1EB9D588-8AAA-119F-F75B-8072EF2B35E3}"/>
               </a:ext>
             </a:extLst>
           </p:cNvPr>
@@ -3172,7 +3172,7 @@
           <p:cNvPr id="9" name="kpi_value_1">
             <a:extLst>
               <a:ext uri="{FF2B5EF4-FFF2-40B4-BE49-F238E27FC236}">
-                <a16:creationId xmlns:a16="http://schemas.microsoft.com/office/drawing/2014/main" id="{D11485A4-C786-335A-9C42-5662E96BF0D6}"/>
+                <a16:creationId xmlns:a16="http://schemas.microsoft.com/office/drawing/2014/main" id="{FFFAFC2F-F370-6BC1-8E88-FD804A4899AF}"/>
               </a:ext>
             </a:extLst>
           </p:cNvPr>
@@ -3225,7 +3225,7 @@
           <p:cNvPr id="10" name="kpi_label_1">
             <a:extLst>
               <a:ext uri="{FF2B5EF4-FFF2-40B4-BE49-F238E27FC236}">
-                <a16:creationId xmlns:a16="http://schemas.microsoft.com/office/drawing/2014/main" id="{A2C200B6-A447-D1B0-6DB1-462E42795A0E}"/>
+                <a16:creationId xmlns:a16="http://schemas.microsoft.com/office/drawing/2014/main" id="{CD1CECD0-BBA5-4AB1-9CB8-C287E3456479}"/>
               </a:ext>
             </a:extLst>
           </p:cNvPr>
@@ -3273,7 +3273,7 @@
           <p:cNvPr id="11" name="kpi_value_2">
             <a:extLst>
               <a:ext uri="{FF2B5EF4-FFF2-40B4-BE49-F238E27FC236}">
-                <a16:creationId xmlns:a16="http://schemas.microsoft.com/office/drawing/2014/main" id="{43C76429-6A1F-7CE7-AB97-49B3C61ACFBA}"/>
+                <a16:creationId xmlns:a16="http://schemas.microsoft.com/office/drawing/2014/main" id="{501C9C57-5E78-8476-EBC4-AEF29D44D22C}"/>
               </a:ext>
             </a:extLst>
           </p:cNvPr>
@@ -3326,7 +3326,7 @@
           <p:cNvPr id="12" name="kpi_label_2">
             <a:extLst>
               <a:ext uri="{FF2B5EF4-FFF2-40B4-BE49-F238E27FC236}">
-                <a16:creationId xmlns:a16="http://schemas.microsoft.com/office/drawing/2014/main" id="{5A545BF1-60A6-4A9D-67EF-6FA3012DC4EB}"/>
+                <a16:creationId xmlns:a16="http://schemas.microsoft.com/office/drawing/2014/main" id="{ABAFB814-09CC-0EC8-CDEE-5ABB6DD80986}"/>
               </a:ext>
             </a:extLst>
           </p:cNvPr>
@@ -3374,7 +3374,7 @@
           <p:cNvPr id="13" name="kpi_value_3">
             <a:extLst>
               <a:ext uri="{FF2B5EF4-FFF2-40B4-BE49-F238E27FC236}">
-                <a16:creationId xmlns:a16="http://schemas.microsoft.com/office/drawing/2014/main" id="{45654B90-B05E-410B-FF88-3A9562CCE0DC}"/>
+                <a16:creationId xmlns:a16="http://schemas.microsoft.com/office/drawing/2014/main" id="{32A3A14C-023D-8DAD-E2EA-0034B14B2015}"/>
               </a:ext>
             </a:extLst>
           </p:cNvPr>
@@ -3427,7 +3427,7 @@
           <p:cNvPr id="14" name="kpi_label_3">
             <a:extLst>
               <a:ext uri="{FF2B5EF4-FFF2-40B4-BE49-F238E27FC236}">
-                <a16:creationId xmlns:a16="http://schemas.microsoft.com/office/drawing/2014/main" id="{486EF39B-898B-71C3-F1FE-F45C64A8C84A}"/>
+                <a16:creationId xmlns:a16="http://schemas.microsoft.com/office/drawing/2014/main" id="{250B902A-D5AE-69DE-1C14-752E7547E8E6}"/>
               </a:ext>
             </a:extLst>
           </p:cNvPr>
@@ -3475,7 +3475,7 @@
           <p:cNvPr id="15" name="kpi_value_4">
             <a:extLst>
               <a:ext uri="{FF2B5EF4-FFF2-40B4-BE49-F238E27FC236}">
-                <a16:creationId xmlns:a16="http://schemas.microsoft.com/office/drawing/2014/main" id="{71674B4D-2DA5-C288-796A-38591692049F}"/>
+                <a16:creationId xmlns:a16="http://schemas.microsoft.com/office/drawing/2014/main" id="{60C7B083-CBF2-8646-E2E1-C52BD4136459}"/>
               </a:ext>
             </a:extLst>
           </p:cNvPr>
@@ -3528,7 +3528,7 @@
           <p:cNvPr id="16" name="kpi_label_4">
             <a:extLst>
               <a:ext uri="{FF2B5EF4-FFF2-40B4-BE49-F238E27FC236}">
-                <a16:creationId xmlns:a16="http://schemas.microsoft.com/office/drawing/2014/main" id="{52AB1C7D-CD2F-949A-FBC9-639EAD64B08E}"/>
+                <a16:creationId xmlns:a16="http://schemas.microsoft.com/office/drawing/2014/main" id="{30F96627-993E-0EB6-1F86-196FF547EA1E}"/>
               </a:ext>
             </a:extLst>
           </p:cNvPr>
@@ -3576,7 +3576,7 @@
           <p:cNvPr id="17" name="source">
             <a:extLst>
               <a:ext uri="{FF2B5EF4-FFF2-40B4-BE49-F238E27FC236}">
-                <a16:creationId xmlns:a16="http://schemas.microsoft.com/office/drawing/2014/main" id="{BA147568-E5AB-005A-9598-09FF93AB6946}"/>
+                <a16:creationId xmlns:a16="http://schemas.microsoft.com/office/drawing/2014/main" id="{D618F91E-0A72-D3B3-AC2F-BCCFD329EDC0}"/>
               </a:ext>
             </a:extLst>
           </p:cNvPr>
@@ -3631,7 +3631,7 @@
     </p:spTree>
     <p:extLst>
       <p:ext uri="{BB962C8B-B14F-4D97-AF65-F5344CB8AC3E}">
-        <p14:creationId xmlns:p14="http://schemas.microsoft.com/office/powerpoint/2010/main" val="1947574649"/>
+        <p14:creationId xmlns:p14="http://schemas.microsoft.com/office/powerpoint/2010/main" val="1700112024"/>
       </p:ext>
     </p:extLst>
   </p:cSld>
@@ -3663,7 +3663,7 @@
           <p:cNvPr id="7" name="creative_background">
             <a:extLst>
               <a:ext uri="{FF2B5EF4-FFF2-40B4-BE49-F238E27FC236}">
-                <a16:creationId xmlns:a16="http://schemas.microsoft.com/office/drawing/2014/main" id="{428AA623-1FBF-145E-1A7A-1C5454257E99}"/>
+                <a16:creationId xmlns:a16="http://schemas.microsoft.com/office/drawing/2014/main" id="{D4204D9F-B8BD-C3E2-E4D2-C95A1592ECB8}"/>
               </a:ext>
             </a:extLst>
           </p:cNvPr>
@@ -3736,9 +3736,9 @@
           <a:bodyPr/>
           <a:lstStyle/>
           <a:p>
-            <a:fld id="{C5DDA866-DF04-4AEF-ADD4-8AFF018326A8}" type="datetimeFigureOut">
+            <a:fld id="{6A94A3F5-3F5C-489D-BBF0-F0DE1F7D2FCF}" type="datetimeFigureOut">
               <a:rPr lang="en-US" smtClean="0"/>
-              <a:t>10/3/2026</a:t>
+              <a:t>10/4/2026</a:t>
             </a:fld>
             <a:endParaRPr lang="en-US"/>
           </a:p>
@@ -3778,7 +3778,7 @@
           <a:bodyPr/>
           <a:lstStyle/>
           <a:p>
-            <a:fld id="{B3BADF7A-34E3-4F53-BB65-9FE23DA90D0C}" type="slidenum">
+            <a:fld id="{F2F39956-E560-479A-B447-9AC211AA0B75}" type="slidenum">
               <a:rPr lang="en-US" smtClean="0"/>
               <a:t>‹#›</a:t>
             </a:fld>
@@ -3791,7 +3791,7 @@
           <p:cNvPr id="8" name="body">
             <a:extLst>
               <a:ext uri="{FF2B5EF4-FFF2-40B4-BE49-F238E27FC236}">
-                <a16:creationId xmlns:a16="http://schemas.microsoft.com/office/drawing/2014/main" id="{47857655-78C6-DE2F-3D72-3DF00C9CCD8F}"/>
+                <a16:creationId xmlns:a16="http://schemas.microsoft.com/office/drawing/2014/main" id="{83E35AB3-14DF-5BDA-E7F4-6F213E3D89E0}"/>
               </a:ext>
             </a:extLst>
           </p:cNvPr>
@@ -3831,7 +3831,7 @@
           <p:cNvPr id="9" name="kpi_value_1">
             <a:extLst>
               <a:ext uri="{FF2B5EF4-FFF2-40B4-BE49-F238E27FC236}">
-                <a16:creationId xmlns:a16="http://schemas.microsoft.com/office/drawing/2014/main" id="{772F1255-0F4B-9C16-D33C-1016124848DC}"/>
+                <a16:creationId xmlns:a16="http://schemas.microsoft.com/office/drawing/2014/main" id="{A1C306BB-6C06-EAC7-C7A7-204EBEEF64AE}"/>
               </a:ext>
             </a:extLst>
           </p:cNvPr>
@@ -3884,7 +3884,7 @@
           <p:cNvPr id="10" name="kpi_label_1">
             <a:extLst>
               <a:ext uri="{FF2B5EF4-FFF2-40B4-BE49-F238E27FC236}">
-                <a16:creationId xmlns:a16="http://schemas.microsoft.com/office/drawing/2014/main" id="{E2C3540C-6B38-DF2C-5B55-61DAACADA107}"/>
+                <a16:creationId xmlns:a16="http://schemas.microsoft.com/office/drawing/2014/main" id="{A66DC1A6-305A-ECDE-CF45-E1D968E4DFE7}"/>
               </a:ext>
             </a:extLst>
           </p:cNvPr>
@@ -3932,7 +3932,7 @@
           <p:cNvPr id="11" name="kpi_value_2">
             <a:extLst>
               <a:ext uri="{FF2B5EF4-FFF2-40B4-BE49-F238E27FC236}">
-                <a16:creationId xmlns:a16="http://schemas.microsoft.com/office/drawing/2014/main" id="{7D4B79C7-CC15-F3AB-81C5-A4A9EC076319}"/>
+                <a16:creationId xmlns:a16="http://schemas.microsoft.com/office/drawing/2014/main" id="{CB8FCEDD-3DB7-F4FA-F7A5-D6F999D69415}"/>
               </a:ext>
             </a:extLst>
           </p:cNvPr>
@@ -3985,7 +3985,7 @@
           <p:cNvPr id="12" name="kpi_label_2">
             <a:extLst>
               <a:ext uri="{FF2B5EF4-FFF2-40B4-BE49-F238E27FC236}">
-                <a16:creationId xmlns:a16="http://schemas.microsoft.com/office/drawing/2014/main" id="{86A807D7-6C85-4D5F-EC14-98C076185A81}"/>
+                <a16:creationId xmlns:a16="http://schemas.microsoft.com/office/drawing/2014/main" id="{3422765F-579F-4382-B585-62DCD2CD6110}"/>
               </a:ext>
             </a:extLst>
           </p:cNvPr>
@@ -4033,7 +4033,7 @@
           <p:cNvPr id="13" name="source">
             <a:extLst>
               <a:ext uri="{FF2B5EF4-FFF2-40B4-BE49-F238E27FC236}">
-                <a16:creationId xmlns:a16="http://schemas.microsoft.com/office/drawing/2014/main" id="{CB49C547-D6D6-F9CC-7BB8-F718F1037B36}"/>
+                <a16:creationId xmlns:a16="http://schemas.microsoft.com/office/drawing/2014/main" id="{366CCA9C-8EBF-3B13-9762-34D819BFE290}"/>
               </a:ext>
             </a:extLst>
           </p:cNvPr>
@@ -4088,7 +4088,7 @@
     </p:spTree>
     <p:extLst>
       <p:ext uri="{BB962C8B-B14F-4D97-AF65-F5344CB8AC3E}">
-        <p14:creationId xmlns:p14="http://schemas.microsoft.com/office/powerpoint/2010/main" val="3556163834"/>
+        <p14:creationId xmlns:p14="http://schemas.microsoft.com/office/powerpoint/2010/main" val="4049933467"/>
       </p:ext>
     </p:extLst>
   </p:cSld>
@@ -4120,7 +4120,7 @@
           <p:cNvPr id="7" name="creative_background">
             <a:extLst>
               <a:ext uri="{FF2B5EF4-FFF2-40B4-BE49-F238E27FC236}">
-                <a16:creationId xmlns:a16="http://schemas.microsoft.com/office/drawing/2014/main" id="{C1FFD335-17A8-F556-1B17-6FB00C2A43F7}"/>
+                <a16:creationId xmlns:a16="http://schemas.microsoft.com/office/drawing/2014/main" id="{698DA7AB-74F3-F453-E79C-E0B3E0B85629}"/>
               </a:ext>
             </a:extLst>
           </p:cNvPr>
@@ -4193,9 +4193,9 @@
           <a:bodyPr/>
           <a:lstStyle/>
           <a:p>
-            <a:fld id="{C5DDA866-DF04-4AEF-ADD4-8AFF018326A8}" type="datetimeFigureOut">
+            <a:fld id="{6A94A3F5-3F5C-489D-BBF0-F0DE1F7D2FCF}" type="datetimeFigureOut">
               <a:rPr lang="en-US" smtClean="0"/>
-              <a:t>10/3/2026</a:t>
+              <a:t>10/4/2026</a:t>
             </a:fld>
             <a:endParaRPr lang="en-US"/>
           </a:p>
@@ -4235,7 +4235,7 @@
           <a:bodyPr/>
           <a:lstStyle/>
           <a:p>
-            <a:fld id="{B3BADF7A-34E3-4F53-BB65-9FE23DA90D0C}" type="slidenum">
+            <a:fld id="{F2F39956-E560-479A-B447-9AC211AA0B75}" type="slidenum">
               <a:rPr lang="en-US" smtClean="0"/>
               <a:t>‹#›</a:t>
             </a:fld>
@@ -4248,7 +4248,7 @@
           <p:cNvPr id="8" name="body">
             <a:extLst>
               <a:ext uri="{FF2B5EF4-FFF2-40B4-BE49-F238E27FC236}">
-                <a16:creationId xmlns:a16="http://schemas.microsoft.com/office/drawing/2014/main" id="{F2F8F02E-8357-73C3-54D2-1BB52310E66E}"/>
+                <a16:creationId xmlns:a16="http://schemas.microsoft.com/office/drawing/2014/main" id="{8458CF45-0402-901A-ACB0-BD5FA92978EA}"/>
               </a:ext>
             </a:extLst>
           </p:cNvPr>
@@ -4288,7 +4288,7 @@
           <p:cNvPr id="9" name="kpi_value_1">
             <a:extLst>
               <a:ext uri="{FF2B5EF4-FFF2-40B4-BE49-F238E27FC236}">
-                <a16:creationId xmlns:a16="http://schemas.microsoft.com/office/drawing/2014/main" id="{228636D9-6910-28AC-97ED-A2DD4D947AAD}"/>
+                <a16:creationId xmlns:a16="http://schemas.microsoft.com/office/drawing/2014/main" id="{AFA716E2-A165-746F-7A02-E65D7773C395}"/>
               </a:ext>
             </a:extLst>
           </p:cNvPr>
@@ -4341,7 +4341,7 @@
           <p:cNvPr id="10" name="kpi_label_1">
             <a:extLst>
               <a:ext uri="{FF2B5EF4-FFF2-40B4-BE49-F238E27FC236}">
-                <a16:creationId xmlns:a16="http://schemas.microsoft.com/office/drawing/2014/main" id="{FE7E6D2A-B463-C0FE-59C7-FDCA54E91D39}"/>
+                <a16:creationId xmlns:a16="http://schemas.microsoft.com/office/drawing/2014/main" id="{533322EA-C846-C7A2-0058-6B589EE6D8FE}"/>
               </a:ext>
             </a:extLst>
           </p:cNvPr>
@@ -4389,7 +4389,7 @@
           <p:cNvPr id="11" name="kpi_value_2">
             <a:extLst>
               <a:ext uri="{FF2B5EF4-FFF2-40B4-BE49-F238E27FC236}">
-                <a16:creationId xmlns:a16="http://schemas.microsoft.com/office/drawing/2014/main" id="{F79D7683-1E9D-E4CC-1A94-0B7103E6D442}"/>
+                <a16:creationId xmlns:a16="http://schemas.microsoft.com/office/drawing/2014/main" id="{50F52B29-7D5C-413B-3B42-D5AA8EB4FD27}"/>
               </a:ext>
             </a:extLst>
           </p:cNvPr>
@@ -4442,7 +4442,7 @@
           <p:cNvPr id="12" name="kpi_label_2">
             <a:extLst>
               <a:ext uri="{FF2B5EF4-FFF2-40B4-BE49-F238E27FC236}">
-                <a16:creationId xmlns:a16="http://schemas.microsoft.com/office/drawing/2014/main" id="{ECAB2FBC-C26E-D1B0-CB82-13D8E47C4FB1}"/>
+                <a16:creationId xmlns:a16="http://schemas.microsoft.com/office/drawing/2014/main" id="{C13474A9-971D-976B-0C3C-015F209FAD13}"/>
               </a:ext>
             </a:extLst>
           </p:cNvPr>
@@ -4490,7 +4490,7 @@
           <p:cNvPr id="13" name="kpi_value_3">
             <a:extLst>
               <a:ext uri="{FF2B5EF4-FFF2-40B4-BE49-F238E27FC236}">
-                <a16:creationId xmlns:a16="http://schemas.microsoft.com/office/drawing/2014/main" id="{9E448A82-A923-3F9C-5285-383AFFD8B558}"/>
+                <a16:creationId xmlns:a16="http://schemas.microsoft.com/office/drawing/2014/main" id="{933B0685-7584-AE18-11E0-2DA6FA5F046F}"/>
               </a:ext>
             </a:extLst>
           </p:cNvPr>
@@ -4543,7 +4543,7 @@
           <p:cNvPr id="14" name="kpi_label_3">
             <a:extLst>
               <a:ext uri="{FF2B5EF4-FFF2-40B4-BE49-F238E27FC236}">
-                <a16:creationId xmlns:a16="http://schemas.microsoft.com/office/drawing/2014/main" id="{B2764F01-FC4E-C804-B375-3A6A908A894E}"/>
+                <a16:creationId xmlns:a16="http://schemas.microsoft.com/office/drawing/2014/main" id="{DBCAA205-8D26-9701-03D5-18480B21417B}"/>
               </a:ext>
             </a:extLst>
           </p:cNvPr>
@@ -4591,7 +4591,7 @@
           <p:cNvPr id="15" name="kpi_value_4">
             <a:extLst>
               <a:ext uri="{FF2B5EF4-FFF2-40B4-BE49-F238E27FC236}">
-                <a16:creationId xmlns:a16="http://schemas.microsoft.com/office/drawing/2014/main" id="{D50FC6B7-A4F0-34CC-5C97-1FB7E147A20C}"/>
+                <a16:creationId xmlns:a16="http://schemas.microsoft.com/office/drawing/2014/main" id="{8073C91A-FA91-6ADE-78D8-2874C1779718}"/>
               </a:ext>
             </a:extLst>
           </p:cNvPr>
@@ -4644,7 +4644,7 @@
           <p:cNvPr id="16" name="kpi_label_4">
             <a:extLst>
               <a:ext uri="{FF2B5EF4-FFF2-40B4-BE49-F238E27FC236}">
-                <a16:creationId xmlns:a16="http://schemas.microsoft.com/office/drawing/2014/main" id="{AD4450FD-8FBE-46B5-315C-360E9E7B37DB}"/>
+                <a16:creationId xmlns:a16="http://schemas.microsoft.com/office/drawing/2014/main" id="{7CB9B12E-E619-BAFC-24B6-80BE3C8C7C7E}"/>
               </a:ext>
             </a:extLst>
           </p:cNvPr>
@@ -4692,7 +4692,7 @@
           <p:cNvPr id="17" name="source">
             <a:extLst>
               <a:ext uri="{FF2B5EF4-FFF2-40B4-BE49-F238E27FC236}">
-                <a16:creationId xmlns:a16="http://schemas.microsoft.com/office/drawing/2014/main" id="{8C3418F0-507A-9BF5-ED18-35F9D978411A}"/>
+                <a16:creationId xmlns:a16="http://schemas.microsoft.com/office/drawing/2014/main" id="{CDDBA0FB-51F2-D47C-0073-3AA08B66FC99}"/>
               </a:ext>
             </a:extLst>
           </p:cNvPr>
@@ -4747,7 +4747,7 @@
     </p:spTree>
     <p:extLst>
       <p:ext uri="{BB962C8B-B14F-4D97-AF65-F5344CB8AC3E}">
-        <p14:creationId xmlns:p14="http://schemas.microsoft.com/office/powerpoint/2010/main" val="2868259807"/>
+        <p14:creationId xmlns:p14="http://schemas.microsoft.com/office/powerpoint/2010/main" val="3517187380"/>
       </p:ext>
     </p:extLst>
   </p:cSld>
@@ -4779,7 +4779,7 @@
           <p:cNvPr id="7" name="creative_background">
             <a:extLst>
               <a:ext uri="{FF2B5EF4-FFF2-40B4-BE49-F238E27FC236}">
-                <a16:creationId xmlns:a16="http://schemas.microsoft.com/office/drawing/2014/main" id="{C1E32754-AD72-4423-B446-605BD51119B8}"/>
+                <a16:creationId xmlns:a16="http://schemas.microsoft.com/office/drawing/2014/main" id="{43529E30-DE28-A60A-953D-666C8A628FEB}"/>
               </a:ext>
             </a:extLst>
           </p:cNvPr>
@@ -4852,9 +4852,9 @@
           <a:bodyPr/>
           <a:lstStyle/>
           <a:p>
-            <a:fld id="{C5DDA866-DF04-4AEF-ADD4-8AFF018326A8}" type="datetimeFigureOut">
+            <a:fld id="{6A94A3F5-3F5C-489D-BBF0-F0DE1F7D2FCF}" type="datetimeFigureOut">
               <a:rPr lang="en-US" smtClean="0"/>
-              <a:t>10/3/2026</a:t>
+              <a:t>10/4/2026</a:t>
             </a:fld>
             <a:endParaRPr lang="en-US"/>
           </a:p>
@@ -4894,7 +4894,7 @@
           <a:bodyPr/>
           <a:lstStyle/>
           <a:p>
-            <a:fld id="{B3BADF7A-34E3-4F53-BB65-9FE23DA90D0C}" type="slidenum">
+            <a:fld id="{F2F39956-E560-479A-B447-9AC211AA0B75}" type="slidenum">
               <a:rPr lang="en-US" smtClean="0"/>
               <a:t>‹#›</a:t>
             </a:fld>
@@ -4907,7 +4907,7 @@
           <p:cNvPr id="8" name="item_1_title">
             <a:extLst>
               <a:ext uri="{FF2B5EF4-FFF2-40B4-BE49-F238E27FC236}">
-                <a16:creationId xmlns:a16="http://schemas.microsoft.com/office/drawing/2014/main" id="{D71674E9-B502-E4E3-87F6-ECFE3B644C42}"/>
+                <a16:creationId xmlns:a16="http://schemas.microsoft.com/office/drawing/2014/main" id="{649EBEDB-F68F-7458-EEBC-1626872BD49D}"/>
               </a:ext>
             </a:extLst>
           </p:cNvPr>
@@ -4957,7 +4957,7 @@
           <p:cNvPr id="9" name="item_1">
             <a:extLst>
               <a:ext uri="{FF2B5EF4-FFF2-40B4-BE49-F238E27FC236}">
-                <a16:creationId xmlns:a16="http://schemas.microsoft.com/office/drawing/2014/main" id="{972EB0D4-CA56-A0F6-E172-F930F301760B}"/>
+                <a16:creationId xmlns:a16="http://schemas.microsoft.com/office/drawing/2014/main" id="{33F09887-A881-5D8C-919D-DCD4C6D6D635}"/>
               </a:ext>
             </a:extLst>
           </p:cNvPr>
@@ -5005,7 +5005,7 @@
           <p:cNvPr id="10" name="item_2_title">
             <a:extLst>
               <a:ext uri="{FF2B5EF4-FFF2-40B4-BE49-F238E27FC236}">
-                <a16:creationId xmlns:a16="http://schemas.microsoft.com/office/drawing/2014/main" id="{C087C155-B973-6C3C-7E23-22E58E271EA3}"/>
+                <a16:creationId xmlns:a16="http://schemas.microsoft.com/office/drawing/2014/main" id="{949DCC03-2DB1-4E0A-4BFB-513EA98D4AA7}"/>
               </a:ext>
             </a:extLst>
           </p:cNvPr>
@@ -5058,7 +5058,7 @@
           <p:cNvPr id="11" name="item_2">
             <a:extLst>
               <a:ext uri="{FF2B5EF4-FFF2-40B4-BE49-F238E27FC236}">
-                <a16:creationId xmlns:a16="http://schemas.microsoft.com/office/drawing/2014/main" id="{AC375A78-7C86-CFDA-7F4F-7140F2F5F023}"/>
+                <a16:creationId xmlns:a16="http://schemas.microsoft.com/office/drawing/2014/main" id="{9A279EC3-B5A2-9E24-FFAD-B48B3EEDF17A}"/>
               </a:ext>
             </a:extLst>
           </p:cNvPr>
@@ -5106,7 +5106,7 @@
           <p:cNvPr id="12" name="item_3_title">
             <a:extLst>
               <a:ext uri="{FF2B5EF4-FFF2-40B4-BE49-F238E27FC236}">
-                <a16:creationId xmlns:a16="http://schemas.microsoft.com/office/drawing/2014/main" id="{1730C7AE-61A4-174F-FBD3-BD25936F6818}"/>
+                <a16:creationId xmlns:a16="http://schemas.microsoft.com/office/drawing/2014/main" id="{BA275FE8-C078-7E22-8563-3BD735087496}"/>
               </a:ext>
             </a:extLst>
           </p:cNvPr>
@@ -5159,7 +5159,7 @@
           <p:cNvPr id="13" name="item_3">
             <a:extLst>
               <a:ext uri="{FF2B5EF4-FFF2-40B4-BE49-F238E27FC236}">
-                <a16:creationId xmlns:a16="http://schemas.microsoft.com/office/drawing/2014/main" id="{D228F514-0AC8-F1F2-7237-109A6CD74051}"/>
+                <a16:creationId xmlns:a16="http://schemas.microsoft.com/office/drawing/2014/main" id="{20DFF9CA-0AF9-B190-EC7A-B89001D6380B}"/>
               </a:ext>
             </a:extLst>
           </p:cNvPr>
@@ -5207,7 +5207,7 @@
           <p:cNvPr id="14" name="item_4_title">
             <a:extLst>
               <a:ext uri="{FF2B5EF4-FFF2-40B4-BE49-F238E27FC236}">
-                <a16:creationId xmlns:a16="http://schemas.microsoft.com/office/drawing/2014/main" id="{2871C8B2-76A6-62AE-3425-0579A9F6DCE3}"/>
+                <a16:creationId xmlns:a16="http://schemas.microsoft.com/office/drawing/2014/main" id="{A24CBECD-C111-DD9F-FAC5-5EE81DA6874A}"/>
               </a:ext>
             </a:extLst>
           </p:cNvPr>
@@ -5260,7 +5260,7 @@
           <p:cNvPr id="15" name="item_4">
             <a:extLst>
               <a:ext uri="{FF2B5EF4-FFF2-40B4-BE49-F238E27FC236}">
-                <a16:creationId xmlns:a16="http://schemas.microsoft.com/office/drawing/2014/main" id="{71BCA380-A1B8-BFAB-8C82-1586A7E0D54D}"/>
+                <a16:creationId xmlns:a16="http://schemas.microsoft.com/office/drawing/2014/main" id="{F9059CE5-3372-2E05-8344-489E5C5C2CCB}"/>
               </a:ext>
             </a:extLst>
           </p:cNvPr>
@@ -5308,7 +5308,7 @@
           <p:cNvPr id="16" name="source">
             <a:extLst>
               <a:ext uri="{FF2B5EF4-FFF2-40B4-BE49-F238E27FC236}">
-                <a16:creationId xmlns:a16="http://schemas.microsoft.com/office/drawing/2014/main" id="{5AF49936-8EDD-6993-12E7-A5BCB08719D4}"/>
+                <a16:creationId xmlns:a16="http://schemas.microsoft.com/office/drawing/2014/main" id="{9B96654D-C359-ACDD-CAFA-4498AD037EE7}"/>
               </a:ext>
             </a:extLst>
           </p:cNvPr>
@@ -5363,7 +5363,7 @@
     </p:spTree>
     <p:extLst>
       <p:ext uri="{BB962C8B-B14F-4D97-AF65-F5344CB8AC3E}">
-        <p14:creationId xmlns:p14="http://schemas.microsoft.com/office/powerpoint/2010/main" val="471609012"/>
+        <p14:creationId xmlns:p14="http://schemas.microsoft.com/office/powerpoint/2010/main" val="294017095"/>
       </p:ext>
     </p:extLst>
   </p:cSld>
@@ -5395,7 +5395,7 @@
           <p:cNvPr id="7" name="creative_background">
             <a:extLst>
               <a:ext uri="{FF2B5EF4-FFF2-40B4-BE49-F238E27FC236}">
-                <a16:creationId xmlns:a16="http://schemas.microsoft.com/office/drawing/2014/main" id="{4BE4611E-922D-BEE1-F6AD-ED8497788297}"/>
+                <a16:creationId xmlns:a16="http://schemas.microsoft.com/office/drawing/2014/main" id="{3EBC0CA4-A5C7-6B86-33BC-F15F117DA26B}"/>
               </a:ext>
             </a:extLst>
           </p:cNvPr>
@@ -5468,9 +5468,9 @@
           <a:bodyPr/>
           <a:lstStyle/>
           <a:p>
-            <a:fld id="{C5DDA866-DF04-4AEF-ADD4-8AFF018326A8}" type="datetimeFigureOut">
+            <a:fld id="{6A94A3F5-3F5C-489D-BBF0-F0DE1F7D2FCF}" type="datetimeFigureOut">
               <a:rPr lang="en-US" smtClean="0"/>
-              <a:t>10/3/2026</a:t>
+              <a:t>10/4/2026</a:t>
             </a:fld>
             <a:endParaRPr lang="en-US"/>
           </a:p>
@@ -5510,7 +5510,7 @@
           <a:bodyPr/>
           <a:lstStyle/>
           <a:p>
-            <a:fld id="{B3BADF7A-34E3-4F53-BB65-9FE23DA90D0C}" type="slidenum">
+            <a:fld id="{F2F39956-E560-479A-B447-9AC211AA0B75}" type="slidenum">
               <a:rPr lang="en-US" smtClean="0"/>
               <a:t>‹#›</a:t>
             </a:fld>
@@ -5523,7 +5523,7 @@
           <p:cNvPr id="8" name="marker_1">
             <a:extLst>
               <a:ext uri="{FF2B5EF4-FFF2-40B4-BE49-F238E27FC236}">
-                <a16:creationId xmlns:a16="http://schemas.microsoft.com/office/drawing/2014/main" id="{2457897D-1D69-0959-EEA5-AC2567A63EB0}"/>
+                <a16:creationId xmlns:a16="http://schemas.microsoft.com/office/drawing/2014/main" id="{C3F2FB85-1F36-6048-7214-89AC84D80EE2}"/>
               </a:ext>
             </a:extLst>
           </p:cNvPr>
@@ -5579,7 +5579,7 @@
           <p:cNvPr id="9" name="item_1_title">
             <a:extLst>
               <a:ext uri="{FF2B5EF4-FFF2-40B4-BE49-F238E27FC236}">
-                <a16:creationId xmlns:a16="http://schemas.microsoft.com/office/drawing/2014/main" id="{F0142AEC-D8C9-730C-A05C-51C86BF77E20}"/>
+                <a16:creationId xmlns:a16="http://schemas.microsoft.com/office/drawing/2014/main" id="{3EDB4C5C-6C98-E36C-F167-E73BAB7E97F4}"/>
               </a:ext>
             </a:extLst>
           </p:cNvPr>
@@ -5632,7 +5632,7 @@
           <p:cNvPr id="10" name="item_1">
             <a:extLst>
               <a:ext uri="{FF2B5EF4-FFF2-40B4-BE49-F238E27FC236}">
-                <a16:creationId xmlns:a16="http://schemas.microsoft.com/office/drawing/2014/main" id="{7FC939E9-8BC6-55E2-28E0-C05CE4946561}"/>
+                <a16:creationId xmlns:a16="http://schemas.microsoft.com/office/drawing/2014/main" id="{2B2D5ACB-CE39-2E01-2ECB-F2A4980EC97E}"/>
               </a:ext>
             </a:extLst>
           </p:cNvPr>
@@ -5680,7 +5680,7 @@
           <p:cNvPr id="11" name="marker_2">
             <a:extLst>
               <a:ext uri="{FF2B5EF4-FFF2-40B4-BE49-F238E27FC236}">
-                <a16:creationId xmlns:a16="http://schemas.microsoft.com/office/drawing/2014/main" id="{C5C0400C-7C47-5DF1-4704-44F4459BBFE0}"/>
+                <a16:creationId xmlns:a16="http://schemas.microsoft.com/office/drawing/2014/main" id="{6BDFE00D-7E4A-FF5F-006B-216BE22EB944}"/>
               </a:ext>
             </a:extLst>
           </p:cNvPr>
@@ -5736,7 +5736,7 @@
           <p:cNvPr id="12" name="item_2_title">
             <a:extLst>
               <a:ext uri="{FF2B5EF4-FFF2-40B4-BE49-F238E27FC236}">
-                <a16:creationId xmlns:a16="http://schemas.microsoft.com/office/drawing/2014/main" id="{9BB8DD53-3B3A-D8CC-486B-88439D173F36}"/>
+                <a16:creationId xmlns:a16="http://schemas.microsoft.com/office/drawing/2014/main" id="{894E8BBA-C5CF-493A-BD64-AF19B1F41FA6}"/>
               </a:ext>
             </a:extLst>
           </p:cNvPr>
@@ -5789,7 +5789,7 @@
           <p:cNvPr id="13" name="item_2">
             <a:extLst>
               <a:ext uri="{FF2B5EF4-FFF2-40B4-BE49-F238E27FC236}">
-                <a16:creationId xmlns:a16="http://schemas.microsoft.com/office/drawing/2014/main" id="{24E9FF03-586E-FFE2-DFEE-5FCCF231F2BD}"/>
+                <a16:creationId xmlns:a16="http://schemas.microsoft.com/office/drawing/2014/main" id="{FA88FD9C-7B1D-E6F5-FD4C-606CC8EC99D5}"/>
               </a:ext>
             </a:extLst>
           </p:cNvPr>
@@ -5837,7 +5837,7 @@
           <p:cNvPr id="14" name="source">
             <a:extLst>
               <a:ext uri="{FF2B5EF4-FFF2-40B4-BE49-F238E27FC236}">
-                <a16:creationId xmlns:a16="http://schemas.microsoft.com/office/drawing/2014/main" id="{DAB6B5E6-FE4E-9FC7-4071-4620902DC8EC}"/>
+                <a16:creationId xmlns:a16="http://schemas.microsoft.com/office/drawing/2014/main" id="{909C28E0-855C-1E6C-6F15-3CB4CA237C7A}"/>
               </a:ext>
             </a:extLst>
           </p:cNvPr>
@@ -5892,7 +5892,7 @@
     </p:spTree>
     <p:extLst>
       <p:ext uri="{BB962C8B-B14F-4D97-AF65-F5344CB8AC3E}">
-        <p14:creationId xmlns:p14="http://schemas.microsoft.com/office/powerpoint/2010/main" val="2971952321"/>
+        <p14:creationId xmlns:p14="http://schemas.microsoft.com/office/powerpoint/2010/main" val="2707481539"/>
       </p:ext>
     </p:extLst>
   </p:cSld>
@@ -5924,7 +5924,7 @@
           <p:cNvPr id="7" name="creative_background">
             <a:extLst>
               <a:ext uri="{FF2B5EF4-FFF2-40B4-BE49-F238E27FC236}">
-                <a16:creationId xmlns:a16="http://schemas.microsoft.com/office/drawing/2014/main" id="{38985886-1A20-208F-51D6-25F4FB14E33F}"/>
+                <a16:creationId xmlns:a16="http://schemas.microsoft.com/office/drawing/2014/main" id="{6022EA9D-837B-4A68-4CD4-4E4CB30EEC37}"/>
               </a:ext>
             </a:extLst>
           </p:cNvPr>
@@ -5997,9 +5997,9 @@
           <a:bodyPr/>
           <a:lstStyle/>
           <a:p>
-            <a:fld id="{C5DDA866-DF04-4AEF-ADD4-8AFF018326A8}" type="datetimeFigureOut">
+            <a:fld id="{6A94A3F5-3F5C-489D-BBF0-F0DE1F7D2FCF}" type="datetimeFigureOut">
               <a:rPr lang="en-US" smtClean="0"/>
-              <a:t>10/3/2026</a:t>
+              <a:t>10/4/2026</a:t>
             </a:fld>
             <a:endParaRPr lang="en-US"/>
           </a:p>
@@ -6039,7 +6039,7 @@
           <a:bodyPr/>
           <a:lstStyle/>
           <a:p>
-            <a:fld id="{B3BADF7A-34E3-4F53-BB65-9FE23DA90D0C}" type="slidenum">
+            <a:fld id="{F2F39956-E560-479A-B447-9AC211AA0B75}" type="slidenum">
               <a:rPr lang="en-US" smtClean="0"/>
               <a:t>‹#›</a:t>
             </a:fld>
@@ -6052,7 +6052,7 @@
           <p:cNvPr id="8" name="item_1_title">
             <a:extLst>
               <a:ext uri="{FF2B5EF4-FFF2-40B4-BE49-F238E27FC236}">
-                <a16:creationId xmlns:a16="http://schemas.microsoft.com/office/drawing/2014/main" id="{54896430-D7AF-3B73-5230-55CD654BE0D3}"/>
+                <a16:creationId xmlns:a16="http://schemas.microsoft.com/office/drawing/2014/main" id="{C246F6A1-0818-799A-CC05-442688CA3550}"/>
               </a:ext>
             </a:extLst>
           </p:cNvPr>
@@ -6102,7 +6102,7 @@
           <p:cNvPr id="9" name="item_1">
             <a:extLst>
               <a:ext uri="{FF2B5EF4-FFF2-40B4-BE49-F238E27FC236}">
-                <a16:creationId xmlns:a16="http://schemas.microsoft.com/office/drawing/2014/main" id="{2D0E2FED-B6E7-9BD8-35E8-4570E6EDBF5D}"/>
+                <a16:creationId xmlns:a16="http://schemas.microsoft.com/office/drawing/2014/main" id="{CCE477CC-9E7F-57B4-B8CB-E9906E3EC956}"/>
               </a:ext>
             </a:extLst>
           </p:cNvPr>
@@ -6150,7 +6150,7 @@
           <p:cNvPr id="10" name="item_2_title">
             <a:extLst>
               <a:ext uri="{FF2B5EF4-FFF2-40B4-BE49-F238E27FC236}">
-                <a16:creationId xmlns:a16="http://schemas.microsoft.com/office/drawing/2014/main" id="{04E91C5A-FA3D-8695-170D-F21AC7027B63}"/>
+                <a16:creationId xmlns:a16="http://schemas.microsoft.com/office/drawing/2014/main" id="{D8147742-97CE-3153-2731-DE9E666D14C0}"/>
               </a:ext>
             </a:extLst>
           </p:cNvPr>
@@ -6203,7 +6203,7 @@
           <p:cNvPr id="11" name="item_2">
             <a:extLst>
               <a:ext uri="{FF2B5EF4-FFF2-40B4-BE49-F238E27FC236}">
-                <a16:creationId xmlns:a16="http://schemas.microsoft.com/office/drawing/2014/main" id="{177EBE58-84AC-9DF4-37EE-5EBC4588C2B4}"/>
+                <a16:creationId xmlns:a16="http://schemas.microsoft.com/office/drawing/2014/main" id="{9F3C144A-63C2-0F91-FAD4-F7218AE7FA72}"/>
               </a:ext>
             </a:extLst>
           </p:cNvPr>
@@ -6251,7 +6251,7 @@
           <p:cNvPr id="12" name="item_3_title">
             <a:extLst>
               <a:ext uri="{FF2B5EF4-FFF2-40B4-BE49-F238E27FC236}">
-                <a16:creationId xmlns:a16="http://schemas.microsoft.com/office/drawing/2014/main" id="{3A15C407-CD3D-1714-325B-899FE967FCB1}"/>
+                <a16:creationId xmlns:a16="http://schemas.microsoft.com/office/drawing/2014/main" id="{092CBAE4-BEB1-5BCC-7E9D-B3DA0CD09600}"/>
               </a:ext>
             </a:extLst>
           </p:cNvPr>
@@ -6304,7 +6304,7 @@
           <p:cNvPr id="13" name="item_3">
             <a:extLst>
               <a:ext uri="{FF2B5EF4-FFF2-40B4-BE49-F238E27FC236}">
-                <a16:creationId xmlns:a16="http://schemas.microsoft.com/office/drawing/2014/main" id="{C07A71B9-4E8E-6D6F-4D54-273922B9413C}"/>
+                <a16:creationId xmlns:a16="http://schemas.microsoft.com/office/drawing/2014/main" id="{BAC2C06B-3754-95A2-A4FE-EAE0852FFB38}"/>
               </a:ext>
             </a:extLst>
           </p:cNvPr>
@@ -6352,7 +6352,7 @@
           <p:cNvPr id="14" name="item_4_title">
             <a:extLst>
               <a:ext uri="{FF2B5EF4-FFF2-40B4-BE49-F238E27FC236}">
-                <a16:creationId xmlns:a16="http://schemas.microsoft.com/office/drawing/2014/main" id="{36BDB821-85B1-6E13-33C3-A2DDAFFBB4AD}"/>
+                <a16:creationId xmlns:a16="http://schemas.microsoft.com/office/drawing/2014/main" id="{E253A0AC-AFC0-BCB5-8CF7-81961EB2F841}"/>
               </a:ext>
             </a:extLst>
           </p:cNvPr>
@@ -6405,7 +6405,7 @@
           <p:cNvPr id="15" name="item_4">
             <a:extLst>
               <a:ext uri="{FF2B5EF4-FFF2-40B4-BE49-F238E27FC236}">
-                <a16:creationId xmlns:a16="http://schemas.microsoft.com/office/drawing/2014/main" id="{C7F5B5CC-CF6A-BA26-1984-00ECFABE0C46}"/>
+                <a16:creationId xmlns:a16="http://schemas.microsoft.com/office/drawing/2014/main" id="{0A4A94A4-4BE1-EE69-9C7F-D068ACDF6CE1}"/>
               </a:ext>
             </a:extLst>
           </p:cNvPr>
@@ -6453,7 +6453,7 @@
           <p:cNvPr id="16" name="source">
             <a:extLst>
               <a:ext uri="{FF2B5EF4-FFF2-40B4-BE49-F238E27FC236}">
-                <a16:creationId xmlns:a16="http://schemas.microsoft.com/office/drawing/2014/main" id="{CB8AA93E-2583-55C6-BDEA-B4DCE0287CD1}"/>
+                <a16:creationId xmlns:a16="http://schemas.microsoft.com/office/drawing/2014/main" id="{906308D5-261A-0776-9A78-6998385C0DEF}"/>
               </a:ext>
             </a:extLst>
           </p:cNvPr>
@@ -6508,7 +6508,7 @@
     </p:spTree>
     <p:extLst>
       <p:ext uri="{BB962C8B-B14F-4D97-AF65-F5344CB8AC3E}">
-        <p14:creationId xmlns:p14="http://schemas.microsoft.com/office/powerpoint/2010/main" val="7666695"/>
+        <p14:creationId xmlns:p14="http://schemas.microsoft.com/office/powerpoint/2010/main" val="1775408726"/>
       </p:ext>
     </p:extLst>
   </p:cSld>
@@ -6540,7 +6540,7 @@
           <p:cNvPr id="7" name="creative_background">
             <a:extLst>
               <a:ext uri="{FF2B5EF4-FFF2-40B4-BE49-F238E27FC236}">
-                <a16:creationId xmlns:a16="http://schemas.microsoft.com/office/drawing/2014/main" id="{DDA9D0B9-B170-3AE7-5027-5C064783F9DD}"/>
+                <a16:creationId xmlns:a16="http://schemas.microsoft.com/office/drawing/2014/main" id="{34602966-9E2B-CB62-16E2-8308465AC705}"/>
               </a:ext>
             </a:extLst>
           </p:cNvPr>
@@ -6613,9 +6613,9 @@
           <a:bodyPr/>
           <a:lstStyle/>
           <a:p>
-            <a:fld id="{C5DDA866-DF04-4AEF-ADD4-8AFF018326A8}" type="datetimeFigureOut">
+            <a:fld id="{6A94A3F5-3F5C-489D-BBF0-F0DE1F7D2FCF}" type="datetimeFigureOut">
               <a:rPr lang="en-US" smtClean="0"/>
-              <a:t>10/3/2026</a:t>
+              <a:t>10/4/2026</a:t>
             </a:fld>
             <a:endParaRPr lang="en-US"/>
           </a:p>
@@ -6655,7 +6655,7 @@
           <a:bodyPr/>
           <a:lstStyle/>
           <a:p>
-            <a:fld id="{B3BADF7A-34E3-4F53-BB65-9FE23DA90D0C}" type="slidenum">
+            <a:fld id="{F2F39956-E560-479A-B447-9AC211AA0B75}" type="slidenum">
               <a:rPr lang="en-US" smtClean="0"/>
               <a:t>‹#›</a:t>
             </a:fld>
@@ -6668,7 +6668,7 @@
           <p:cNvPr id="8" name="item_1_title">
             <a:extLst>
               <a:ext uri="{FF2B5EF4-FFF2-40B4-BE49-F238E27FC236}">
-                <a16:creationId xmlns:a16="http://schemas.microsoft.com/office/drawing/2014/main" id="{E22DB2D2-C383-25E9-CF7A-1FADA04485FE}"/>
+                <a16:creationId xmlns:a16="http://schemas.microsoft.com/office/drawing/2014/main" id="{E92CC76B-4329-F3BA-1426-4ABEF3BCA16C}"/>
               </a:ext>
             </a:extLst>
           </p:cNvPr>
@@ -6718,7 +6718,7 @@
           <p:cNvPr id="9" name="item_1">
             <a:extLst>
               <a:ext uri="{FF2B5EF4-FFF2-40B4-BE49-F238E27FC236}">
-                <a16:creationId xmlns:a16="http://schemas.microsoft.com/office/drawing/2014/main" id="{1D526D5B-BBD1-5DEC-50AD-B9852B3341F3}"/>
+                <a16:creationId xmlns:a16="http://schemas.microsoft.com/office/drawing/2014/main" id="{2EE54355-5F47-34ED-CA80-214D4B398BF4}"/>
               </a:ext>
             </a:extLst>
           </p:cNvPr>
@@ -6766,7 +6766,7 @@
           <p:cNvPr id="10" name="item_2_title">
             <a:extLst>
               <a:ext uri="{FF2B5EF4-FFF2-40B4-BE49-F238E27FC236}">
-                <a16:creationId xmlns:a16="http://schemas.microsoft.com/office/drawing/2014/main" id="{D22F57AA-795C-9E55-B96F-82BD55F0D879}"/>
+                <a16:creationId xmlns:a16="http://schemas.microsoft.com/office/drawing/2014/main" id="{ABAF07AC-4949-45D6-55DF-E690586E2663}"/>
               </a:ext>
             </a:extLst>
           </p:cNvPr>
@@ -6819,7 +6819,7 @@
           <p:cNvPr id="11" name="item_2">
             <a:extLst>
               <a:ext uri="{FF2B5EF4-FFF2-40B4-BE49-F238E27FC236}">
-                <a16:creationId xmlns:a16="http://schemas.microsoft.com/office/drawing/2014/main" id="{6F540C72-DB3D-8871-AC73-798699C8E233}"/>
+                <a16:creationId xmlns:a16="http://schemas.microsoft.com/office/drawing/2014/main" id="{315FCDA7-8B24-8B8C-A790-93DA48CED914}"/>
               </a:ext>
             </a:extLst>
           </p:cNvPr>
@@ -6867,7 +6867,7 @@
           <p:cNvPr id="12" name="item_3_title">
             <a:extLst>
               <a:ext uri="{FF2B5EF4-FFF2-40B4-BE49-F238E27FC236}">
-                <a16:creationId xmlns:a16="http://schemas.microsoft.com/office/drawing/2014/main" id="{721EC035-DAFF-9116-18D6-F21E583FB57A}"/>
+                <a16:creationId xmlns:a16="http://schemas.microsoft.com/office/drawing/2014/main" id="{AFBC6FA1-B61E-1DFC-BCD2-864211D087CE}"/>
               </a:ext>
             </a:extLst>
           </p:cNvPr>
@@ -6920,7 +6920,7 @@
           <p:cNvPr id="13" name="item_3">
             <a:extLst>
               <a:ext uri="{FF2B5EF4-FFF2-40B4-BE49-F238E27FC236}">
-                <a16:creationId xmlns:a16="http://schemas.microsoft.com/office/drawing/2014/main" id="{DF62C88F-39BE-8D1D-7BB4-E4D187079837}"/>
+                <a16:creationId xmlns:a16="http://schemas.microsoft.com/office/drawing/2014/main" id="{EAA1A384-D8CE-92FF-9640-A75FD00E64D9}"/>
               </a:ext>
             </a:extLst>
           </p:cNvPr>
@@ -6968,7 +6968,7 @@
           <p:cNvPr id="14" name="item_4_title">
             <a:extLst>
               <a:ext uri="{FF2B5EF4-FFF2-40B4-BE49-F238E27FC236}">
-                <a16:creationId xmlns:a16="http://schemas.microsoft.com/office/drawing/2014/main" id="{A98222C7-C460-C0AB-0E31-003340982CA8}"/>
+                <a16:creationId xmlns:a16="http://schemas.microsoft.com/office/drawing/2014/main" id="{B39E282D-FC6D-5B5F-534A-A20FC0D0E44B}"/>
               </a:ext>
             </a:extLst>
           </p:cNvPr>
@@ -7021,7 +7021,7 @@
           <p:cNvPr id="15" name="item_4">
             <a:extLst>
               <a:ext uri="{FF2B5EF4-FFF2-40B4-BE49-F238E27FC236}">
-                <a16:creationId xmlns:a16="http://schemas.microsoft.com/office/drawing/2014/main" id="{9A79F9A8-26CF-366F-D57E-3FCE228F396E}"/>
+                <a16:creationId xmlns:a16="http://schemas.microsoft.com/office/drawing/2014/main" id="{6F18522F-7609-CDBB-C6AF-223BB048B378}"/>
               </a:ext>
             </a:extLst>
           </p:cNvPr>
@@ -7069,7 +7069,7 @@
           <p:cNvPr id="16" name="source">
             <a:extLst>
               <a:ext uri="{FF2B5EF4-FFF2-40B4-BE49-F238E27FC236}">
-                <a16:creationId xmlns:a16="http://schemas.microsoft.com/office/drawing/2014/main" id="{9E703325-FCDF-8AF3-52C2-626BB645B4C7}"/>
+                <a16:creationId xmlns:a16="http://schemas.microsoft.com/office/drawing/2014/main" id="{24CDD1FC-79FF-AA59-2FE8-68C5C0F0E434}"/>
               </a:ext>
             </a:extLst>
           </p:cNvPr>
@@ -7124,7 +7124,7 @@
     </p:spTree>
     <p:extLst>
       <p:ext uri="{BB962C8B-B14F-4D97-AF65-F5344CB8AC3E}">
-        <p14:creationId xmlns:p14="http://schemas.microsoft.com/office/powerpoint/2010/main" val="3935700548"/>
+        <p14:creationId xmlns:p14="http://schemas.microsoft.com/office/powerpoint/2010/main" val="2573969911"/>
       </p:ext>
     </p:extLst>
   </p:cSld>
@@ -7156,7 +7156,7 @@
           <p:cNvPr id="7" name="creative_background">
             <a:extLst>
               <a:ext uri="{FF2B5EF4-FFF2-40B4-BE49-F238E27FC236}">
-                <a16:creationId xmlns:a16="http://schemas.microsoft.com/office/drawing/2014/main" id="{583CDAEB-E1D5-978B-3972-C5EA105B5AF5}"/>
+                <a16:creationId xmlns:a16="http://schemas.microsoft.com/office/drawing/2014/main" id="{6FAD21C4-BD22-CF69-C48A-14F735D4899F}"/>
               </a:ext>
             </a:extLst>
           </p:cNvPr>
@@ -7229,9 +7229,9 @@
           <a:bodyPr/>
           <a:lstStyle/>
           <a:p>
-            <a:fld id="{C5DDA866-DF04-4AEF-ADD4-8AFF018326A8}" type="datetimeFigureOut">
+            <a:fld id="{6A94A3F5-3F5C-489D-BBF0-F0DE1F7D2FCF}" type="datetimeFigureOut">
               <a:rPr lang="en-US" smtClean="0"/>
-              <a:t>10/3/2026</a:t>
+              <a:t>10/4/2026</a:t>
             </a:fld>
             <a:endParaRPr lang="en-US"/>
           </a:p>
@@ -7271,7 +7271,7 @@
           <a:bodyPr/>
           <a:lstStyle/>
           <a:p>
-            <a:fld id="{B3BADF7A-34E3-4F53-BB65-9FE23DA90D0C}" type="slidenum">
+            <a:fld id="{F2F39956-E560-479A-B447-9AC211AA0B75}" type="slidenum">
               <a:rPr lang="en-US" smtClean="0"/>
               <a:t>‹#›</a:t>
             </a:fld>
@@ -7284,7 +7284,7 @@
           <p:cNvPr id="8" name="kpi_value_1">
             <a:extLst>
               <a:ext uri="{FF2B5EF4-FFF2-40B4-BE49-F238E27FC236}">
-                <a16:creationId xmlns:a16="http://schemas.microsoft.com/office/drawing/2014/main" id="{83F796AC-9C49-1ED8-4F81-10D6D3E0B786}"/>
+                <a16:creationId xmlns:a16="http://schemas.microsoft.com/office/drawing/2014/main" id="{91B3E6F2-E083-DE9B-A581-49399EC4D701}"/>
               </a:ext>
             </a:extLst>
           </p:cNvPr>
@@ -7334,7 +7334,7 @@
           <p:cNvPr id="9" name="kpi_label_1">
             <a:extLst>
               <a:ext uri="{FF2B5EF4-FFF2-40B4-BE49-F238E27FC236}">
-                <a16:creationId xmlns:a16="http://schemas.microsoft.com/office/drawing/2014/main" id="{B8B17B9C-3B63-9AF2-0160-87BDF317B0E8}"/>
+                <a16:creationId xmlns:a16="http://schemas.microsoft.com/office/drawing/2014/main" id="{33E55531-9A23-C8B6-DE29-A857D2C9CED2}"/>
               </a:ext>
             </a:extLst>
           </p:cNvPr>
@@ -7382,7 +7382,7 @@
           <p:cNvPr id="10" name="quote">
             <a:extLst>
               <a:ext uri="{FF2B5EF4-FFF2-40B4-BE49-F238E27FC236}">
-                <a16:creationId xmlns:a16="http://schemas.microsoft.com/office/drawing/2014/main" id="{C902A0CC-6F05-48C5-56DD-0FC9624DEE41}"/>
+                <a16:creationId xmlns:a16="http://schemas.microsoft.com/office/drawing/2014/main" id="{0A8F2D6B-EE76-B9FC-2DBB-A8A25AF10EFC}"/>
               </a:ext>
             </a:extLst>
           </p:cNvPr>
@@ -7432,7 +7432,7 @@
           <p:cNvPr id="11" name="attribution">
             <a:extLst>
               <a:ext uri="{FF2B5EF4-FFF2-40B4-BE49-F238E27FC236}">
-                <a16:creationId xmlns:a16="http://schemas.microsoft.com/office/drawing/2014/main" id="{77CA54C3-860A-0C63-2F7B-ACC49C78B830}"/>
+                <a16:creationId xmlns:a16="http://schemas.microsoft.com/office/drawing/2014/main" id="{E99B347F-1048-FF29-726A-C9A4D94DE113}"/>
               </a:ext>
             </a:extLst>
           </p:cNvPr>
@@ -7480,7 +7480,7 @@
           <p:cNvPr id="12" name="item_1_title">
             <a:extLst>
               <a:ext uri="{FF2B5EF4-FFF2-40B4-BE49-F238E27FC236}">
-                <a16:creationId xmlns:a16="http://schemas.microsoft.com/office/drawing/2014/main" id="{667FD638-6B13-15E0-C23A-D045B038CAD7}"/>
+                <a16:creationId xmlns:a16="http://schemas.microsoft.com/office/drawing/2014/main" id="{087035E5-E7F7-C034-1238-8D75C5CFEE50}"/>
               </a:ext>
             </a:extLst>
           </p:cNvPr>
@@ -7533,7 +7533,7 @@
           <p:cNvPr id="13" name="item_1">
             <a:extLst>
               <a:ext uri="{FF2B5EF4-FFF2-40B4-BE49-F238E27FC236}">
-                <a16:creationId xmlns:a16="http://schemas.microsoft.com/office/drawing/2014/main" id="{C270AD22-034C-F3CB-02AF-A794952B96C3}"/>
+                <a16:creationId xmlns:a16="http://schemas.microsoft.com/office/drawing/2014/main" id="{BE1FAD9F-BF4E-4B77-EAD5-B7EA4E825CCB}"/>
               </a:ext>
             </a:extLst>
           </p:cNvPr>
@@ -7581,7 +7581,7 @@
           <p:cNvPr id="14" name="source">
             <a:extLst>
               <a:ext uri="{FF2B5EF4-FFF2-40B4-BE49-F238E27FC236}">
-                <a16:creationId xmlns:a16="http://schemas.microsoft.com/office/drawing/2014/main" id="{1DA28C20-323A-CA51-610C-379CD7C3C489}"/>
+                <a16:creationId xmlns:a16="http://schemas.microsoft.com/office/drawing/2014/main" id="{1C7320E3-2277-5155-526C-0CACC163913C}"/>
               </a:ext>
             </a:extLst>
           </p:cNvPr>
@@ -7636,7 +7636,7 @@
     </p:spTree>
     <p:extLst>
       <p:ext uri="{BB962C8B-B14F-4D97-AF65-F5344CB8AC3E}">
-        <p14:creationId xmlns:p14="http://schemas.microsoft.com/office/powerpoint/2010/main" val="1706621010"/>
+        <p14:creationId xmlns:p14="http://schemas.microsoft.com/office/powerpoint/2010/main" val="2430413202"/>
       </p:ext>
     </p:extLst>
   </p:cSld>
@@ -7668,7 +7668,7 @@
           <p:cNvPr id="7" name="creative_background">
             <a:extLst>
               <a:ext uri="{FF2B5EF4-FFF2-40B4-BE49-F238E27FC236}">
-                <a16:creationId xmlns:a16="http://schemas.microsoft.com/office/drawing/2014/main" id="{98E20DCA-9185-116C-99D8-4FBAC9319AEA}"/>
+                <a16:creationId xmlns:a16="http://schemas.microsoft.com/office/drawing/2014/main" id="{3FEA3650-4A33-61F7-F726-7A91B95308BF}"/>
               </a:ext>
             </a:extLst>
           </p:cNvPr>
@@ -7741,9 +7741,9 @@
           <a:bodyPr/>
           <a:lstStyle/>
           <a:p>
-            <a:fld id="{C5DDA866-DF04-4AEF-ADD4-8AFF018326A8}" type="datetimeFigureOut">
+            <a:fld id="{6A94A3F5-3F5C-489D-BBF0-F0DE1F7D2FCF}" type="datetimeFigureOut">
               <a:rPr lang="en-US" smtClean="0"/>
-              <a:t>10/3/2026</a:t>
+              <a:t>10/4/2026</a:t>
             </a:fld>
             <a:endParaRPr lang="en-US"/>
           </a:p>
@@ -7783,7 +7783,7 @@
           <a:bodyPr/>
           <a:lstStyle/>
           <a:p>
-            <a:fld id="{B3BADF7A-34E3-4F53-BB65-9FE23DA90D0C}" type="slidenum">
+            <a:fld id="{F2F39956-E560-479A-B447-9AC211AA0B75}" type="slidenum">
               <a:rPr lang="en-US" smtClean="0"/>
               <a:t>‹#›</a:t>
             </a:fld>
@@ -7796,7 +7796,7 @@
           <p:cNvPr id="8" name="item_1_title">
             <a:extLst>
               <a:ext uri="{FF2B5EF4-FFF2-40B4-BE49-F238E27FC236}">
-                <a16:creationId xmlns:a16="http://schemas.microsoft.com/office/drawing/2014/main" id="{9A7736B7-C466-C03C-4EC4-BBF43F2D0F78}"/>
+                <a16:creationId xmlns:a16="http://schemas.microsoft.com/office/drawing/2014/main" id="{E8253A96-C2D2-9718-7EE9-53551984BD67}"/>
               </a:ext>
             </a:extLst>
           </p:cNvPr>
@@ -7846,7 +7846,7 @@
           <p:cNvPr id="9" name="item_1">
             <a:extLst>
               <a:ext uri="{FF2B5EF4-FFF2-40B4-BE49-F238E27FC236}">
-                <a16:creationId xmlns:a16="http://schemas.microsoft.com/office/drawing/2014/main" id="{895349DF-8A0C-1E65-F79C-D87C73850E51}"/>
+                <a16:creationId xmlns:a16="http://schemas.microsoft.com/office/drawing/2014/main" id="{42BDB5E7-FF32-D872-BD6B-2A59CC2918EE}"/>
               </a:ext>
             </a:extLst>
           </p:cNvPr>
@@ -7894,7 +7894,7 @@
           <p:cNvPr id="10" name="item_2_title">
             <a:extLst>
               <a:ext uri="{FF2B5EF4-FFF2-40B4-BE49-F238E27FC236}">
-                <a16:creationId xmlns:a16="http://schemas.microsoft.com/office/drawing/2014/main" id="{2E5DA06F-0CB5-98EC-C483-6309FC6EBA19}"/>
+                <a16:creationId xmlns:a16="http://schemas.microsoft.com/office/drawing/2014/main" id="{006C8DCA-84DC-2D68-D62A-69BB150FF619}"/>
               </a:ext>
             </a:extLst>
           </p:cNvPr>
@@ -7947,7 +7947,7 @@
           <p:cNvPr id="11" name="item_2">
             <a:extLst>
               <a:ext uri="{FF2B5EF4-FFF2-40B4-BE49-F238E27FC236}">
-                <a16:creationId xmlns:a16="http://schemas.microsoft.com/office/drawing/2014/main" id="{87D89079-B07A-36BF-B93B-586D6E2CBB92}"/>
+                <a16:creationId xmlns:a16="http://schemas.microsoft.com/office/drawing/2014/main" id="{3E3B1AE8-3056-C6BF-B3D2-361F6CF86C9B}"/>
               </a:ext>
             </a:extLst>
           </p:cNvPr>
@@ -7995,7 +7995,7 @@
           <p:cNvPr id="12" name="item_3_title">
             <a:extLst>
               <a:ext uri="{FF2B5EF4-FFF2-40B4-BE49-F238E27FC236}">
-                <a16:creationId xmlns:a16="http://schemas.microsoft.com/office/drawing/2014/main" id="{FF6FA2BF-5973-BCED-5738-BC94D5E81078}"/>
+                <a16:creationId xmlns:a16="http://schemas.microsoft.com/office/drawing/2014/main" id="{DD293476-66FB-C00E-4727-FEBF28DBB7D2}"/>
               </a:ext>
             </a:extLst>
           </p:cNvPr>
@@ -8048,7 +8048,7 @@
           <p:cNvPr id="13" name="item_3">
             <a:extLst>
               <a:ext uri="{FF2B5EF4-FFF2-40B4-BE49-F238E27FC236}">
-                <a16:creationId xmlns:a16="http://schemas.microsoft.com/office/drawing/2014/main" id="{E11D5930-95C6-9C1E-A582-15EEDE392AAE}"/>
+                <a16:creationId xmlns:a16="http://schemas.microsoft.com/office/drawing/2014/main" id="{996AA0ED-D1E7-7157-3AF1-2E09B025A3D9}"/>
               </a:ext>
             </a:extLst>
           </p:cNvPr>
@@ -8096,7 +8096,7 @@
           <p:cNvPr id="14" name="source">
             <a:extLst>
               <a:ext uri="{FF2B5EF4-FFF2-40B4-BE49-F238E27FC236}">
-                <a16:creationId xmlns:a16="http://schemas.microsoft.com/office/drawing/2014/main" id="{941A02BA-EA63-CE21-F2AC-82D758D1BA19}"/>
+                <a16:creationId xmlns:a16="http://schemas.microsoft.com/office/drawing/2014/main" id="{71A6368D-E9CC-B27A-F51F-D36910E9C95E}"/>
               </a:ext>
             </a:extLst>
           </p:cNvPr>
@@ -8151,7 +8151,7 @@
     </p:spTree>
     <p:extLst>
       <p:ext uri="{BB962C8B-B14F-4D97-AF65-F5344CB8AC3E}">
-        <p14:creationId xmlns:p14="http://schemas.microsoft.com/office/powerpoint/2010/main" val="1805483604"/>
+        <p14:creationId xmlns:p14="http://schemas.microsoft.com/office/powerpoint/2010/main" val="1057275007"/>
       </p:ext>
     </p:extLst>
   </p:cSld>
@@ -8183,7 +8183,7 @@
           <p:cNvPr id="7" name="creative_background">
             <a:extLst>
               <a:ext uri="{FF2B5EF4-FFF2-40B4-BE49-F238E27FC236}">
-                <a16:creationId xmlns:a16="http://schemas.microsoft.com/office/drawing/2014/main" id="{D125D63A-2659-C440-4C2B-E8777BF9EA40}"/>
+                <a16:creationId xmlns:a16="http://schemas.microsoft.com/office/drawing/2014/main" id="{07FF6626-490A-91C8-544B-F178AB186089}"/>
               </a:ext>
             </a:extLst>
           </p:cNvPr>
@@ -8256,9 +8256,9 @@
           <a:bodyPr/>
           <a:lstStyle/>
           <a:p>
-            <a:fld id="{C5DDA866-DF04-4AEF-ADD4-8AFF018326A8}" type="datetimeFigureOut">
+            <a:fld id="{6A94A3F5-3F5C-489D-BBF0-F0DE1F7D2FCF}" type="datetimeFigureOut">
               <a:rPr lang="en-US" smtClean="0"/>
-              <a:t>10/3/2026</a:t>
+              <a:t>10/4/2026</a:t>
             </a:fld>
             <a:endParaRPr lang="en-US"/>
           </a:p>
@@ -8298,7 +8298,7 @@
           <a:bodyPr/>
           <a:lstStyle/>
           <a:p>
-            <a:fld id="{B3BADF7A-34E3-4F53-BB65-9FE23DA90D0C}" type="slidenum">
+            <a:fld id="{F2F39956-E560-479A-B447-9AC211AA0B75}" type="slidenum">
               <a:rPr lang="en-US" smtClean="0"/>
               <a:t>‹#›</a:t>
             </a:fld>
@@ -8311,7 +8311,7 @@
           <p:cNvPr id="8" name="marker_1">
             <a:extLst>
               <a:ext uri="{FF2B5EF4-FFF2-40B4-BE49-F238E27FC236}">
-                <a16:creationId xmlns:a16="http://schemas.microsoft.com/office/drawing/2014/main" id="{728523DF-086E-FE9E-1284-01B089AC5F90}"/>
+                <a16:creationId xmlns:a16="http://schemas.microsoft.com/office/drawing/2014/main" id="{22FEB007-BC99-B968-AF39-01386B7C78C7}"/>
               </a:ext>
             </a:extLst>
           </p:cNvPr>
@@ -8367,7 +8367,7 @@
           <p:cNvPr id="9" name="item_1_title">
             <a:extLst>
               <a:ext uri="{FF2B5EF4-FFF2-40B4-BE49-F238E27FC236}">
-                <a16:creationId xmlns:a16="http://schemas.microsoft.com/office/drawing/2014/main" id="{2F9A7365-947A-039E-1FFF-277695826559}"/>
+                <a16:creationId xmlns:a16="http://schemas.microsoft.com/office/drawing/2014/main" id="{8E24DCF0-EBEA-39A1-E2FB-E6B5716037FF}"/>
               </a:ext>
             </a:extLst>
           </p:cNvPr>
@@ -8420,7 +8420,7 @@
           <p:cNvPr id="10" name="item_1">
             <a:extLst>
               <a:ext uri="{FF2B5EF4-FFF2-40B4-BE49-F238E27FC236}">
-                <a16:creationId xmlns:a16="http://schemas.microsoft.com/office/drawing/2014/main" id="{F3E7E347-05EC-E911-1666-673A7A29DEE7}"/>
+                <a16:creationId xmlns:a16="http://schemas.microsoft.com/office/drawing/2014/main" id="{4AB50B51-CC47-3BB2-39B3-BC019B3BF65C}"/>
               </a:ext>
             </a:extLst>
           </p:cNvPr>
@@ -8468,7 +8468,7 @@
           <p:cNvPr id="11" name="marker_2">
             <a:extLst>
               <a:ext uri="{FF2B5EF4-FFF2-40B4-BE49-F238E27FC236}">
-                <a16:creationId xmlns:a16="http://schemas.microsoft.com/office/drawing/2014/main" id="{225E4012-85FC-FD0A-A53A-C844FF823C6F}"/>
+                <a16:creationId xmlns:a16="http://schemas.microsoft.com/office/drawing/2014/main" id="{861761A6-D6EA-938E-2772-D41668EEA082}"/>
               </a:ext>
             </a:extLst>
           </p:cNvPr>
@@ -8524,7 +8524,7 @@
           <p:cNvPr id="12" name="item_2_title">
             <a:extLst>
               <a:ext uri="{FF2B5EF4-FFF2-40B4-BE49-F238E27FC236}">
-                <a16:creationId xmlns:a16="http://schemas.microsoft.com/office/drawing/2014/main" id="{A47D816E-3CFF-DE0D-340B-EAE5856EA37A}"/>
+                <a16:creationId xmlns:a16="http://schemas.microsoft.com/office/drawing/2014/main" id="{49AAE8A7-1B1C-F1CA-7983-49D0C811AF6F}"/>
               </a:ext>
             </a:extLst>
           </p:cNvPr>
@@ -8577,7 +8577,7 @@
           <p:cNvPr id="13" name="item_2">
             <a:extLst>
               <a:ext uri="{FF2B5EF4-FFF2-40B4-BE49-F238E27FC236}">
-                <a16:creationId xmlns:a16="http://schemas.microsoft.com/office/drawing/2014/main" id="{65663B74-2CAD-BC2D-CA45-B141C5EA3982}"/>
+                <a16:creationId xmlns:a16="http://schemas.microsoft.com/office/drawing/2014/main" id="{5FCCA2DF-B774-FA71-577E-E4EBDF1CA3AF}"/>
               </a:ext>
             </a:extLst>
           </p:cNvPr>
@@ -8625,7 +8625,7 @@
           <p:cNvPr id="14" name="source">
             <a:extLst>
               <a:ext uri="{FF2B5EF4-FFF2-40B4-BE49-F238E27FC236}">
-                <a16:creationId xmlns:a16="http://schemas.microsoft.com/office/drawing/2014/main" id="{436E3F41-E5AA-1751-C789-529F9A768F7E}"/>
+                <a16:creationId xmlns:a16="http://schemas.microsoft.com/office/drawing/2014/main" id="{2512A588-3068-C7C3-F703-199D12980082}"/>
               </a:ext>
             </a:extLst>
           </p:cNvPr>
@@ -8680,7 +8680,7 @@
     </p:spTree>
     <p:extLst>
       <p:ext uri="{BB962C8B-B14F-4D97-AF65-F5344CB8AC3E}">
-        <p14:creationId xmlns:p14="http://schemas.microsoft.com/office/powerpoint/2010/main" val="2467847845"/>
+        <p14:creationId xmlns:p14="http://schemas.microsoft.com/office/powerpoint/2010/main" val="2060690994"/>
       </p:ext>
     </p:extLst>
   </p:cSld>
@@ -8712,7 +8712,7 @@
           <p:cNvPr id="7" name="creative_background">
             <a:extLst>
               <a:ext uri="{FF2B5EF4-FFF2-40B4-BE49-F238E27FC236}">
-                <a16:creationId xmlns:a16="http://schemas.microsoft.com/office/drawing/2014/main" id="{50E9CED5-F5C0-C2B9-9CC2-EC9BFA93ECE7}"/>
+                <a16:creationId xmlns:a16="http://schemas.microsoft.com/office/drawing/2014/main" id="{1944C363-50F3-2391-3226-08E50E1730B8}"/>
               </a:ext>
             </a:extLst>
           </p:cNvPr>
@@ -8785,9 +8785,9 @@
           <a:bodyPr/>
           <a:lstStyle/>
           <a:p>
-            <a:fld id="{C5DDA866-DF04-4AEF-ADD4-8AFF018326A8}" type="datetimeFigureOut">
+            <a:fld id="{6A94A3F5-3F5C-489D-BBF0-F0DE1F7D2FCF}" type="datetimeFigureOut">
               <a:rPr lang="en-US" smtClean="0"/>
-              <a:t>10/3/2026</a:t>
+              <a:t>10/4/2026</a:t>
             </a:fld>
             <a:endParaRPr lang="en-US"/>
           </a:p>
@@ -8827,7 +8827,7 @@
           <a:bodyPr/>
           <a:lstStyle/>
           <a:p>
-            <a:fld id="{B3BADF7A-34E3-4F53-BB65-9FE23DA90D0C}" type="slidenum">
+            <a:fld id="{F2F39956-E560-479A-B447-9AC211AA0B75}" type="slidenum">
               <a:rPr lang="en-US" smtClean="0"/>
               <a:t>‹#›</a:t>
             </a:fld>
@@ -8840,7 +8840,7 @@
           <p:cNvPr id="8" name="kpi_value_1">
             <a:extLst>
               <a:ext uri="{FF2B5EF4-FFF2-40B4-BE49-F238E27FC236}">
-                <a16:creationId xmlns:a16="http://schemas.microsoft.com/office/drawing/2014/main" id="{5F8F6E2E-DF4D-B2BF-F4F2-A39F97EE21E6}"/>
+                <a16:creationId xmlns:a16="http://schemas.microsoft.com/office/drawing/2014/main" id="{C467EC30-3A46-970D-F073-69D16B06F161}"/>
               </a:ext>
             </a:extLst>
           </p:cNvPr>
@@ -8890,7 +8890,7 @@
           <p:cNvPr id="9" name="kpi_label_1">
             <a:extLst>
               <a:ext uri="{FF2B5EF4-FFF2-40B4-BE49-F238E27FC236}">
-                <a16:creationId xmlns:a16="http://schemas.microsoft.com/office/drawing/2014/main" id="{C09CF606-65B3-7DCD-8EA6-40126D962E65}"/>
+                <a16:creationId xmlns:a16="http://schemas.microsoft.com/office/drawing/2014/main" id="{0821B094-0A06-2476-31FA-5727E7A33EDE}"/>
               </a:ext>
             </a:extLst>
           </p:cNvPr>
@@ -8938,7 +8938,7 @@
           <p:cNvPr id="10" name="quote">
             <a:extLst>
               <a:ext uri="{FF2B5EF4-FFF2-40B4-BE49-F238E27FC236}">
-                <a16:creationId xmlns:a16="http://schemas.microsoft.com/office/drawing/2014/main" id="{6905A810-9094-38C7-9193-161EA909FD90}"/>
+                <a16:creationId xmlns:a16="http://schemas.microsoft.com/office/drawing/2014/main" id="{45459678-5E07-0204-7D27-2B675A3A55C0}"/>
               </a:ext>
             </a:extLst>
           </p:cNvPr>
@@ -8988,7 +8988,7 @@
           <p:cNvPr id="11" name="attribution">
             <a:extLst>
               <a:ext uri="{FF2B5EF4-FFF2-40B4-BE49-F238E27FC236}">
-                <a16:creationId xmlns:a16="http://schemas.microsoft.com/office/drawing/2014/main" id="{8E3633E4-49D5-0629-6E57-12C568817FC7}"/>
+                <a16:creationId xmlns:a16="http://schemas.microsoft.com/office/drawing/2014/main" id="{8517BEDD-146B-32E0-BEC7-EE695A0064A5}"/>
               </a:ext>
             </a:extLst>
           </p:cNvPr>
@@ -9036,7 +9036,7 @@
           <p:cNvPr id="12" name="item_1_title">
             <a:extLst>
               <a:ext uri="{FF2B5EF4-FFF2-40B4-BE49-F238E27FC236}">
-                <a16:creationId xmlns:a16="http://schemas.microsoft.com/office/drawing/2014/main" id="{7EB74F81-A693-0CE6-AB82-75251454BF33}"/>
+                <a16:creationId xmlns:a16="http://schemas.microsoft.com/office/drawing/2014/main" id="{E399A156-D37B-6F6A-C7FD-B8E6EAF903E6}"/>
               </a:ext>
             </a:extLst>
           </p:cNvPr>
@@ -9089,7 +9089,7 @@
           <p:cNvPr id="13" name="item_1">
             <a:extLst>
               <a:ext uri="{FF2B5EF4-FFF2-40B4-BE49-F238E27FC236}">
-                <a16:creationId xmlns:a16="http://schemas.microsoft.com/office/drawing/2014/main" id="{F913B169-3BB3-F0F0-A674-12E549C5900F}"/>
+                <a16:creationId xmlns:a16="http://schemas.microsoft.com/office/drawing/2014/main" id="{02E92800-B177-1918-64CA-B710DBA59C07}"/>
               </a:ext>
             </a:extLst>
           </p:cNvPr>
@@ -9137,7 +9137,7 @@
           <p:cNvPr id="14" name="source">
             <a:extLst>
               <a:ext uri="{FF2B5EF4-FFF2-40B4-BE49-F238E27FC236}">
-                <a16:creationId xmlns:a16="http://schemas.microsoft.com/office/drawing/2014/main" id="{CB7643E3-A0D8-5814-6864-D091BCEEA804}"/>
+                <a16:creationId xmlns:a16="http://schemas.microsoft.com/office/drawing/2014/main" id="{52D94ED9-CE23-E7C8-A559-9A62B4C4EDD4}"/>
               </a:ext>
             </a:extLst>
           </p:cNvPr>
@@ -9192,7 +9192,7 @@
     </p:spTree>
     <p:extLst>
       <p:ext uri="{BB962C8B-B14F-4D97-AF65-F5344CB8AC3E}">
-        <p14:creationId xmlns:p14="http://schemas.microsoft.com/office/powerpoint/2010/main" val="3687441673"/>
+        <p14:creationId xmlns:p14="http://schemas.microsoft.com/office/powerpoint/2010/main" val="3752139278"/>
       </p:ext>
     </p:extLst>
   </p:cSld>
@@ -9224,7 +9224,7 @@
           <p:cNvPr id="7" name="creative_background">
             <a:extLst>
               <a:ext uri="{FF2B5EF4-FFF2-40B4-BE49-F238E27FC236}">
-                <a16:creationId xmlns:a16="http://schemas.microsoft.com/office/drawing/2014/main" id="{E9C3DEF8-D20D-9680-6191-8E975FEB7CF1}"/>
+                <a16:creationId xmlns:a16="http://schemas.microsoft.com/office/drawing/2014/main" id="{26FBD7DB-30A6-6ED7-7633-26F95D314BBE}"/>
               </a:ext>
             </a:extLst>
           </p:cNvPr>
@@ -9297,9 +9297,9 @@
           <a:bodyPr/>
           <a:lstStyle/>
           <a:p>
-            <a:fld id="{C5DDA866-DF04-4AEF-ADD4-8AFF018326A8}" type="datetimeFigureOut">
+            <a:fld id="{6A94A3F5-3F5C-489D-BBF0-F0DE1F7D2FCF}" type="datetimeFigureOut">
               <a:rPr lang="en-US" smtClean="0"/>
-              <a:t>10/3/2026</a:t>
+              <a:t>10/4/2026</a:t>
             </a:fld>
             <a:endParaRPr lang="en-US"/>
           </a:p>
@@ -9339,7 +9339,7 @@
           <a:bodyPr/>
           <a:lstStyle/>
           <a:p>
-            <a:fld id="{B3BADF7A-34E3-4F53-BB65-9FE23DA90D0C}" type="slidenum">
+            <a:fld id="{F2F39956-E560-479A-B447-9AC211AA0B75}" type="slidenum">
               <a:rPr lang="en-US" smtClean="0"/>
               <a:t>‹#›</a:t>
             </a:fld>
@@ -9352,7 +9352,7 @@
           <p:cNvPr id="8" name="marker_1">
             <a:extLst>
               <a:ext uri="{FF2B5EF4-FFF2-40B4-BE49-F238E27FC236}">
-                <a16:creationId xmlns:a16="http://schemas.microsoft.com/office/drawing/2014/main" id="{BD0D5A47-0273-0621-4B05-C082A7561E60}"/>
+                <a16:creationId xmlns:a16="http://schemas.microsoft.com/office/drawing/2014/main" id="{0B29E1FA-CDEA-A491-A1A2-90027EE9F455}"/>
               </a:ext>
             </a:extLst>
           </p:cNvPr>
@@ -9408,7 +9408,7 @@
           <p:cNvPr id="9" name="item_1">
             <a:extLst>
               <a:ext uri="{FF2B5EF4-FFF2-40B4-BE49-F238E27FC236}">
-                <a16:creationId xmlns:a16="http://schemas.microsoft.com/office/drawing/2014/main" id="{D8F8EFC6-8784-5313-3BAB-EC41B46DF047}"/>
+                <a16:creationId xmlns:a16="http://schemas.microsoft.com/office/drawing/2014/main" id="{B6544353-AEA0-2B05-3718-600B0EC719F9}"/>
               </a:ext>
             </a:extLst>
           </p:cNvPr>
@@ -9456,7 +9456,7 @@
           <p:cNvPr id="10" name="marker_2">
             <a:extLst>
               <a:ext uri="{FF2B5EF4-FFF2-40B4-BE49-F238E27FC236}">
-                <a16:creationId xmlns:a16="http://schemas.microsoft.com/office/drawing/2014/main" id="{F0CCE60D-29DA-C90E-751C-BE46DA0645D8}"/>
+                <a16:creationId xmlns:a16="http://schemas.microsoft.com/office/drawing/2014/main" id="{572BE5FD-B06E-EF8E-5FB3-3F9A8B088497}"/>
               </a:ext>
             </a:extLst>
           </p:cNvPr>
@@ -9512,7 +9512,7 @@
           <p:cNvPr id="11" name="item_2">
             <a:extLst>
               <a:ext uri="{FF2B5EF4-FFF2-40B4-BE49-F238E27FC236}">
-                <a16:creationId xmlns:a16="http://schemas.microsoft.com/office/drawing/2014/main" id="{738AFEF7-9DD5-86B6-EE4F-44AAD351DC30}"/>
+                <a16:creationId xmlns:a16="http://schemas.microsoft.com/office/drawing/2014/main" id="{30A7DCE8-1174-85F2-4B23-FC67C6BA9E05}"/>
               </a:ext>
             </a:extLst>
           </p:cNvPr>
@@ -9560,7 +9560,7 @@
           <p:cNvPr id="12" name="marker_3">
             <a:extLst>
               <a:ext uri="{FF2B5EF4-FFF2-40B4-BE49-F238E27FC236}">
-                <a16:creationId xmlns:a16="http://schemas.microsoft.com/office/drawing/2014/main" id="{BF699802-1AA7-4B77-8865-1D9768F5A5BB}"/>
+                <a16:creationId xmlns:a16="http://schemas.microsoft.com/office/drawing/2014/main" id="{F2834642-852C-B7B1-7410-1AC7BCABB034}"/>
               </a:ext>
             </a:extLst>
           </p:cNvPr>
@@ -9616,7 +9616,7 @@
           <p:cNvPr id="13" name="item_3">
             <a:extLst>
               <a:ext uri="{FF2B5EF4-FFF2-40B4-BE49-F238E27FC236}">
-                <a16:creationId xmlns:a16="http://schemas.microsoft.com/office/drawing/2014/main" id="{144B05A2-2C01-01C8-4D01-3FDC676C6042}"/>
+                <a16:creationId xmlns:a16="http://schemas.microsoft.com/office/drawing/2014/main" id="{68734B21-C039-1DBB-8A97-826917BA7EE6}"/>
               </a:ext>
             </a:extLst>
           </p:cNvPr>
@@ -9664,7 +9664,7 @@
           <p:cNvPr id="14" name="marker_4">
             <a:extLst>
               <a:ext uri="{FF2B5EF4-FFF2-40B4-BE49-F238E27FC236}">
-                <a16:creationId xmlns:a16="http://schemas.microsoft.com/office/drawing/2014/main" id="{944610BF-2A3D-1F07-0E94-F3829ED046E8}"/>
+                <a16:creationId xmlns:a16="http://schemas.microsoft.com/office/drawing/2014/main" id="{FC3F662A-1279-FB5D-DC27-8703D9DE2EAB}"/>
               </a:ext>
             </a:extLst>
           </p:cNvPr>
@@ -9720,7 +9720,7 @@
           <p:cNvPr id="15" name="item_4">
             <a:extLst>
               <a:ext uri="{FF2B5EF4-FFF2-40B4-BE49-F238E27FC236}">
-                <a16:creationId xmlns:a16="http://schemas.microsoft.com/office/drawing/2014/main" id="{706E80E9-E600-C8B1-02C2-201E45FFB0B6}"/>
+                <a16:creationId xmlns:a16="http://schemas.microsoft.com/office/drawing/2014/main" id="{1E268CE4-C7BA-C3F1-CAC0-61F18941019B}"/>
               </a:ext>
             </a:extLst>
           </p:cNvPr>
@@ -9768,7 +9768,7 @@
           <p:cNvPr id="16" name="source">
             <a:extLst>
               <a:ext uri="{FF2B5EF4-FFF2-40B4-BE49-F238E27FC236}">
-                <a16:creationId xmlns:a16="http://schemas.microsoft.com/office/drawing/2014/main" id="{57BF8F2B-6336-9A11-5EF7-FC1A6FBF15A7}"/>
+                <a16:creationId xmlns:a16="http://schemas.microsoft.com/office/drawing/2014/main" id="{698ED46F-8868-BE03-5DE0-C2CA01202070}"/>
               </a:ext>
             </a:extLst>
           </p:cNvPr>
@@ -9823,7 +9823,7 @@
     </p:spTree>
     <p:extLst>
       <p:ext uri="{BB962C8B-B14F-4D97-AF65-F5344CB8AC3E}">
-        <p14:creationId xmlns:p14="http://schemas.microsoft.com/office/powerpoint/2010/main" val="1435747067"/>
+        <p14:creationId xmlns:p14="http://schemas.microsoft.com/office/powerpoint/2010/main" val="1466902288"/>
       </p:ext>
     </p:extLst>
   </p:cSld>
@@ -9855,7 +9855,7 @@
           <p:cNvPr id="7" name="creative_background">
             <a:extLst>
               <a:ext uri="{FF2B5EF4-FFF2-40B4-BE49-F238E27FC236}">
-                <a16:creationId xmlns:a16="http://schemas.microsoft.com/office/drawing/2014/main" id="{69A99619-9218-FA50-07A7-A587F3932563}"/>
+                <a16:creationId xmlns:a16="http://schemas.microsoft.com/office/drawing/2014/main" id="{2F214BCB-EC3C-F00D-4355-011B19AA4EE8}"/>
               </a:ext>
             </a:extLst>
           </p:cNvPr>
@@ -9928,9 +9928,9 @@
           <a:bodyPr/>
           <a:lstStyle/>
           <a:p>
-            <a:fld id="{C5DDA866-DF04-4AEF-ADD4-8AFF018326A8}" type="datetimeFigureOut">
+            <a:fld id="{6A94A3F5-3F5C-489D-BBF0-F0DE1F7D2FCF}" type="datetimeFigureOut">
               <a:rPr lang="en-US" smtClean="0"/>
-              <a:t>10/3/2026</a:t>
+              <a:t>10/4/2026</a:t>
             </a:fld>
             <a:endParaRPr lang="en-US"/>
           </a:p>
@@ -9970,7 +9970,7 @@
           <a:bodyPr/>
           <a:lstStyle/>
           <a:p>
-            <a:fld id="{B3BADF7A-34E3-4F53-BB65-9FE23DA90D0C}" type="slidenum">
+            <a:fld id="{F2F39956-E560-479A-B447-9AC211AA0B75}" type="slidenum">
               <a:rPr lang="en-US" smtClean="0"/>
               <a:t>‹#›</a:t>
             </a:fld>
@@ -9983,7 +9983,7 @@
           <p:cNvPr id="8" name="decisions_title">
             <a:extLst>
               <a:ext uri="{FF2B5EF4-FFF2-40B4-BE49-F238E27FC236}">
-                <a16:creationId xmlns:a16="http://schemas.microsoft.com/office/drawing/2014/main" id="{5493EC2A-0576-335C-7B5C-26CA246CFF29}"/>
+                <a16:creationId xmlns:a16="http://schemas.microsoft.com/office/drawing/2014/main" id="{B6FD4C3C-FEDF-8CD3-6D5E-141A8A9B2B5B}"/>
               </a:ext>
             </a:extLst>
           </p:cNvPr>
@@ -10033,7 +10033,7 @@
           <p:cNvPr id="9" name="decisions">
             <a:extLst>
               <a:ext uri="{FF2B5EF4-FFF2-40B4-BE49-F238E27FC236}">
-                <a16:creationId xmlns:a16="http://schemas.microsoft.com/office/drawing/2014/main" id="{3AC790CC-1AAB-A077-4E5D-B9FFFC54D2D5}"/>
+                <a16:creationId xmlns:a16="http://schemas.microsoft.com/office/drawing/2014/main" id="{57B54B66-D045-0FCE-A028-3202EDE2ABB6}"/>
               </a:ext>
             </a:extLst>
           </p:cNvPr>
@@ -10076,7 +10076,7 @@
           <p:cNvPr id="10" name="item_1_title">
             <a:extLst>
               <a:ext uri="{FF2B5EF4-FFF2-40B4-BE49-F238E27FC236}">
-                <a16:creationId xmlns:a16="http://schemas.microsoft.com/office/drawing/2014/main" id="{ED3F8C12-4CAC-2D32-FAA5-5C053C32D5C5}"/>
+                <a16:creationId xmlns:a16="http://schemas.microsoft.com/office/drawing/2014/main" id="{BC09B5CB-64B0-E3AC-A06B-B99D0AB26CD6}"/>
               </a:ext>
             </a:extLst>
           </p:cNvPr>
@@ -10129,7 +10129,7 @@
           <p:cNvPr id="11" name="item_1">
             <a:extLst>
               <a:ext uri="{FF2B5EF4-FFF2-40B4-BE49-F238E27FC236}">
-                <a16:creationId xmlns:a16="http://schemas.microsoft.com/office/drawing/2014/main" id="{837A0C6D-D0CB-2150-DAE4-22781744B6D7}"/>
+                <a16:creationId xmlns:a16="http://schemas.microsoft.com/office/drawing/2014/main" id="{D4B01732-468A-F42B-C343-FA2245CCDF68}"/>
               </a:ext>
             </a:extLst>
           </p:cNvPr>
@@ -10177,7 +10177,7 @@
           <p:cNvPr id="12" name="item_2_title">
             <a:extLst>
               <a:ext uri="{FF2B5EF4-FFF2-40B4-BE49-F238E27FC236}">
-                <a16:creationId xmlns:a16="http://schemas.microsoft.com/office/drawing/2014/main" id="{16D418B3-4537-1559-F1A8-5FDFDB6DCE6A}"/>
+                <a16:creationId xmlns:a16="http://schemas.microsoft.com/office/drawing/2014/main" id="{0B5497F8-6A9C-425E-CF86-48216E3AD2AE}"/>
               </a:ext>
             </a:extLst>
           </p:cNvPr>
@@ -10230,7 +10230,7 @@
           <p:cNvPr id="13" name="item_2">
             <a:extLst>
               <a:ext uri="{FF2B5EF4-FFF2-40B4-BE49-F238E27FC236}">
-                <a16:creationId xmlns:a16="http://schemas.microsoft.com/office/drawing/2014/main" id="{4D6EA814-A0E6-DC10-6393-1C49E3BF1755}"/>
+                <a16:creationId xmlns:a16="http://schemas.microsoft.com/office/drawing/2014/main" id="{9988CC66-A0BA-CA2A-8F45-3A7CF730E133}"/>
               </a:ext>
             </a:extLst>
           </p:cNvPr>
@@ -10278,7 +10278,7 @@
           <p:cNvPr id="14" name="item_3_title">
             <a:extLst>
               <a:ext uri="{FF2B5EF4-FFF2-40B4-BE49-F238E27FC236}">
-                <a16:creationId xmlns:a16="http://schemas.microsoft.com/office/drawing/2014/main" id="{0A216FEE-2634-A824-6E1B-0DCE2B31FD03}"/>
+                <a16:creationId xmlns:a16="http://schemas.microsoft.com/office/drawing/2014/main" id="{54B3DFFE-BD22-3E7A-80FB-B74D30E81B8C}"/>
               </a:ext>
             </a:extLst>
           </p:cNvPr>
@@ -10331,7 +10331,7 @@
           <p:cNvPr id="15" name="item_3">
             <a:extLst>
               <a:ext uri="{FF2B5EF4-FFF2-40B4-BE49-F238E27FC236}">
-                <a16:creationId xmlns:a16="http://schemas.microsoft.com/office/drawing/2014/main" id="{2F91E331-5A10-D69B-FA8A-79E66158CB2D}"/>
+                <a16:creationId xmlns:a16="http://schemas.microsoft.com/office/drawing/2014/main" id="{F72C3035-D743-AC65-C470-6FBC8DB426C9}"/>
               </a:ext>
             </a:extLst>
           </p:cNvPr>
@@ -10379,7 +10379,7 @@
           <p:cNvPr id="16" name="source">
             <a:extLst>
               <a:ext uri="{FF2B5EF4-FFF2-40B4-BE49-F238E27FC236}">
-                <a16:creationId xmlns:a16="http://schemas.microsoft.com/office/drawing/2014/main" id="{7D04884B-03A0-8CFA-7B52-932DE6F27633}"/>
+                <a16:creationId xmlns:a16="http://schemas.microsoft.com/office/drawing/2014/main" id="{C7864F1C-820D-3C11-3858-94FBBE05A59F}"/>
               </a:ext>
             </a:extLst>
           </p:cNvPr>
@@ -10434,7 +10434,7 @@
     </p:spTree>
     <p:extLst>
       <p:ext uri="{BB962C8B-B14F-4D97-AF65-F5344CB8AC3E}">
-        <p14:creationId xmlns:p14="http://schemas.microsoft.com/office/powerpoint/2010/main" val="2299138747"/>
+        <p14:creationId xmlns:p14="http://schemas.microsoft.com/office/powerpoint/2010/main" val="410097841"/>
       </p:ext>
     </p:extLst>
   </p:cSld>
@@ -10466,7 +10466,7 @@
           <p:cNvPr id="7" name="creative_background">
             <a:extLst>
               <a:ext uri="{FF2B5EF4-FFF2-40B4-BE49-F238E27FC236}">
-                <a16:creationId xmlns:a16="http://schemas.microsoft.com/office/drawing/2014/main" id="{2C19DCE0-5B9C-BD74-4404-66CBB7E290BD}"/>
+                <a16:creationId xmlns:a16="http://schemas.microsoft.com/office/drawing/2014/main" id="{13B8E1D7-1FD0-F8C6-65D0-277FCBC6ADCC}"/>
               </a:ext>
             </a:extLst>
           </p:cNvPr>
@@ -10539,9 +10539,9 @@
           <a:bodyPr/>
           <a:lstStyle/>
           <a:p>
-            <a:fld id="{C5DDA866-DF04-4AEF-ADD4-8AFF018326A8}" type="datetimeFigureOut">
+            <a:fld id="{6A94A3F5-3F5C-489D-BBF0-F0DE1F7D2FCF}" type="datetimeFigureOut">
               <a:rPr lang="en-US" smtClean="0"/>
-              <a:t>10/3/2026</a:t>
+              <a:t>10/4/2026</a:t>
             </a:fld>
             <a:endParaRPr lang="en-US"/>
           </a:p>
@@ -10581,7 +10581,7 @@
           <a:bodyPr/>
           <a:lstStyle/>
           <a:p>
-            <a:fld id="{B3BADF7A-34E3-4F53-BB65-9FE23DA90D0C}" type="slidenum">
+            <a:fld id="{F2F39956-E560-479A-B447-9AC211AA0B75}" type="slidenum">
               <a:rPr lang="en-US" smtClean="0"/>
               <a:t>‹#›</a:t>
             </a:fld>
@@ -10594,7 +10594,7 @@
           <p:cNvPr id="8" name="body">
             <a:extLst>
               <a:ext uri="{FF2B5EF4-FFF2-40B4-BE49-F238E27FC236}">
-                <a16:creationId xmlns:a16="http://schemas.microsoft.com/office/drawing/2014/main" id="{0346A32D-78B2-03CD-2D68-0B5BB0650EAB}"/>
+                <a16:creationId xmlns:a16="http://schemas.microsoft.com/office/drawing/2014/main" id="{139CDDF1-90F5-58C3-7FD5-79F47A46A502}"/>
               </a:ext>
             </a:extLst>
           </p:cNvPr>
@@ -10634,7 +10634,7 @@
           <p:cNvPr id="9" name="kpi_value_1">
             <a:extLst>
               <a:ext uri="{FF2B5EF4-FFF2-40B4-BE49-F238E27FC236}">
-                <a16:creationId xmlns:a16="http://schemas.microsoft.com/office/drawing/2014/main" id="{AB942302-B5B7-0107-7F65-04A48ED6E32B}"/>
+                <a16:creationId xmlns:a16="http://schemas.microsoft.com/office/drawing/2014/main" id="{C5513697-6414-8E27-8FD5-0E2D0038E55B}"/>
               </a:ext>
             </a:extLst>
           </p:cNvPr>
@@ -10687,7 +10687,7 @@
           <p:cNvPr id="10" name="kpi_label_1">
             <a:extLst>
               <a:ext uri="{FF2B5EF4-FFF2-40B4-BE49-F238E27FC236}">
-                <a16:creationId xmlns:a16="http://schemas.microsoft.com/office/drawing/2014/main" id="{3D086127-5BC4-F362-D84D-E30BE0D5455F}"/>
+                <a16:creationId xmlns:a16="http://schemas.microsoft.com/office/drawing/2014/main" id="{460A6C48-5459-D6BA-1C90-5BF921BBE340}"/>
               </a:ext>
             </a:extLst>
           </p:cNvPr>
@@ -10735,7 +10735,7 @@
           <p:cNvPr id="11" name="kpi_value_2">
             <a:extLst>
               <a:ext uri="{FF2B5EF4-FFF2-40B4-BE49-F238E27FC236}">
-                <a16:creationId xmlns:a16="http://schemas.microsoft.com/office/drawing/2014/main" id="{DCDF920A-9D56-A3D7-5BFF-E79964DCADD1}"/>
+                <a16:creationId xmlns:a16="http://schemas.microsoft.com/office/drawing/2014/main" id="{CA909D81-EA94-069C-CB54-54712EC177EA}"/>
               </a:ext>
             </a:extLst>
           </p:cNvPr>
@@ -10788,7 +10788,7 @@
           <p:cNvPr id="12" name="kpi_label_2">
             <a:extLst>
               <a:ext uri="{FF2B5EF4-FFF2-40B4-BE49-F238E27FC236}">
-                <a16:creationId xmlns:a16="http://schemas.microsoft.com/office/drawing/2014/main" id="{D016D15F-35F6-A936-745C-99084FBCC924}"/>
+                <a16:creationId xmlns:a16="http://schemas.microsoft.com/office/drawing/2014/main" id="{CD912DF9-22DB-3168-4ADA-54674AEC32CC}"/>
               </a:ext>
             </a:extLst>
           </p:cNvPr>
@@ -10836,7 +10836,7 @@
           <p:cNvPr id="13" name="source">
             <a:extLst>
               <a:ext uri="{FF2B5EF4-FFF2-40B4-BE49-F238E27FC236}">
-                <a16:creationId xmlns:a16="http://schemas.microsoft.com/office/drawing/2014/main" id="{744B23BE-3770-611B-64D8-3EABD88D6EBE}"/>
+                <a16:creationId xmlns:a16="http://schemas.microsoft.com/office/drawing/2014/main" id="{CF3E83E2-E83C-556A-ED5E-793073F6032A}"/>
               </a:ext>
             </a:extLst>
           </p:cNvPr>
@@ -10891,7 +10891,7 @@
     </p:spTree>
     <p:extLst>
       <p:ext uri="{BB962C8B-B14F-4D97-AF65-F5344CB8AC3E}">
-        <p14:creationId xmlns:p14="http://schemas.microsoft.com/office/powerpoint/2010/main" val="4159505870"/>
+        <p14:creationId xmlns:p14="http://schemas.microsoft.com/office/powerpoint/2010/main" val="2057744596"/>
       </p:ext>
     </p:extLst>
   </p:cSld>
@@ -10923,7 +10923,7 @@
           <p:cNvPr id="7" name="creative_background">
             <a:extLst>
               <a:ext uri="{FF2B5EF4-FFF2-40B4-BE49-F238E27FC236}">
-                <a16:creationId xmlns:a16="http://schemas.microsoft.com/office/drawing/2014/main" id="{7ECE9EF9-F4D1-AB34-F5BD-A2977C1CCBC2}"/>
+                <a16:creationId xmlns:a16="http://schemas.microsoft.com/office/drawing/2014/main" id="{6D059CB3-8F9F-A697-C4C6-6C6C0ADA256A}"/>
               </a:ext>
             </a:extLst>
           </p:cNvPr>
@@ -10996,9 +10996,9 @@
           <a:bodyPr/>
           <a:lstStyle/>
           <a:p>
-            <a:fld id="{C5DDA866-DF04-4AEF-ADD4-8AFF018326A8}" type="datetimeFigureOut">
+            <a:fld id="{6A94A3F5-3F5C-489D-BBF0-F0DE1F7D2FCF}" type="datetimeFigureOut">
               <a:rPr lang="en-US" smtClean="0"/>
-              <a:t>10/3/2026</a:t>
+              <a:t>10/4/2026</a:t>
             </a:fld>
             <a:endParaRPr lang="en-US"/>
           </a:p>
@@ -11038,7 +11038,7 @@
           <a:bodyPr/>
           <a:lstStyle/>
           <a:p>
-            <a:fld id="{B3BADF7A-34E3-4F53-BB65-9FE23DA90D0C}" type="slidenum">
+            <a:fld id="{F2F39956-E560-479A-B447-9AC211AA0B75}" type="slidenum">
               <a:rPr lang="en-US" smtClean="0"/>
               <a:t>‹#›</a:t>
             </a:fld>
@@ -11051,7 +11051,7 @@
           <p:cNvPr id="8" name="body">
             <a:extLst>
               <a:ext uri="{FF2B5EF4-FFF2-40B4-BE49-F238E27FC236}">
-                <a16:creationId xmlns:a16="http://schemas.microsoft.com/office/drawing/2014/main" id="{E46199E9-ABBC-434F-4371-F16C94F4DBF1}"/>
+                <a16:creationId xmlns:a16="http://schemas.microsoft.com/office/drawing/2014/main" id="{EAFC0860-7581-CE86-C783-8F99E58ABA28}"/>
               </a:ext>
             </a:extLst>
           </p:cNvPr>
@@ -11091,7 +11091,7 @@
           <p:cNvPr id="9" name="kpi_value_1">
             <a:extLst>
               <a:ext uri="{FF2B5EF4-FFF2-40B4-BE49-F238E27FC236}">
-                <a16:creationId xmlns:a16="http://schemas.microsoft.com/office/drawing/2014/main" id="{B4ABCF8A-F321-72C1-1338-B2F3128B4685}"/>
+                <a16:creationId xmlns:a16="http://schemas.microsoft.com/office/drawing/2014/main" id="{CF4B7BD9-AF94-3463-0492-D9536F9A84D9}"/>
               </a:ext>
             </a:extLst>
           </p:cNvPr>
@@ -11144,7 +11144,7 @@
           <p:cNvPr id="10" name="kpi_label_1">
             <a:extLst>
               <a:ext uri="{FF2B5EF4-FFF2-40B4-BE49-F238E27FC236}">
-                <a16:creationId xmlns:a16="http://schemas.microsoft.com/office/drawing/2014/main" id="{42E1EBB5-48F4-224D-082F-E49A5BD38AC0}"/>
+                <a16:creationId xmlns:a16="http://schemas.microsoft.com/office/drawing/2014/main" id="{D2282000-D94D-03F7-A51E-F07FB1CE1525}"/>
               </a:ext>
             </a:extLst>
           </p:cNvPr>
@@ -11192,7 +11192,7 @@
           <p:cNvPr id="11" name="kpi_value_2">
             <a:extLst>
               <a:ext uri="{FF2B5EF4-FFF2-40B4-BE49-F238E27FC236}">
-                <a16:creationId xmlns:a16="http://schemas.microsoft.com/office/drawing/2014/main" id="{AF6D3426-7662-84A1-4854-C465EFA3B566}"/>
+                <a16:creationId xmlns:a16="http://schemas.microsoft.com/office/drawing/2014/main" id="{1982F07B-07DE-0B30-AEB5-10710EBA4630}"/>
               </a:ext>
             </a:extLst>
           </p:cNvPr>
@@ -11245,7 +11245,7 @@
           <p:cNvPr id="12" name="kpi_label_2">
             <a:extLst>
               <a:ext uri="{FF2B5EF4-FFF2-40B4-BE49-F238E27FC236}">
-                <a16:creationId xmlns:a16="http://schemas.microsoft.com/office/drawing/2014/main" id="{A317069A-3B4D-EC6E-3B4F-E3BCB84D90F5}"/>
+                <a16:creationId xmlns:a16="http://schemas.microsoft.com/office/drawing/2014/main" id="{3EA41F41-86C9-FA24-3CF1-8189DD2B609C}"/>
               </a:ext>
             </a:extLst>
           </p:cNvPr>
@@ -11293,7 +11293,7 @@
           <p:cNvPr id="13" name="kpi_value_3">
             <a:extLst>
               <a:ext uri="{FF2B5EF4-FFF2-40B4-BE49-F238E27FC236}">
-                <a16:creationId xmlns:a16="http://schemas.microsoft.com/office/drawing/2014/main" id="{123A2BDB-2493-DA79-84D8-0CED135B48B9}"/>
+                <a16:creationId xmlns:a16="http://schemas.microsoft.com/office/drawing/2014/main" id="{F3A8CC8D-E4FA-B3C8-3515-527FB7938E12}"/>
               </a:ext>
             </a:extLst>
           </p:cNvPr>
@@ -11346,7 +11346,7 @@
           <p:cNvPr id="14" name="kpi_label_3">
             <a:extLst>
               <a:ext uri="{FF2B5EF4-FFF2-40B4-BE49-F238E27FC236}">
-                <a16:creationId xmlns:a16="http://schemas.microsoft.com/office/drawing/2014/main" id="{1C8DD19B-2B26-FCB5-06FE-4652BA6CEA31}"/>
+                <a16:creationId xmlns:a16="http://schemas.microsoft.com/office/drawing/2014/main" id="{290EC865-89B8-0C21-3052-7B36D4A600CB}"/>
               </a:ext>
             </a:extLst>
           </p:cNvPr>
@@ -11394,7 +11394,7 @@
           <p:cNvPr id="15" name="kpi_value_4">
             <a:extLst>
               <a:ext uri="{FF2B5EF4-FFF2-40B4-BE49-F238E27FC236}">
-                <a16:creationId xmlns:a16="http://schemas.microsoft.com/office/drawing/2014/main" id="{FA01E137-CA6F-E4D7-8804-8900659F2C7B}"/>
+                <a16:creationId xmlns:a16="http://schemas.microsoft.com/office/drawing/2014/main" id="{260970F0-6B04-6F66-AA06-CEB232A8DED8}"/>
               </a:ext>
             </a:extLst>
           </p:cNvPr>
@@ -11447,7 +11447,7 @@
           <p:cNvPr id="16" name="kpi_label_4">
             <a:extLst>
               <a:ext uri="{FF2B5EF4-FFF2-40B4-BE49-F238E27FC236}">
-                <a16:creationId xmlns:a16="http://schemas.microsoft.com/office/drawing/2014/main" id="{65DFC636-AF8C-07D6-2396-8338BA737A5D}"/>
+                <a16:creationId xmlns:a16="http://schemas.microsoft.com/office/drawing/2014/main" id="{365371F2-999F-4D6F-72FA-F90D3E368372}"/>
               </a:ext>
             </a:extLst>
           </p:cNvPr>
@@ -11495,7 +11495,7 @@
           <p:cNvPr id="17" name="source">
             <a:extLst>
               <a:ext uri="{FF2B5EF4-FFF2-40B4-BE49-F238E27FC236}">
-                <a16:creationId xmlns:a16="http://schemas.microsoft.com/office/drawing/2014/main" id="{27F3341F-F518-C226-AC5A-FF0074FB1803}"/>
+                <a16:creationId xmlns:a16="http://schemas.microsoft.com/office/drawing/2014/main" id="{E91BE48D-A104-C2B1-55A1-403F82AD1CD2}"/>
               </a:ext>
             </a:extLst>
           </p:cNvPr>
@@ -11550,7 +11550,7 @@
     </p:spTree>
     <p:extLst>
       <p:ext uri="{BB962C8B-B14F-4D97-AF65-F5344CB8AC3E}">
-        <p14:creationId xmlns:p14="http://schemas.microsoft.com/office/powerpoint/2010/main" val="2832572188"/>
+        <p14:creationId xmlns:p14="http://schemas.microsoft.com/office/powerpoint/2010/main" val="415970311"/>
       </p:ext>
     </p:extLst>
   </p:cSld>
@@ -11582,7 +11582,7 @@
           <p:cNvPr id="7" name="creative_background">
             <a:extLst>
               <a:ext uri="{FF2B5EF4-FFF2-40B4-BE49-F238E27FC236}">
-                <a16:creationId xmlns:a16="http://schemas.microsoft.com/office/drawing/2014/main" id="{53EAE19D-3B1D-33A9-9B29-60F48CA0B8C8}"/>
+                <a16:creationId xmlns:a16="http://schemas.microsoft.com/office/drawing/2014/main" id="{C39BFE06-1328-9C1C-BC5D-7F6D2314DB6A}"/>
               </a:ext>
             </a:extLst>
           </p:cNvPr>
@@ -11655,9 +11655,9 @@
           <a:bodyPr/>
           <a:lstStyle/>
           <a:p>
-            <a:fld id="{C5DDA866-DF04-4AEF-ADD4-8AFF018326A8}" type="datetimeFigureOut">
+            <a:fld id="{6A94A3F5-3F5C-489D-BBF0-F0DE1F7D2FCF}" type="datetimeFigureOut">
               <a:rPr lang="en-US" smtClean="0"/>
-              <a:t>10/3/2026</a:t>
+              <a:t>10/4/2026</a:t>
             </a:fld>
             <a:endParaRPr lang="en-US"/>
           </a:p>
@@ -11697,7 +11697,7 @@
           <a:bodyPr/>
           <a:lstStyle/>
           <a:p>
-            <a:fld id="{B3BADF7A-34E3-4F53-BB65-9FE23DA90D0C}" type="slidenum">
+            <a:fld id="{F2F39956-E560-479A-B447-9AC211AA0B75}" type="slidenum">
               <a:rPr lang="en-US" smtClean="0"/>
               <a:t>‹#›</a:t>
             </a:fld>
@@ -11710,7 +11710,7 @@
           <p:cNvPr id="8" name="body">
             <a:extLst>
               <a:ext uri="{FF2B5EF4-FFF2-40B4-BE49-F238E27FC236}">
-                <a16:creationId xmlns:a16="http://schemas.microsoft.com/office/drawing/2014/main" id="{B34139D2-7FB8-C132-F6A2-825E1A9C71D9}"/>
+                <a16:creationId xmlns:a16="http://schemas.microsoft.com/office/drawing/2014/main" id="{A3B11E27-5A6A-B79C-95FE-10E2948DE885}"/>
               </a:ext>
             </a:extLst>
           </p:cNvPr>
@@ -11750,7 +11750,7 @@
           <p:cNvPr id="9" name="quote">
             <a:extLst>
               <a:ext uri="{FF2B5EF4-FFF2-40B4-BE49-F238E27FC236}">
-                <a16:creationId xmlns:a16="http://schemas.microsoft.com/office/drawing/2014/main" id="{32D2BC1C-C6FB-4D45-BF68-C73D05D53A75}"/>
+                <a16:creationId xmlns:a16="http://schemas.microsoft.com/office/drawing/2014/main" id="{84167558-0FF8-D010-9E7F-93ACD83CCB92}"/>
               </a:ext>
             </a:extLst>
           </p:cNvPr>
@@ -11800,7 +11800,7 @@
           <p:cNvPr id="10" name="attribution">
             <a:extLst>
               <a:ext uri="{FF2B5EF4-FFF2-40B4-BE49-F238E27FC236}">
-                <a16:creationId xmlns:a16="http://schemas.microsoft.com/office/drawing/2014/main" id="{5EB63CDF-3BF7-87C2-445F-B7E6D4786C6C}"/>
+                <a16:creationId xmlns:a16="http://schemas.microsoft.com/office/drawing/2014/main" id="{40451CE2-3BDE-3FED-4DAA-DB0949BAEAB3}"/>
               </a:ext>
             </a:extLst>
           </p:cNvPr>
@@ -11848,7 +11848,7 @@
           <p:cNvPr id="11" name="source">
             <a:extLst>
               <a:ext uri="{FF2B5EF4-FFF2-40B4-BE49-F238E27FC236}">
-                <a16:creationId xmlns:a16="http://schemas.microsoft.com/office/drawing/2014/main" id="{E641EBCB-1923-DF28-82F0-F4A7754DBB34}"/>
+                <a16:creationId xmlns:a16="http://schemas.microsoft.com/office/drawing/2014/main" id="{CEFCE6E4-9490-2646-B624-02D6C9A43440}"/>
               </a:ext>
             </a:extLst>
           </p:cNvPr>
@@ -11903,7 +11903,7 @@
     </p:spTree>
     <p:extLst>
       <p:ext uri="{BB962C8B-B14F-4D97-AF65-F5344CB8AC3E}">
-        <p14:creationId xmlns:p14="http://schemas.microsoft.com/office/powerpoint/2010/main" val="2473349100"/>
+        <p14:creationId xmlns:p14="http://schemas.microsoft.com/office/powerpoint/2010/main" val="2690924499"/>
       </p:ext>
     </p:extLst>
   </p:cSld>
@@ -11935,7 +11935,7 @@
           <p:cNvPr id="7" name="creative_background">
             <a:extLst>
               <a:ext uri="{FF2B5EF4-FFF2-40B4-BE49-F238E27FC236}">
-                <a16:creationId xmlns:a16="http://schemas.microsoft.com/office/drawing/2014/main" id="{AA09EA44-EB9B-92B0-7BC0-A989DBC3042F}"/>
+                <a16:creationId xmlns:a16="http://schemas.microsoft.com/office/drawing/2014/main" id="{40AEBF09-77F7-F4DF-76AC-B4FCF1059327}"/>
               </a:ext>
             </a:extLst>
           </p:cNvPr>
@@ -12008,9 +12008,9 @@
           <a:bodyPr/>
           <a:lstStyle/>
           <a:p>
-            <a:fld id="{C5DDA866-DF04-4AEF-ADD4-8AFF018326A8}" type="datetimeFigureOut">
+            <a:fld id="{6A94A3F5-3F5C-489D-BBF0-F0DE1F7D2FCF}" type="datetimeFigureOut">
               <a:rPr lang="en-US" smtClean="0"/>
-              <a:t>10/3/2026</a:t>
+              <a:t>10/4/2026</a:t>
             </a:fld>
             <a:endParaRPr lang="en-US"/>
           </a:p>
@@ -12050,7 +12050,7 @@
           <a:bodyPr/>
           <a:lstStyle/>
           <a:p>
-            <a:fld id="{B3BADF7A-34E3-4F53-BB65-9FE23DA90D0C}" type="slidenum">
+            <a:fld id="{F2F39956-E560-479A-B447-9AC211AA0B75}" type="slidenum">
               <a:rPr lang="en-US" smtClean="0"/>
               <a:t>‹#›</a:t>
             </a:fld>
@@ -12063,7 +12063,7 @@
           <p:cNvPr id="8" name="item_1_title">
             <a:extLst>
               <a:ext uri="{FF2B5EF4-FFF2-40B4-BE49-F238E27FC236}">
-                <a16:creationId xmlns:a16="http://schemas.microsoft.com/office/drawing/2014/main" id="{C6A5F7BB-FF8F-E1D5-F4F8-BC7723F13332}"/>
+                <a16:creationId xmlns:a16="http://schemas.microsoft.com/office/drawing/2014/main" id="{C427C087-F85E-F28E-8FD7-A1A08085EE3B}"/>
               </a:ext>
             </a:extLst>
           </p:cNvPr>
@@ -12113,7 +12113,7 @@
           <p:cNvPr id="9" name="item_1">
             <a:extLst>
               <a:ext uri="{FF2B5EF4-FFF2-40B4-BE49-F238E27FC236}">
-                <a16:creationId xmlns:a16="http://schemas.microsoft.com/office/drawing/2014/main" id="{A56F5075-07DB-3644-164B-D8DB7D3D87D6}"/>
+                <a16:creationId xmlns:a16="http://schemas.microsoft.com/office/drawing/2014/main" id="{D433C6B7-2DF1-A1E2-ECC6-AC5425113353}"/>
               </a:ext>
             </a:extLst>
           </p:cNvPr>
@@ -12161,7 +12161,7 @@
           <p:cNvPr id="10" name="item_2_title">
             <a:extLst>
               <a:ext uri="{FF2B5EF4-FFF2-40B4-BE49-F238E27FC236}">
-                <a16:creationId xmlns:a16="http://schemas.microsoft.com/office/drawing/2014/main" id="{58DB4DF6-9E07-127F-B4BF-D0E2E889BDCD}"/>
+                <a16:creationId xmlns:a16="http://schemas.microsoft.com/office/drawing/2014/main" id="{19E8D1F3-0709-52D4-DD88-7E697A19BC8E}"/>
               </a:ext>
             </a:extLst>
           </p:cNvPr>
@@ -12214,7 +12214,7 @@
           <p:cNvPr id="11" name="item_2">
             <a:extLst>
               <a:ext uri="{FF2B5EF4-FFF2-40B4-BE49-F238E27FC236}">
-                <a16:creationId xmlns:a16="http://schemas.microsoft.com/office/drawing/2014/main" id="{D8FB0A36-6591-9CCC-ACA2-DC8143542DF7}"/>
+                <a16:creationId xmlns:a16="http://schemas.microsoft.com/office/drawing/2014/main" id="{04E51D19-E0EE-D502-CF78-E69215E9808B}"/>
               </a:ext>
             </a:extLst>
           </p:cNvPr>
@@ -12262,7 +12262,7 @@
           <p:cNvPr id="12" name="item_3_title">
             <a:extLst>
               <a:ext uri="{FF2B5EF4-FFF2-40B4-BE49-F238E27FC236}">
-                <a16:creationId xmlns:a16="http://schemas.microsoft.com/office/drawing/2014/main" id="{AEA69F5E-49C8-897E-6584-BF0D46654F9C}"/>
+                <a16:creationId xmlns:a16="http://schemas.microsoft.com/office/drawing/2014/main" id="{52B1BD95-8908-5BF0-E193-8A53E594CEA5}"/>
               </a:ext>
             </a:extLst>
           </p:cNvPr>
@@ -12315,7 +12315,7 @@
           <p:cNvPr id="13" name="item_3">
             <a:extLst>
               <a:ext uri="{FF2B5EF4-FFF2-40B4-BE49-F238E27FC236}">
-                <a16:creationId xmlns:a16="http://schemas.microsoft.com/office/drawing/2014/main" id="{84829AA9-1DE9-3F78-3E76-95253FF482A9}"/>
+                <a16:creationId xmlns:a16="http://schemas.microsoft.com/office/drawing/2014/main" id="{B21F98D0-DF4D-AEA9-0626-8571D1CCB63D}"/>
               </a:ext>
             </a:extLst>
           </p:cNvPr>
@@ -12363,7 +12363,7 @@
           <p:cNvPr id="14" name="source">
             <a:extLst>
               <a:ext uri="{FF2B5EF4-FFF2-40B4-BE49-F238E27FC236}">
-                <a16:creationId xmlns:a16="http://schemas.microsoft.com/office/drawing/2014/main" id="{1C392350-05F5-206F-FE26-9627A2CEFE03}"/>
+                <a16:creationId xmlns:a16="http://schemas.microsoft.com/office/drawing/2014/main" id="{FB09E2AE-2D37-7F6E-DE41-FABA8358365F}"/>
               </a:ext>
             </a:extLst>
           </p:cNvPr>
@@ -12418,7 +12418,7 @@
     </p:spTree>
     <p:extLst>
       <p:ext uri="{BB962C8B-B14F-4D97-AF65-F5344CB8AC3E}">
-        <p14:creationId xmlns:p14="http://schemas.microsoft.com/office/powerpoint/2010/main" val="3329471221"/>
+        <p14:creationId xmlns:p14="http://schemas.microsoft.com/office/powerpoint/2010/main" val="1300414118"/>
       </p:ext>
     </p:extLst>
   </p:cSld>
@@ -12450,7 +12450,7 @@
           <p:cNvPr id="7" name="creative_background">
             <a:extLst>
               <a:ext uri="{FF2B5EF4-FFF2-40B4-BE49-F238E27FC236}">
-                <a16:creationId xmlns:a16="http://schemas.microsoft.com/office/drawing/2014/main" id="{29FD7033-4F1A-C54A-0FA4-F80B4093C81A}"/>
+                <a16:creationId xmlns:a16="http://schemas.microsoft.com/office/drawing/2014/main" id="{60ECB62F-E280-3934-5382-E110728A7BD0}"/>
               </a:ext>
             </a:extLst>
           </p:cNvPr>
@@ -12523,9 +12523,9 @@
           <a:bodyPr/>
           <a:lstStyle/>
           <a:p>
-            <a:fld id="{C5DDA866-DF04-4AEF-ADD4-8AFF018326A8}" type="datetimeFigureOut">
+            <a:fld id="{6A94A3F5-3F5C-489D-BBF0-F0DE1F7D2FCF}" type="datetimeFigureOut">
               <a:rPr lang="en-US" smtClean="0"/>
-              <a:t>10/3/2026</a:t>
+              <a:t>10/4/2026</a:t>
             </a:fld>
             <a:endParaRPr lang="en-US"/>
           </a:p>
@@ -12565,7 +12565,7 @@
           <a:bodyPr/>
           <a:lstStyle/>
           <a:p>
-            <a:fld id="{B3BADF7A-34E3-4F53-BB65-9FE23DA90D0C}" type="slidenum">
+            <a:fld id="{F2F39956-E560-479A-B447-9AC211AA0B75}" type="slidenum">
               <a:rPr lang="en-US" smtClean="0"/>
               <a:t>‹#›</a:t>
             </a:fld>
@@ -12578,7 +12578,7 @@
           <p:cNvPr id="8" name="item_1_title">
             <a:extLst>
               <a:ext uri="{FF2B5EF4-FFF2-40B4-BE49-F238E27FC236}">
-                <a16:creationId xmlns:a16="http://schemas.microsoft.com/office/drawing/2014/main" id="{BC6A2A1E-EB65-4105-C39E-ADE0B636E21A}"/>
+                <a16:creationId xmlns:a16="http://schemas.microsoft.com/office/drawing/2014/main" id="{EC4D3B52-EEF3-06F0-D2CF-18EE0CDAA1E0}"/>
               </a:ext>
             </a:extLst>
           </p:cNvPr>
@@ -12628,7 +12628,7 @@
           <p:cNvPr id="9" name="item_1">
             <a:extLst>
               <a:ext uri="{FF2B5EF4-FFF2-40B4-BE49-F238E27FC236}">
-                <a16:creationId xmlns:a16="http://schemas.microsoft.com/office/drawing/2014/main" id="{58141330-AEE1-8BC9-A93E-B514EB24737C}"/>
+                <a16:creationId xmlns:a16="http://schemas.microsoft.com/office/drawing/2014/main" id="{A871C9C2-FA98-D1AF-BFFE-2408CB26552F}"/>
               </a:ext>
             </a:extLst>
           </p:cNvPr>
@@ -12676,7 +12676,7 @@
           <p:cNvPr id="10" name="item_2_title">
             <a:extLst>
               <a:ext uri="{FF2B5EF4-FFF2-40B4-BE49-F238E27FC236}">
-                <a16:creationId xmlns:a16="http://schemas.microsoft.com/office/drawing/2014/main" id="{B6F28D6D-DDE4-6878-15F6-4010E48F2063}"/>
+                <a16:creationId xmlns:a16="http://schemas.microsoft.com/office/drawing/2014/main" id="{1CC1CA3D-CC72-FAD0-529F-99D8CD8A5711}"/>
               </a:ext>
             </a:extLst>
           </p:cNvPr>
@@ -12729,7 +12729,7 @@
           <p:cNvPr id="11" name="item_2">
             <a:extLst>
               <a:ext uri="{FF2B5EF4-FFF2-40B4-BE49-F238E27FC236}">
-                <a16:creationId xmlns:a16="http://schemas.microsoft.com/office/drawing/2014/main" id="{3327835A-7601-445F-603C-3FEBCF13F87C}"/>
+                <a16:creationId xmlns:a16="http://schemas.microsoft.com/office/drawing/2014/main" id="{1BFBEFDA-60AD-511A-AA6C-65174E532EFA}"/>
               </a:ext>
             </a:extLst>
           </p:cNvPr>
@@ -12777,7 +12777,7 @@
           <p:cNvPr id="12" name="source">
             <a:extLst>
               <a:ext uri="{FF2B5EF4-FFF2-40B4-BE49-F238E27FC236}">
-                <a16:creationId xmlns:a16="http://schemas.microsoft.com/office/drawing/2014/main" id="{6A3D4032-71AC-9121-6D00-70ABB38D009D}"/>
+                <a16:creationId xmlns:a16="http://schemas.microsoft.com/office/drawing/2014/main" id="{E94E4CEC-6DDD-5233-13E8-CF902FBA4B67}"/>
               </a:ext>
             </a:extLst>
           </p:cNvPr>
@@ -12832,7 +12832,7 @@
     </p:spTree>
     <p:extLst>
       <p:ext uri="{BB962C8B-B14F-4D97-AF65-F5344CB8AC3E}">
-        <p14:creationId xmlns:p14="http://schemas.microsoft.com/office/powerpoint/2010/main" val="1778729549"/>
+        <p14:creationId xmlns:p14="http://schemas.microsoft.com/office/powerpoint/2010/main" val="1631759887"/>
       </p:ext>
     </p:extLst>
   </p:cSld>
@@ -12864,7 +12864,7 @@
           <p:cNvPr id="7" name="creative_background">
             <a:extLst>
               <a:ext uri="{FF2B5EF4-FFF2-40B4-BE49-F238E27FC236}">
-                <a16:creationId xmlns:a16="http://schemas.microsoft.com/office/drawing/2014/main" id="{BF5AD1CF-23FA-D5F4-1DD8-446E760584A5}"/>
+                <a16:creationId xmlns:a16="http://schemas.microsoft.com/office/drawing/2014/main" id="{739E8519-9A93-D281-C8BB-F5AF2DECC043}"/>
               </a:ext>
             </a:extLst>
           </p:cNvPr>
@@ -12937,9 +12937,9 @@
           <a:bodyPr/>
           <a:lstStyle/>
           <a:p>
-            <a:fld id="{C5DDA866-DF04-4AEF-ADD4-8AFF018326A8}" type="datetimeFigureOut">
+            <a:fld id="{6A94A3F5-3F5C-489D-BBF0-F0DE1F7D2FCF}" type="datetimeFigureOut">
               <a:rPr lang="en-US" smtClean="0"/>
-              <a:t>10/3/2026</a:t>
+              <a:t>10/4/2026</a:t>
             </a:fld>
             <a:endParaRPr lang="en-US"/>
           </a:p>
@@ -12979,7 +12979,7 @@
           <a:bodyPr/>
           <a:lstStyle/>
           <a:p>
-            <a:fld id="{B3BADF7A-34E3-4F53-BB65-9FE23DA90D0C}" type="slidenum">
+            <a:fld id="{F2F39956-E560-479A-B447-9AC211AA0B75}" type="slidenum">
               <a:rPr lang="en-US" smtClean="0"/>
               <a:t>‹#›</a:t>
             </a:fld>
@@ -12992,7 +12992,7 @@
           <p:cNvPr id="8" name="chart">
             <a:extLst>
               <a:ext uri="{FF2B5EF4-FFF2-40B4-BE49-F238E27FC236}">
-                <a16:creationId xmlns:a16="http://schemas.microsoft.com/office/drawing/2014/main" id="{60DD0141-A3AB-B18F-A59B-3776DA6DE3C8}"/>
+                <a16:creationId xmlns:a16="http://schemas.microsoft.com/office/drawing/2014/main" id="{6542403D-4E24-99D2-EDFF-96F4EC7A83B3}"/>
               </a:ext>
             </a:extLst>
           </p:cNvPr>
@@ -13022,7 +13022,7 @@
           <p:cNvPr id="9" name="body">
             <a:extLst>
               <a:ext uri="{FF2B5EF4-FFF2-40B4-BE49-F238E27FC236}">
-                <a16:creationId xmlns:a16="http://schemas.microsoft.com/office/drawing/2014/main" id="{69173EA1-9738-0AF3-9179-215E8D4849F2}"/>
+                <a16:creationId xmlns:a16="http://schemas.microsoft.com/office/drawing/2014/main" id="{57E7E49A-AA21-CE23-C9DA-DAF79BD918B0}"/>
               </a:ext>
             </a:extLst>
           </p:cNvPr>
@@ -13065,7 +13065,7 @@
           <p:cNvPr id="10" name="source">
             <a:extLst>
               <a:ext uri="{FF2B5EF4-FFF2-40B4-BE49-F238E27FC236}">
-                <a16:creationId xmlns:a16="http://schemas.microsoft.com/office/drawing/2014/main" id="{BEB2AB3B-7B1D-1F47-9AAE-BAA5A7944D36}"/>
+                <a16:creationId xmlns:a16="http://schemas.microsoft.com/office/drawing/2014/main" id="{457D4D74-0F80-7571-AF4F-7F9648A10371}"/>
               </a:ext>
             </a:extLst>
           </p:cNvPr>
@@ -13120,7 +13120,7 @@
     </p:spTree>
     <p:extLst>
       <p:ext uri="{BB962C8B-B14F-4D97-AF65-F5344CB8AC3E}">
-        <p14:creationId xmlns:p14="http://schemas.microsoft.com/office/powerpoint/2010/main" val="3319313085"/>
+        <p14:creationId xmlns:p14="http://schemas.microsoft.com/office/powerpoint/2010/main" val="750249206"/>
       </p:ext>
     </p:extLst>
   </p:cSld>
@@ -13152,7 +13152,7 @@
           <p:cNvPr id="7" name="creative_background">
             <a:extLst>
               <a:ext uri="{FF2B5EF4-FFF2-40B4-BE49-F238E27FC236}">
-                <a16:creationId xmlns:a16="http://schemas.microsoft.com/office/drawing/2014/main" id="{8A666075-4D27-5E07-554F-FC18C837B082}"/>
+                <a16:creationId xmlns:a16="http://schemas.microsoft.com/office/drawing/2014/main" id="{F3784758-1BFC-0ABC-2E97-03F231D615D3}"/>
               </a:ext>
             </a:extLst>
           </p:cNvPr>
@@ -13225,9 +13225,9 @@
           <a:bodyPr/>
           <a:lstStyle/>
           <a:p>
-            <a:fld id="{C5DDA866-DF04-4AEF-ADD4-8AFF018326A8}" type="datetimeFigureOut">
+            <a:fld id="{6A94A3F5-3F5C-489D-BBF0-F0DE1F7D2FCF}" type="datetimeFigureOut">
               <a:rPr lang="en-US" smtClean="0"/>
-              <a:t>10/3/2026</a:t>
+              <a:t>10/4/2026</a:t>
             </a:fld>
             <a:endParaRPr lang="en-US"/>
           </a:p>
@@ -13267,7 +13267,7 @@
           <a:bodyPr/>
           <a:lstStyle/>
           <a:p>
-            <a:fld id="{B3BADF7A-34E3-4F53-BB65-9FE23DA90D0C}" type="slidenum">
+            <a:fld id="{F2F39956-E560-479A-B447-9AC211AA0B75}" type="slidenum">
               <a:rPr lang="en-US" smtClean="0"/>
               <a:t>‹#›</a:t>
             </a:fld>
@@ -13280,7 +13280,7 @@
           <p:cNvPr id="8" name="item_1_title">
             <a:extLst>
               <a:ext uri="{FF2B5EF4-FFF2-40B4-BE49-F238E27FC236}">
-                <a16:creationId xmlns:a16="http://schemas.microsoft.com/office/drawing/2014/main" id="{FFBF4879-3587-861E-DCEB-5D28DB9CB104}"/>
+                <a16:creationId xmlns:a16="http://schemas.microsoft.com/office/drawing/2014/main" id="{EB1755C9-6628-9806-C6ED-2A13C6F2C795}"/>
               </a:ext>
             </a:extLst>
           </p:cNvPr>
@@ -13330,7 +13330,7 @@
           <p:cNvPr id="9" name="item_1">
             <a:extLst>
               <a:ext uri="{FF2B5EF4-FFF2-40B4-BE49-F238E27FC236}">
-                <a16:creationId xmlns:a16="http://schemas.microsoft.com/office/drawing/2014/main" id="{A5A1A687-916F-2DF1-22F1-74C0E7689834}"/>
+                <a16:creationId xmlns:a16="http://schemas.microsoft.com/office/drawing/2014/main" id="{CF24B372-231F-6C78-D9AB-DA7590DB0279}"/>
               </a:ext>
             </a:extLst>
           </p:cNvPr>
@@ -13378,7 +13378,7 @@
           <p:cNvPr id="10" name="item_2_title">
             <a:extLst>
               <a:ext uri="{FF2B5EF4-FFF2-40B4-BE49-F238E27FC236}">
-                <a16:creationId xmlns:a16="http://schemas.microsoft.com/office/drawing/2014/main" id="{84319223-AF73-BDE0-E78E-18F54C0285B5}"/>
+                <a16:creationId xmlns:a16="http://schemas.microsoft.com/office/drawing/2014/main" id="{D66FD8E5-CBB3-F9DC-258F-3278A5178811}"/>
               </a:ext>
             </a:extLst>
           </p:cNvPr>
@@ -13431,7 +13431,7 @@
           <p:cNvPr id="11" name="item_2">
             <a:extLst>
               <a:ext uri="{FF2B5EF4-FFF2-40B4-BE49-F238E27FC236}">
-                <a16:creationId xmlns:a16="http://schemas.microsoft.com/office/drawing/2014/main" id="{86007F08-773F-C0D8-D5F9-51BB6B23B2EB}"/>
+                <a16:creationId xmlns:a16="http://schemas.microsoft.com/office/drawing/2014/main" id="{0F047487-2F77-127E-E538-B72438531000}"/>
               </a:ext>
             </a:extLst>
           </p:cNvPr>
@@ -13479,7 +13479,7 @@
           <p:cNvPr id="12" name="item_3_title">
             <a:extLst>
               <a:ext uri="{FF2B5EF4-FFF2-40B4-BE49-F238E27FC236}">
-                <a16:creationId xmlns:a16="http://schemas.microsoft.com/office/drawing/2014/main" id="{F615795E-7F03-5429-A67B-4A6CF33709BB}"/>
+                <a16:creationId xmlns:a16="http://schemas.microsoft.com/office/drawing/2014/main" id="{B3EFC4C3-227C-DC2A-5BC9-06CB1F26B2AC}"/>
               </a:ext>
             </a:extLst>
           </p:cNvPr>
@@ -13532,7 +13532,7 @@
           <p:cNvPr id="13" name="item_3">
             <a:extLst>
               <a:ext uri="{FF2B5EF4-FFF2-40B4-BE49-F238E27FC236}">
-                <a16:creationId xmlns:a16="http://schemas.microsoft.com/office/drawing/2014/main" id="{D9AC5B95-DB9E-8486-5277-1BCA6EEEC28E}"/>
+                <a16:creationId xmlns:a16="http://schemas.microsoft.com/office/drawing/2014/main" id="{D412DB67-80E4-2D87-15EA-708E0BF3FB3A}"/>
               </a:ext>
             </a:extLst>
           </p:cNvPr>
@@ -13580,7 +13580,7 @@
           <p:cNvPr id="14" name="item_4_title">
             <a:extLst>
               <a:ext uri="{FF2B5EF4-FFF2-40B4-BE49-F238E27FC236}">
-                <a16:creationId xmlns:a16="http://schemas.microsoft.com/office/drawing/2014/main" id="{44468ADA-3F07-C467-69BB-3407E4DBE88A}"/>
+                <a16:creationId xmlns:a16="http://schemas.microsoft.com/office/drawing/2014/main" id="{5F919132-82EE-9F60-4B06-A56857354225}"/>
               </a:ext>
             </a:extLst>
           </p:cNvPr>
@@ -13633,7 +13633,7 @@
           <p:cNvPr id="15" name="item_4">
             <a:extLst>
               <a:ext uri="{FF2B5EF4-FFF2-40B4-BE49-F238E27FC236}">
-                <a16:creationId xmlns:a16="http://schemas.microsoft.com/office/drawing/2014/main" id="{53031E09-1431-7AA9-4A60-E6C668E1460F}"/>
+                <a16:creationId xmlns:a16="http://schemas.microsoft.com/office/drawing/2014/main" id="{86798D3C-A7CB-C2C0-56B2-B3EC880977EC}"/>
               </a:ext>
             </a:extLst>
           </p:cNvPr>
@@ -13681,7 +13681,7 @@
           <p:cNvPr id="16" name="source">
             <a:extLst>
               <a:ext uri="{FF2B5EF4-FFF2-40B4-BE49-F238E27FC236}">
-                <a16:creationId xmlns:a16="http://schemas.microsoft.com/office/drawing/2014/main" id="{792582A5-B718-55AB-9149-15BDE45A7991}"/>
+                <a16:creationId xmlns:a16="http://schemas.microsoft.com/office/drawing/2014/main" id="{34DFFBFA-BFA0-1157-B3A9-746E1D3B692F}"/>
               </a:ext>
             </a:extLst>
           </p:cNvPr>
@@ -13736,7 +13736,7 @@
     </p:spTree>
     <p:extLst>
       <p:ext uri="{BB962C8B-B14F-4D97-AF65-F5344CB8AC3E}">
-        <p14:creationId xmlns:p14="http://schemas.microsoft.com/office/powerpoint/2010/main" val="1249991632"/>
+        <p14:creationId xmlns:p14="http://schemas.microsoft.com/office/powerpoint/2010/main" val="1422341922"/>
       </p:ext>
     </p:extLst>
   </p:cSld>
@@ -13773,7 +13773,7 @@
           <p:cNvPr id="9" name="creative_background_master">
             <a:extLst>
               <a:ext uri="{FF2B5EF4-FFF2-40B4-BE49-F238E27FC236}">
-                <a16:creationId xmlns:a16="http://schemas.microsoft.com/office/drawing/2014/main" id="{6FC0AE8F-6E6C-CA2C-0DE7-E7B9D8BC77F4}"/>
+                <a16:creationId xmlns:a16="http://schemas.microsoft.com/office/drawing/2014/main" id="{9113E1F9-935E-7901-C5EA-7E63EEB6788C}"/>
               </a:ext>
             </a:extLst>
           </p:cNvPr>
@@ -13934,9 +13934,9 @@
             </a:lvl1pPr>
           </a:lstStyle>
           <a:p>
-            <a:fld id="{C5DDA866-DF04-4AEF-ADD4-8AFF018326A8}" type="datetimeFigureOut">
+            <a:fld id="{6A94A3F5-3F5C-489D-BBF0-F0DE1F7D2FCF}" type="datetimeFigureOut">
               <a:rPr lang="en-US" smtClean="0"/>
-              <a:t>10/3/2026</a:t>
+              <a:t>10/4/2026</a:t>
             </a:fld>
             <a:endParaRPr lang="en-US"/>
           </a:p>
@@ -14016,7 +14016,7 @@
             </a:lvl1pPr>
           </a:lstStyle>
           <a:p>
-            <a:fld id="{B3BADF7A-34E3-4F53-BB65-9FE23DA90D0C}" type="slidenum">
+            <a:fld id="{F2F39956-E560-479A-B447-9AC211AA0B75}" type="slidenum">
               <a:rPr lang="en-US" smtClean="0"/>
               <a:t>‹#›</a:t>
             </a:fld>
@@ -14027,7 +14027,7 @@
     </p:spTree>
     <p:extLst>
       <p:ext uri="{BB962C8B-B14F-4D97-AF65-F5344CB8AC3E}">
-        <p14:creationId xmlns:p14="http://schemas.microsoft.com/office/powerpoint/2010/main" val="2120572356"/>
+        <p14:creationId xmlns:p14="http://schemas.microsoft.com/office/powerpoint/2010/main" val="1333863510"/>
       </p:ext>
     </p:extLst>
   </p:cSld>
